--- a/docs/weekly/assets/최종발표장표.pptx
+++ b/docs/weekly/assets/최종발표장표.pptx
@@ -1632,50 +1632,125 @@
               <a:buNone/>
             </a:pPr>
             <a:r>
+              <a:rPr sz="950" b="1">
+                <a:solidFill>
+                  <a:srgbClr val="333333"/>
+                </a:solidFill>
+                <a:latin typeface="Arial"/>
+              </a:rPr>
+              <a:t>화면-서비스 매핑(nctRid)이 명명 규칙과 불일치</a:t>
+            </a:r>
+            <a:endParaRPr lang="en-US" sz="900" dirty="0"/>
+          </a:p>
+          <a:p>
+            <a:pPr algn="l"/>
+            <a:r>
               <a:rPr sz="900" b="0">
                 <a:solidFill>
+                  <a:srgbClr val="666666"/>
+                </a:solidFill>
+                <a:latin typeface="Arial"/>
+              </a:rPr>
+              <a:t>→ 서버 로직 1건 전환에 P·F·D·XSQL 4종 파일 수작업 추적</a:t>
+            </a:r>
+          </a:p>
+          <a:p>
+            <a:pPr algn="l"/>
+            <a:r>
+              <a:rPr sz="300" b="0">
+                <a:solidFill>
+                  <a:srgbClr val="666666"/>
+                </a:solidFill>
+                <a:latin typeface="Arial"/>
+              </a:rPr>
+              <a:t/>
+            </a:r>
+          </a:p>
+          <a:p>
+            <a:pPr algn="l"/>
+            <a:r>
+              <a:rPr sz="900" b="1">
+                <a:solidFill>
+                  <a:srgbClr val="00A591"/>
+                </a:solidFill>
+                <a:latin typeface="Arial"/>
+              </a:rPr>
+              <a:t>규모  </a:t>
+            </a:r>
+            <a:r>
+              <a:rPr sz="900" b="0">
+                <a:solidFill>
+                  <a:srgbClr val="666666"/>
+                </a:solidFill>
+                <a:latin typeface="Arial"/>
+              </a:rPr>
+              <a:t>1,416개 화면에서 동일 추적 반복</a:t>
+            </a:r>
+          </a:p>
+          <a:p>
+            <a:pPr algn="l"/>
+            <a:r>
+              <a:rPr sz="900" b="1">
+                <a:solidFill>
+                  <a:srgbClr val="00A591"/>
+                </a:solidFill>
+                <a:latin typeface="Arial"/>
+              </a:rPr>
+              <a:t>품질  </a:t>
+            </a:r>
+            <a:r>
+              <a:rPr sz="900" b="0">
+                <a:solidFill>
+                  <a:srgbClr val="666666"/>
+                </a:solidFill>
+                <a:latin typeface="Arial"/>
+              </a:rPr>
+              <a:t>개발자별 응답·예외 처리 이원화</a:t>
+            </a:r>
+          </a:p>
+          <a:p>
+            <a:pPr algn="l"/>
+            <a:r>
+              <a:rPr sz="900" b="1">
+                <a:solidFill>
+                  <a:srgbClr val="00A591"/>
+                </a:solidFill>
+                <a:latin typeface="Arial"/>
+              </a:rPr>
+              <a:t>리스크  </a:t>
+            </a:r>
+            <a:r>
+              <a:rPr sz="900" b="0">
+                <a:solidFill>
+                  <a:srgbClr val="666666"/>
+                </a:solidFill>
+                <a:latin typeface="Arial"/>
+              </a:rPr>
+              <a:t>원본에 결함 혼재 — 컴파일 불가·XML·SQL 오류</a:t>
+            </a:r>
+          </a:p>
+          <a:p>
+            <a:pPr algn="l"/>
+            <a:r>
+              <a:rPr sz="300" b="0">
+                <a:solidFill>
+                  <a:srgbClr val="666666"/>
+                </a:solidFill>
+                <a:latin typeface="Arial"/>
+              </a:rPr>
+              <a:t/>
+            </a:r>
+          </a:p>
+          <a:p>
+            <a:pPr algn="l"/>
+            <a:r>
+              <a:rPr sz="900" b="1">
+                <a:solidFill>
                   <a:srgbClr val="333333"/>
                 </a:solidFill>
                 <a:latin typeface="Arial"/>
               </a:rPr>
-              <a:t>화면-서비스 매핑(nctRid)이 명명 규칙과 일치하지 않아, 서버 로직 하나를 전환하려면 화면마다 P·F·D BizUnit과 XSQL 4종 파일을 사람이 직접 추적해야 합니다.</a:t>
-            </a:r>
-            <a:endParaRPr lang="en-US" sz="900" dirty="0"/>
-          </a:p>
-          <a:p>
-            <a:pPr algn="l"/>
-            <a:r>
-              <a:rPr sz="400" b="0">
-                <a:solidFill>
-                  <a:srgbClr val="666666"/>
-                </a:solidFill>
-                <a:latin typeface="Arial"/>
-              </a:rPr>
-              <a:t/>
-            </a:r>
-          </a:p>
-          <a:p>
-            <a:pPr algn="l"/>
-            <a:r>
-              <a:rPr sz="900" b="1">
-                <a:solidFill>
-                  <a:srgbClr val="00A591"/>
-                </a:solidFill>
-                <a:latin typeface="Arial"/>
-              </a:rPr>
-              <a:t>비즈니스 임팩트</a:t>
-            </a:r>
-          </a:p>
-          <a:p>
-            <a:pPr algn="l"/>
-            <a:r>
-              <a:rPr sz="900" b="0">
-                <a:solidFill>
-                  <a:srgbClr val="666666"/>
-                </a:solidFill>
-                <a:latin typeface="Arial"/>
-              </a:rPr>
-              <a:t>이 추적이 1,416개 화면에서 반복됩니다. 게다가 원본 자체에 결함(컴파일 불가·XML 태그 불일치·SQL 문법 오류)이 섞여 있어, 정상 원본을 전제한 도구는 첫 화면에서 멈춥니다.</a:t>
+              <a:t>정상 원본을 전제한 도구는 첫 화면에서 멈춤</a:t>
             </a:r>
           </a:p>
         </p:txBody>
@@ -1796,20 +1871,20 @@
               <a:buNone/>
             </a:pPr>
             <a:r>
-              <a:rPr sz="900" b="0">
+              <a:rPr sz="950" b="1">
                 <a:solidFill>
                   <a:srgbClr val="333333"/>
                 </a:solidFill>
                 <a:latin typeface="Arial"/>
               </a:rPr>
-              <a:t>폴더를 지정하면 계획 수립부터 빌드 검증까지 8단계가 자동 진행되고, 사람이 승인해야만 산출물이 반영되는 레거시 전환 파이프라인</a:t>
+              <a:t>폴더 지정 → 8단계 자동 진행 → 사람 승인 후에만 반영</a:t>
             </a:r>
             <a:endParaRPr lang="en-US" sz="900" dirty="0"/>
           </a:p>
           <a:p>
             <a:pPr algn="l"/>
             <a:r>
-              <a:rPr sz="400" b="0">
+              <a:rPr sz="300" b="0">
                 <a:solidFill>
                   <a:srgbClr val="666666"/>
                 </a:solidFill>
@@ -1833,48 +1908,72 @@
           <a:p>
             <a:pPr algn="l"/>
             <a:r>
-              <a:rPr sz="900" b="0">
+              <a:rPr sz="850" b="0">
                 <a:solidFill>
                   <a:srgbClr val="666666"/>
                 </a:solidFill>
                 <a:latin typeface="Arial"/>
               </a:rPr>
-              <a:t>Planner [계획을 파일로 고정]  →  Translator [규칙·LLM 분업]</a:t>
+              <a:t>Planner  계획 파일 고정 (LLM 미사용)</a:t>
             </a:r>
           </a:p>
           <a:p>
             <a:pPr algn="l"/>
             <a:r>
-              <a:rPr sz="900" b="0">
+              <a:rPr sz="850" b="0">
                 <a:solidFill>
                   <a:srgbClr val="666666"/>
                 </a:solidFill>
                 <a:latin typeface="Arial"/>
               </a:rPr>
-              <a:t>→  Validator [변환기와 분리]  →  Repairer [자기 수정, 상한 2]</a:t>
+              <a:t>Translator  규칙 46% / LLM 54% 분업</a:t>
             </a:r>
           </a:p>
           <a:p>
             <a:pPr algn="l"/>
             <a:r>
-              <a:rPr sz="900" b="0">
+              <a:rPr sz="850" b="0">
                 <a:solidFill>
                   <a:srgbClr val="666666"/>
                 </a:solidFill>
                 <a:latin typeface="Arial"/>
               </a:rPr>
-              <a:t>→  Human Approval [승인 전 저장 없음]</a:t>
+              <a:t>Validator  변환기와 분리</a:t>
             </a:r>
           </a:p>
           <a:p>
             <a:pPr algn="l"/>
             <a:r>
-              <a:rPr sz="400" b="0">
+              <a:rPr sz="850" b="0">
                 <a:solidFill>
                   <a:srgbClr val="666666"/>
                 </a:solidFill>
                 <a:latin typeface="Arial"/>
               </a:rPr>
+              <a:t>Repairer  자기 수정, 라운드 상한 2</a:t>
+            </a:r>
+          </a:p>
+          <a:p>
+            <a:pPr algn="l"/>
+            <a:r>
+              <a:rPr sz="850" b="0">
+                <a:solidFill>
+                  <a:srgbClr val="666666"/>
+                </a:solidFill>
+                <a:latin typeface="Arial"/>
+              </a:rPr>
+              <a:t>Human Approval  승인 전 저장 0건</a:t>
+            </a:r>
+          </a:p>
+          <a:p>
+            <a:pPr algn="l"/>
+            <a:r>
+              <a:rPr sz="300" b="0">
+                <a:solidFill>
+                  <a:srgbClr val="666666"/>
+                </a:solidFill>
+                <a:latin typeface="Arial"/>
+              </a:rPr>
               <a:t/>
             </a:r>
           </a:p>
@@ -1887,19 +1986,31 @@
                 </a:solidFill>
                 <a:latin typeface="Arial"/>
               </a:rPr>
-              <a:t>핵심 기술 스택</a:t>
+              <a:t>기술 스택</a:t>
             </a:r>
           </a:p>
           <a:p>
             <a:pPr algn="l"/>
             <a:r>
-              <a:rPr sz="900" b="0">
+              <a:rPr sz="850" b="0">
                 <a:solidFill>
                   <a:srgbClr val="666666"/>
                 </a:solidFill>
                 <a:latin typeface="Arial"/>
               </a:rPr>
-              <a:t>LangGraph StateGraph / MCP(Model Context Protocol) / Azure OpenAI 호환 사내 LLM Gateway / Tree-of-Thoughts / Oracle</a:t>
+              <a:t>LangGraph StateGraph · MCP(Model Context Protocol)</a:t>
+            </a:r>
+          </a:p>
+          <a:p>
+            <a:pPr algn="l"/>
+            <a:r>
+              <a:rPr sz="850" b="0">
+                <a:solidFill>
+                  <a:srgbClr val="666666"/>
+                </a:solidFill>
+                <a:latin typeface="Arial"/>
+              </a:rPr>
+              <a:t>Azure OpenAI 호환 사내 LLM Gateway · Tree-of-Thoughts · Oracle</a:t>
             </a:r>
           </a:p>
         </p:txBody>
@@ -2026,7 +2137,7 @@
                 </a:solidFill>
                 <a:latin typeface="Arial"/>
               </a:rPr>
-              <a:t>정답키 30화면 대조 · 오탐 0건</a:t>
+              <a:t>30화면 정답키 · 오탐 0건</a:t>
             </a:r>
           </a:p>
         </p:txBody>
@@ -2114,7 +2225,7 @@
                 </a:solidFill>
                 <a:latin typeface="Arial"/>
               </a:rPr>
-              <a:t>29/30건 · 실패 1건은 원본 버그</a:t>
+              <a:t>29/30건</a:t>
             </a:r>
           </a:p>
         </p:txBody>
@@ -2190,7 +2301,7 @@
                 </a:solidFill>
                 <a:latin typeface="Arial"/>
               </a:rPr>
-              <a:t>사람 수정 라인 비율  —  리뷰 대상 87.3% 축소</a:t>
+              <a:t>사람 수정 라인 비율  ·  리뷰 대상 87.3% 축소</a:t>
             </a:r>
           </a:p>
           <a:p>
@@ -2202,7 +2313,7 @@
                 </a:solidFill>
                 <a:latin typeface="Arial"/>
               </a:rPr>
-              <a:t>자동 생성 1,960줄 중 4줄. AI 리뷰어 1차 기준 하한값입니다.</a:t>
+              <a:t>생성 1,960줄 중 4줄 · AI 리뷰어 1차 기준 하한값</a:t>
             </a:r>
           </a:p>
         </p:txBody>
@@ -2298,38 +2409,38 @@
               <a:buNone/>
             </a:pPr>
             <a:r>
-              <a:rPr sz="1000" b="1">
+              <a:rPr sz="1050" b="1">
                 <a:solidFill>
                   <a:srgbClr val="333333"/>
                 </a:solidFill>
                 <a:latin typeface="Arial"/>
               </a:rPr>
-              <a:t>“결정론으로 풀리는 변환에 LLM을 쓰지 않아 호출을 46% 줄이면서,</a:t>
+              <a:t>“결정론 변환에 LLM을 쓰지 않아 호출 46% 절감,</a:t>
             </a:r>
             <a:endParaRPr lang="en-US" sz="950" dirty="0"/>
           </a:p>
           <a:p>
             <a:pPr algn="l"/>
             <a:r>
-              <a:rPr sz="1000" b="1">
+              <a:rPr sz="1050" b="1">
                 <a:solidFill>
                   <a:srgbClr val="333333"/>
                 </a:solidFill>
                 <a:latin typeface="Arial"/>
               </a:rPr>
-              <a:t>정적 검증을 통과한 코드가 실행에서는 33%만 맞다는 사실까지</a:t>
+              <a:t>정적 검증 통과 코드의 실행 일치율 33%를</a:t>
             </a:r>
           </a:p>
           <a:p>
             <a:pPr algn="l"/>
             <a:r>
-              <a:rPr sz="1000" b="1">
+              <a:rPr sz="1050" b="1">
                 <a:solidFill>
                   <a:srgbClr val="333333"/>
                 </a:solidFill>
                 <a:latin typeface="Arial"/>
               </a:rPr>
-              <a:t>직접 측정해 100%로 닫았습니다.”</a:t>
+              <a:t>직접 측정해 100%로 개선”</a:t>
             </a:r>
           </a:p>
           <a:p>
@@ -2353,7 +2464,7 @@
                 </a:solidFill>
                 <a:latin typeface="Arial"/>
               </a:rPr>
-              <a:t>전환 스코어카드 80.9점 / 100  ·  측정 범위를 넓혀 88.2점에서 스스로 내린 값입니다.</a:t>
+              <a:t>전환 스코어카드 80.9 / 100  ·  측정 범위 확대로 88.2에서 하향</a:t>
             </a:r>
           </a:p>
         </p:txBody>
@@ -2885,7 +2996,7 @@
                 </a:solidFill>
                 <a:latin typeface="Arial"/>
               </a:rPr>
-              <a:t>선택 이유 </a:t>
+              <a:t>선택 이유  </a:t>
             </a:r>
             <a:r>
               <a:rPr sz="800" b="0">
@@ -2894,7 +3005,7 @@
                 </a:solidFill>
                 <a:latin typeface="Arial"/>
               </a:rPr>
-              <a:t>단순 ReAct는 1,416회 반복 작업에서 화면마다 다른 경로를 밟아 일관성을 잃습니다.</a:t>
+              <a:t>ReAct 자율 탐색은 1,416회 반복에서 화면마다 경로가 갈림</a:t>
             </a:r>
             <a:endParaRPr lang="en-US" sz="850" dirty="0"/>
           </a:p>
@@ -2907,7 +3018,7 @@
                 </a:solidFill>
                 <a:latin typeface="Arial"/>
               </a:rPr>
-              <a:t>핵심 활용 </a:t>
+              <a:t>핵심 활용  </a:t>
             </a:r>
             <a:r>
               <a:rPr sz="800" b="0">
@@ -2916,7 +3027,28 @@
                 </a:solidFill>
                 <a:latin typeface="Arial"/>
               </a:rPr>
-              <a:t>Planner가 코드 생성 전에 계획을 파일로 확정하고, 이후 단계는 그 계획이 지목한 대상만 호출합니다. 모델이 도구를 스스로 고르지 않습니다.</a:t>
+              <a:t>계획을 파일로 확정 → 이후 단계는 지목된 대상만 호출. Send() fan-out 병렬</a:t>
+            </a:r>
+          </a:p>
+          <a:p>
+            <a:pPr algn="l"/>
+            <a:r>
+              <a:rPr sz="800" b="1">
+                <a:solidFill>
+                  <a:srgbClr val="1F3564"/>
+                </a:solidFill>
+                <a:latin typeface="Arial"/>
+              </a:rPr>
+              <a:t>강점  </a:t>
+            </a:r>
+            <a:r>
+              <a:rPr sz="800" b="1">
+                <a:solidFill>
+                  <a:srgbClr val="1F3564"/>
+                </a:solidFill>
+                <a:latin typeface="Arial"/>
+              </a:rPr>
+              <a:t>계획이 도구 호출을 지휘 — 재현·리뷰·재실행 가능</a:t>
             </a:r>
           </a:p>
         </p:txBody>
@@ -3107,7 +3239,7 @@
                 </a:solidFill>
                 <a:latin typeface="Arial"/>
               </a:rPr>
-              <a:t>선택 이유 </a:t>
+              <a:t>선택 이유  </a:t>
             </a:r>
             <a:r>
               <a:rPr sz="800" b="0">
@@ -3116,7 +3248,7 @@
                 </a:solidFill>
                 <a:latin typeface="Arial"/>
               </a:rPr>
-              <a:t>모델이 도구를 동적으로 고른다는 MCP 본래 가치는 '자율 탐색 에이전트를 만들지 않는다'는 원칙과 충돌합니다. 그래서 표면을 갈랐습니다.</a:t>
+              <a:t>도구 동적 선택은 '자율 탐색 배제' 원칙과 충돌 → 표면 분리</a:t>
             </a:r>
             <a:endParaRPr lang="en-US" sz="850" dirty="0"/>
           </a:p>
@@ -3129,7 +3261,7 @@
                 </a:solidFill>
                 <a:latin typeface="Arial"/>
               </a:rPr>
-              <a:t>핵심 활용 </a:t>
+              <a:t>핵심 활용  </a:t>
             </a:r>
             <a:r>
               <a:rPr sz="800" b="0">
@@ -3138,7 +3270,28 @@
                 </a:solidFill>
                 <a:latin typeface="Arial"/>
               </a:rPr>
-              <a:t>변환 실행은 노출하지 않고 부작용 없는 조회 4종만 노출. 실제 MCP 클라이언트로 stdio 연결해 검증했습니다.</a:t>
+              <a:t>조회 4종만 노출, 변환 실행 미노출. 실 클라이언트 stdio 연결 검증</a:t>
+            </a:r>
+          </a:p>
+          <a:p>
+            <a:pPr algn="l"/>
+            <a:r>
+              <a:rPr sz="800" b="1">
+                <a:solidFill>
+                  <a:srgbClr val="1F3564"/>
+                </a:solidFill>
+                <a:latin typeface="Arial"/>
+              </a:rPr>
+              <a:t>강점  </a:t>
+            </a:r>
+            <a:r>
+              <a:rPr sz="800" b="1">
+                <a:solidFill>
+                  <a:srgbClr val="1F3564"/>
+                </a:solidFill>
+                <a:latin typeface="Arial"/>
+              </a:rPr>
+              <a:t>표준 프로토콜을 열되 승인 게이트는 우회 불가</a:t>
             </a:r>
           </a:p>
         </p:txBody>
@@ -3329,7 +3482,7 @@
                 </a:solidFill>
                 <a:latin typeface="Arial"/>
               </a:rPr>
-              <a:t>선택 이유 </a:t>
+              <a:t>선택 이유  </a:t>
             </a:r>
             <a:r>
               <a:rPr sz="800" b="0">
@@ -3338,7 +3491,7 @@
                 </a:solidFill>
                 <a:latin typeface="Arial"/>
               </a:rPr>
-              <a:t>일반적인 ToT는 모델이 자기 가지를 자기가 평가합니다. 여기엔 결정론적 검증기가 이미 있어 그 약점을 피할 수 있었습니다.</a:t>
+              <a:t>통상 ToT는 모델이 자기 가지를 자평 → 결정론적 검증기로 대체</a:t>
             </a:r>
             <a:endParaRPr lang="en-US" sz="850" dirty="0"/>
           </a:p>
@@ -3351,7 +3504,7 @@
                 </a:solidFill>
                 <a:latin typeface="Arial"/>
               </a:rPr>
-              <a:t>핵심 활용 </a:t>
+              <a:t>핵심 활용  </a:t>
             </a:r>
             <a:r>
               <a:rPr sz="800" b="0">
@@ -3360,7 +3513,28 @@
                 </a:solidFill>
                 <a:latin typeface="Arial"/>
               </a:rPr>
-              <a:t>후보를 병렬 생성 → 검증기가 잔여 BLOCKER 수로 채점 (MatchFixAgent/ACToR).</a:t>
+              <a:t>후보 병렬 생성 → 잔여 BLOCKER 수로 채점 (MatchFixAgent/ACToR)</a:t>
+            </a:r>
+          </a:p>
+          <a:p>
+            <a:pPr algn="l"/>
+            <a:r>
+              <a:rPr sz="800" b="1">
+                <a:solidFill>
+                  <a:srgbClr val="1F3564"/>
+                </a:solidFill>
+                <a:latin typeface="Arial"/>
+              </a:rPr>
+              <a:t>강점  </a:t>
+            </a:r>
+            <a:r>
+              <a:rPr sz="800" b="1">
+                <a:solidFill>
+                  <a:srgbClr val="1F3564"/>
+                </a:solidFill>
+                <a:latin typeface="Arial"/>
+              </a:rPr>
+              <a:t>채점자가 LLM이 아니라 결정론적 검증기</a:t>
             </a:r>
           </a:p>
         </p:txBody>
@@ -3408,8 +3582,8 @@
         </p:nvSpPr>
         <p:spPr>
           <a:xfrm>
-            <a:off x="400000" y="885000"/>
-            <a:ext cx="841200" cy="210000"/>
+            <a:off x="400000" y="870000"/>
+            <a:ext cx="841200" cy="250000"/>
           </a:xfrm>
           <a:prstGeom prst="roundRect">
             <a:avLst/>
@@ -3461,8 +3635,8 @@
         </p:nvSpPr>
         <p:spPr>
           <a:xfrm>
-            <a:off x="1277200" y="885000"/>
-            <a:ext cx="841200" cy="210000"/>
+            <a:off x="1277200" y="870000"/>
+            <a:ext cx="841200" cy="250000"/>
           </a:xfrm>
           <a:prstGeom prst="roundRect">
             <a:avLst/>
@@ -3514,8 +3688,8 @@
         </p:nvSpPr>
         <p:spPr>
           <a:xfrm>
-            <a:off x="2154400" y="885000"/>
-            <a:ext cx="841200" cy="210000"/>
+            <a:off x="2154400" y="870000"/>
+            <a:ext cx="841200" cy="250000"/>
           </a:xfrm>
           <a:prstGeom prst="roundRect">
             <a:avLst/>
@@ -3567,8 +3741,8 @@
         </p:nvSpPr>
         <p:spPr>
           <a:xfrm>
-            <a:off x="3031600" y="885000"/>
-            <a:ext cx="841200" cy="210000"/>
+            <a:off x="3031600" y="870000"/>
+            <a:ext cx="841200" cy="250000"/>
           </a:xfrm>
           <a:prstGeom prst="roundRect">
             <a:avLst/>
@@ -3620,8 +3794,8 @@
         </p:nvSpPr>
         <p:spPr>
           <a:xfrm>
-            <a:off x="3908800" y="885000"/>
-            <a:ext cx="841200" cy="210000"/>
+            <a:off x="3908800" y="870000"/>
+            <a:ext cx="841200" cy="250000"/>
           </a:xfrm>
           <a:prstGeom prst="roundRect">
             <a:avLst/>
@@ -3673,8 +3847,8 @@
         </p:nvSpPr>
         <p:spPr>
           <a:xfrm>
-            <a:off x="2529280" y="1103000"/>
-            <a:ext cx="91440" cy="70000"/>
+            <a:off x="2529280" y="1128000"/>
+            <a:ext cx="91440" cy="74000"/>
           </a:xfrm>
           <a:prstGeom prst="downArrow">
             <a:avLst/>
@@ -3717,14 +3891,304 @@
         </p:nvSpPr>
         <p:spPr>
           <a:xfrm>
-            <a:off x="400000" y="1181000"/>
-            <a:ext cx="4350000" cy="2783000"/>
+            <a:off x="400000" y="1210000"/>
+            <a:ext cx="4350000" cy="620000"/>
           </a:xfrm>
           <a:prstGeom prst="roundRect">
             <a:avLst/>
           </a:prstGeom>
           <a:solidFill>
-            <a:srgbClr val="FAFBFC"/>
+            <a:srgbClr val="1F3564"/>
+          </a:solidFill>
+          <a:ln w="19050">
+            <a:solidFill>
+              <a:srgbClr val="00A591"/>
+            </a:solidFill>
+          </a:ln>
+          <a:effectLst/>
+        </p:spPr>
+        <p:style>
+          <a:lnRef idx="1">
+            <a:schemeClr val="accent1"/>
+          </a:lnRef>
+          <a:fillRef idx="3">
+            <a:schemeClr val="accent1"/>
+          </a:fillRef>
+          <a:effectRef idx="2">
+            <a:schemeClr val="accent1"/>
+          </a:effectRef>
+          <a:fontRef idx="minor">
+            <a:schemeClr val="lt1"/>
+          </a:fontRef>
+        </p:style>
+        <p:txBody>
+          <a:bodyPr rtlCol="0" anchor="ctr" wrap="square" lIns="28000" rIns="28000" tIns="14000" bIns="14000"/>
+          <a:lstStyle/>
+          <a:p>
+            <a:pPr algn="ctr"/>
+            <a:r>
+              <a:rPr sz="950" b="1">
+                <a:solidFill>
+                  <a:srgbClr val="FFFFFF"/>
+                </a:solidFill>
+                <a:latin typeface="Arial"/>
+              </a:rPr>
+              <a:t>① Planner  —  무엇을 어떤 도구로 처리할지 먼저 판단한다</a:t>
+            </a:r>
+          </a:p>
+          <a:p>
+            <a:pPr algn="ctr"/>
+            <a:r>
+              <a:rPr sz="750" b="0">
+                <a:solidFill>
+                  <a:srgbClr val="C9D6E8"/>
+                </a:solidFill>
+                <a:latin typeface="Arial"/>
+              </a:rPr>
+              <a:t>메서드 단위로 규칙 / LLM을 가르고, 호출 대상·순서·예산을 확정</a:t>
+            </a:r>
+          </a:p>
+          <a:p>
+            <a:pPr algn="ctr"/>
+            <a:r>
+              <a:rPr sz="700" b="0">
+                <a:solidFill>
+                  <a:srgbClr val="00A591"/>
+                </a:solidFill>
+                <a:latin typeface="Arial"/>
+              </a:rPr>
+              <a:t>정적 분석 · LLM 미사용 · conversion-plan.json 으로 고정</a:t>
+            </a:r>
+          </a:p>
+        </p:txBody>
+      </p:sp>
+      <p:sp>
+        <p:nvSpPr>
+          <p:cNvPr id="38" name="Down Arrow 37"/>
+          <p:cNvSpPr/>
+          <p:nvPr/>
+        </p:nvSpPr>
+        <p:spPr>
+          <a:xfrm>
+            <a:off x="898030" y="1838000"/>
+            <a:ext cx="91440" cy="74000"/>
+          </a:xfrm>
+          <a:prstGeom prst="downArrow">
+            <a:avLst/>
+          </a:prstGeom>
+          <a:solidFill>
+            <a:srgbClr val="C5CED8"/>
+          </a:solidFill>
+          <a:ln>
+            <a:noFill/>
+          </a:ln>
+          <a:effectLst/>
+        </p:spPr>
+        <p:style>
+          <a:lnRef idx="1">
+            <a:schemeClr val="accent1"/>
+          </a:lnRef>
+          <a:fillRef idx="3">
+            <a:schemeClr val="accent1"/>
+          </a:fillRef>
+          <a:effectRef idx="2">
+            <a:schemeClr val="accent1"/>
+          </a:effectRef>
+          <a:fontRef idx="minor">
+            <a:schemeClr val="lt1"/>
+          </a:fontRef>
+        </p:style>
+        <p:txBody>
+          <a:bodyPr rtlCol="0" anchor="ctr"/>
+          <a:lstStyle/>
+          <a:p>
+            <a:pPr algn="ctr"/>
+          </a:p>
+        </p:txBody>
+      </p:sp>
+      <p:sp>
+        <p:nvSpPr>
+          <p:cNvPr id="39" name="Down Arrow 38"/>
+          <p:cNvSpPr/>
+          <p:nvPr/>
+        </p:nvSpPr>
+        <p:spPr>
+          <a:xfrm>
+            <a:off x="1985530" y="1838000"/>
+            <a:ext cx="91440" cy="74000"/>
+          </a:xfrm>
+          <a:prstGeom prst="downArrow">
+            <a:avLst/>
+          </a:prstGeom>
+          <a:solidFill>
+            <a:srgbClr val="C5CED8"/>
+          </a:solidFill>
+          <a:ln>
+            <a:noFill/>
+          </a:ln>
+          <a:effectLst/>
+        </p:spPr>
+        <p:style>
+          <a:lnRef idx="1">
+            <a:schemeClr val="accent1"/>
+          </a:lnRef>
+          <a:fillRef idx="3">
+            <a:schemeClr val="accent1"/>
+          </a:fillRef>
+          <a:effectRef idx="2">
+            <a:schemeClr val="accent1"/>
+          </a:effectRef>
+          <a:fontRef idx="minor">
+            <a:schemeClr val="lt1"/>
+          </a:fontRef>
+        </p:style>
+        <p:txBody>
+          <a:bodyPr rtlCol="0" anchor="ctr"/>
+          <a:lstStyle/>
+          <a:p>
+            <a:pPr algn="ctr"/>
+          </a:p>
+        </p:txBody>
+      </p:sp>
+      <p:sp>
+        <p:nvSpPr>
+          <p:cNvPr id="40" name="Down Arrow 39"/>
+          <p:cNvSpPr/>
+          <p:nvPr/>
+        </p:nvSpPr>
+        <p:spPr>
+          <a:xfrm>
+            <a:off x="3073030" y="1838000"/>
+            <a:ext cx="91440" cy="74000"/>
+          </a:xfrm>
+          <a:prstGeom prst="downArrow">
+            <a:avLst/>
+          </a:prstGeom>
+          <a:solidFill>
+            <a:srgbClr val="C5CED8"/>
+          </a:solidFill>
+          <a:ln>
+            <a:noFill/>
+          </a:ln>
+          <a:effectLst/>
+        </p:spPr>
+        <p:style>
+          <a:lnRef idx="1">
+            <a:schemeClr val="accent1"/>
+          </a:lnRef>
+          <a:fillRef idx="3">
+            <a:schemeClr val="accent1"/>
+          </a:fillRef>
+          <a:effectRef idx="2">
+            <a:schemeClr val="accent1"/>
+          </a:effectRef>
+          <a:fontRef idx="minor">
+            <a:schemeClr val="lt1"/>
+          </a:fontRef>
+        </p:style>
+        <p:txBody>
+          <a:bodyPr rtlCol="0" anchor="ctr"/>
+          <a:lstStyle/>
+          <a:p>
+            <a:pPr algn="ctr"/>
+          </a:p>
+        </p:txBody>
+      </p:sp>
+      <p:sp>
+        <p:nvSpPr>
+          <p:cNvPr id="41" name="Down Arrow 40"/>
+          <p:cNvSpPr/>
+          <p:nvPr/>
+        </p:nvSpPr>
+        <p:spPr>
+          <a:xfrm>
+            <a:off x="4160530" y="1838000"/>
+            <a:ext cx="91440" cy="74000"/>
+          </a:xfrm>
+          <a:prstGeom prst="downArrow">
+            <a:avLst/>
+          </a:prstGeom>
+          <a:solidFill>
+            <a:srgbClr val="C5CED8"/>
+          </a:solidFill>
+          <a:ln>
+            <a:noFill/>
+          </a:ln>
+          <a:effectLst/>
+        </p:spPr>
+        <p:style>
+          <a:lnRef idx="1">
+            <a:schemeClr val="accent1"/>
+          </a:lnRef>
+          <a:fillRef idx="3">
+            <a:schemeClr val="accent1"/>
+          </a:fillRef>
+          <a:effectRef idx="2">
+            <a:schemeClr val="accent1"/>
+          </a:effectRef>
+          <a:fontRef idx="minor">
+            <a:schemeClr val="lt1"/>
+          </a:fontRef>
+        </p:style>
+        <p:txBody>
+          <a:bodyPr rtlCol="0" anchor="ctr"/>
+          <a:lstStyle/>
+          <a:p>
+            <a:pPr algn="ctr"/>
+          </a:p>
+        </p:txBody>
+      </p:sp>
+      <p:sp>
+        <p:nvSpPr>
+          <p:cNvPr id="42" name="TextBox 41"/>
+          <p:cNvSpPr txBox="1"/>
+          <p:nvPr/>
+        </p:nvSpPr>
+        <p:spPr>
+          <a:xfrm>
+            <a:off x="400000" y="1844000"/>
+            <a:ext cx="4350000" cy="120000"/>
+          </a:xfrm>
+          <a:prstGeom prst="rect">
+            <a:avLst/>
+          </a:prstGeom>
+          <a:noFill/>
+        </p:spPr>
+        <p:txBody>
+          <a:bodyPr wrap="square" lIns="0" rIns="0" tIns="0" bIns="0">
+            <a:spAutoFit/>
+          </a:bodyPr>
+          <a:lstStyle/>
+          <a:p>
+            <a:pPr algn="l"/>
+            <a:r>
+              <a:rPr sz="600" b="0">
+                <a:solidFill>
+                  <a:srgbClr val="666666"/>
+                </a:solidFill>
+                <a:latin typeface="Arial"/>
+              </a:rPr>
+              <a:t/>
+            </a:r>
+          </a:p>
+        </p:txBody>
+      </p:sp>
+      <p:sp>
+        <p:nvSpPr>
+          <p:cNvPr id="43" name="Rounded Rectangle 42"/>
+          <p:cNvSpPr/>
+          <p:nvPr/>
+        </p:nvSpPr>
+        <p:spPr>
+          <a:xfrm>
+            <a:off x="400000" y="1920000"/>
+            <a:ext cx="4350000" cy="1191000"/>
+          </a:xfrm>
+          <a:prstGeom prst="roundRect">
+            <a:avLst/>
+          </a:prstGeom>
+          <a:solidFill>
+            <a:srgbClr val="F7F9FA"/>
           </a:solidFill>
           <a:ln w="9525">
             <a:solidFill>
@@ -3757,14 +4221,14 @@
       </p:sp>
       <p:sp>
         <p:nvSpPr>
-          <p:cNvPr id="38" name="TextBox 37"/>
+          <p:cNvPr id="44" name="TextBox 43"/>
           <p:cNvSpPr txBox="1"/>
           <p:nvPr/>
         </p:nvSpPr>
         <p:spPr>
           <a:xfrm>
-            <a:off x="490000" y="1241000"/>
-            <a:ext cx="4170000" cy="150000"/>
+            <a:off x="500000" y="1975000"/>
+            <a:ext cx="4150000" cy="165000"/>
           </a:xfrm>
           <a:prstGeom prst="rect">
             <a:avLst/>
@@ -3785,21 +4249,21 @@
                 </a:solidFill>
                 <a:latin typeface="Arial"/>
               </a:rPr>
-              <a:t>LangGraph StateGraph  ·  고정 파이프라인  ·  ⑤→③ 자기 수정 루프 (상한 2)</a:t>
-            </a:r>
-          </a:p>
-        </p:txBody>
-      </p:sp>
-      <p:sp>
-        <p:nvSpPr>
-          <p:cNvPr id="39" name="Rounded Rectangle 38"/>
-          <p:cNvSpPr/>
-          <p:nvPr/>
-        </p:nvSpPr>
-        <p:spPr>
-          <a:xfrm>
-            <a:off x="490000" y="1416000"/>
-            <a:ext cx="3910000" cy="369666"/>
+              <a:t>Planner가 지목한 대상만 호출  —  모델이 도구를 스스로 고르지 않는다</a:t>
+            </a:r>
+          </a:p>
+        </p:txBody>
+      </p:sp>
+      <p:sp>
+        <p:nvSpPr>
+          <p:cNvPr id="45" name="Rounded Rectangle 44"/>
+          <p:cNvSpPr/>
+          <p:nvPr/>
+        </p:nvSpPr>
+        <p:spPr>
+          <a:xfrm>
+            <a:off x="520000" y="2125000"/>
+            <a:ext cx="993000" cy="430000"/>
           </a:xfrm>
           <a:prstGeom prst="roundRect">
             <a:avLst/>
@@ -3827,7 +4291,7 @@
           </a:fontRef>
         </p:style>
         <p:txBody>
-          <a:bodyPr rtlCol="0" anchor="ctr" wrap="square" lIns="36000" rIns="36000" tIns="18000" bIns="18000"/>
+          <a:bodyPr rtlCol="0" anchor="ctr" wrap="square" lIns="28000" rIns="28000" tIns="14000" bIns="14000"/>
           <a:lstStyle/>
           <a:p>
             <a:pPr algn="ctr"/>
@@ -3838,27 +4302,39 @@
                 </a:solidFill>
                 <a:latin typeface="Arial"/>
               </a:rPr>
-              <a:t>① 계획 수립  ·  conversion-plan.json 고정</a:t>
-            </a:r>
-          </a:p>
-        </p:txBody>
-      </p:sp>
-      <p:sp>
-        <p:nvSpPr>
-          <p:cNvPr id="40" name="Down Arrow 39"/>
-          <p:cNvSpPr/>
-          <p:nvPr/>
-        </p:nvSpPr>
-        <p:spPr>
-          <a:xfrm>
-            <a:off x="2399280" y="1791666"/>
-            <a:ext cx="91440" cy="40000"/>
-          </a:xfrm>
-          <a:prstGeom prst="downArrow">
-            <a:avLst/>
-          </a:prstGeom>
-          <a:solidFill>
-            <a:srgbClr val="C5CED8"/>
+              <a:t>② 규칙 변환기</a:t>
+            </a:r>
+          </a:p>
+          <a:p>
+            <a:pPr algn="ctr"/>
+            <a:r>
+              <a:rPr sz="650" b="0">
+                <a:solidFill>
+                  <a:srgbClr val="DDE6EE"/>
+                </a:solidFill>
+                <a:latin typeface="Arial"/>
+              </a:rPr>
+              <a:t>iBatis → MyBatis</a:t>
+            </a:r>
+          </a:p>
+        </p:txBody>
+      </p:sp>
+      <p:sp>
+        <p:nvSpPr>
+          <p:cNvPr id="46" name="Rounded Rectangle 45"/>
+          <p:cNvSpPr/>
+          <p:nvPr/>
+        </p:nvSpPr>
+        <p:spPr>
+          <a:xfrm>
+            <a:off x="1559000" y="2125000"/>
+            <a:ext cx="993000" cy="430000"/>
+          </a:xfrm>
+          <a:prstGeom prst="roundRect">
+            <a:avLst/>
+          </a:prstGeom>
+          <a:solidFill>
+            <a:srgbClr val="00A591"/>
           </a:solidFill>
           <a:ln>
             <a:noFill/>
@@ -3880,29 +4356,50 @@
           </a:fontRef>
         </p:style>
         <p:txBody>
-          <a:bodyPr rtlCol="0" anchor="ctr"/>
+          <a:bodyPr rtlCol="0" anchor="ctr" wrap="square" lIns="28000" rIns="28000" tIns="14000" bIns="14000"/>
           <a:lstStyle/>
           <a:p>
             <a:pPr algn="ctr"/>
-          </a:p>
-        </p:txBody>
-      </p:sp>
-      <p:sp>
-        <p:nvSpPr>
-          <p:cNvPr id="41" name="Rounded Rectangle 40"/>
-          <p:cNvSpPr/>
-          <p:nvPr/>
-        </p:nvSpPr>
-        <p:spPr>
-          <a:xfrm>
-            <a:off x="490000" y="1837666"/>
-            <a:ext cx="1931000" cy="369666"/>
+            <a:r>
+              <a:rPr sz="750" b="1">
+                <a:solidFill>
+                  <a:srgbClr val="FFFFFF"/>
+                </a:solidFill>
+                <a:latin typeface="Arial"/>
+              </a:rPr>
+              <a:t>② 골격·DTO 생성</a:t>
+            </a:r>
+          </a:p>
+          <a:p>
+            <a:pPr algn="ctr"/>
+            <a:r>
+              <a:rPr sz="650" b="0">
+                <a:solidFill>
+                  <a:srgbClr val="DDE6EE"/>
+                </a:solidFill>
+                <a:latin typeface="Arial"/>
+              </a:rPr>
+              <a:t>시그니처 → 클래스</a:t>
+            </a:r>
+          </a:p>
+        </p:txBody>
+      </p:sp>
+      <p:sp>
+        <p:nvSpPr>
+          <p:cNvPr id="47" name="Rounded Rectangle 46"/>
+          <p:cNvSpPr/>
+          <p:nvPr/>
+        </p:nvSpPr>
+        <p:spPr>
+          <a:xfrm>
+            <a:off x="2598000" y="2125000"/>
+            <a:ext cx="993000" cy="430000"/>
           </a:xfrm>
           <a:prstGeom prst="roundRect">
             <a:avLst/>
           </a:prstGeom>
           <a:solidFill>
-            <a:srgbClr val="00A591"/>
+            <a:srgbClr val="1F3564"/>
           </a:solidFill>
           <a:ln>
             <a:noFill/>
@@ -3924,7 +4421,7 @@
           </a:fontRef>
         </p:style>
         <p:txBody>
-          <a:bodyPr rtlCol="0" anchor="ctr" wrap="square" lIns="36000" rIns="36000" tIns="18000" bIns="18000"/>
+          <a:bodyPr rtlCol="0" anchor="ctr" wrap="square" lIns="28000" rIns="28000" tIns="14000" bIns="14000"/>
           <a:lstStyle/>
           <a:p>
             <a:pPr algn="ctr"/>
@@ -3935,27 +4432,39 @@
                 </a:solidFill>
                 <a:latin typeface="Arial"/>
               </a:rPr>
-              <a:t>② 규칙 변환기  46%</a:t>
-            </a:r>
-          </a:p>
-        </p:txBody>
-      </p:sp>
-      <p:sp>
-        <p:nvSpPr>
-          <p:cNvPr id="42" name="Rounded Rectangle 41"/>
-          <p:cNvSpPr/>
-          <p:nvPr/>
-        </p:nvSpPr>
-        <p:spPr>
-          <a:xfrm>
-            <a:off x="2469000" y="1837666"/>
-            <a:ext cx="1931000" cy="369666"/>
+              <a:t>③ LLM Gateway</a:t>
+            </a:r>
+          </a:p>
+          <a:p>
+            <a:pPr algn="ctr"/>
+            <a:r>
+              <a:rPr sz="650" b="0">
+                <a:solidFill>
+                  <a:srgbClr val="DDE6EE"/>
+                </a:solidFill>
+                <a:latin typeface="Arial"/>
+              </a:rPr>
+              <a:t>업무 로직 포팅</a:t>
+            </a:r>
+          </a:p>
+        </p:txBody>
+      </p:sp>
+      <p:sp>
+        <p:nvSpPr>
+          <p:cNvPr id="48" name="Rounded Rectangle 47"/>
+          <p:cNvSpPr/>
+          <p:nvPr/>
+        </p:nvSpPr>
+        <p:spPr>
+          <a:xfrm>
+            <a:off x="3637000" y="2125000"/>
+            <a:ext cx="993000" cy="430000"/>
           </a:xfrm>
           <a:prstGeom prst="roundRect">
             <a:avLst/>
           </a:prstGeom>
           <a:solidFill>
-            <a:srgbClr val="1F3564"/>
+            <a:srgbClr val="00A591"/>
           </a:solidFill>
           <a:ln>
             <a:noFill/>
@@ -3977,7 +4486,7 @@
           </a:fontRef>
         </p:style>
         <p:txBody>
-          <a:bodyPr rtlCol="0" anchor="ctr" wrap="square" lIns="36000" rIns="36000" tIns="18000" bIns="18000"/>
+          <a:bodyPr rtlCol="0" anchor="ctr" wrap="square" lIns="28000" rIns="28000" tIns="14000" bIns="14000"/>
           <a:lstStyle/>
           <a:p>
             <a:pPr algn="ctr"/>
@@ -3988,27 +4497,39 @@
                 </a:solidFill>
                 <a:latin typeface="Arial"/>
               </a:rPr>
-              <a:t>③ LLM 포팅  54%</a:t>
-            </a:r>
-          </a:p>
-        </p:txBody>
-      </p:sp>
-      <p:sp>
-        <p:nvSpPr>
-          <p:cNvPr id="43" name="Down Arrow 42"/>
-          <p:cNvSpPr/>
-          <p:nvPr/>
-        </p:nvSpPr>
-        <p:spPr>
-          <a:xfrm>
-            <a:off x="2399280" y="2213332"/>
-            <a:ext cx="91440" cy="40000"/>
-          </a:xfrm>
-          <a:prstGeom prst="downArrow">
-            <a:avLst/>
-          </a:prstGeom>
-          <a:solidFill>
-            <a:srgbClr val="C5CED8"/>
+              <a:t>④ 정적 검증기</a:t>
+            </a:r>
+          </a:p>
+          <a:p>
+            <a:pPr algn="ctr"/>
+            <a:r>
+              <a:rPr sz="650" b="0">
+                <a:solidFill>
+                  <a:srgbClr val="DDE6EE"/>
+                </a:solidFill>
+                <a:latin typeface="Arial"/>
+              </a:rPr>
+              <a:t>변환기와 분리</a:t>
+            </a:r>
+          </a:p>
+        </p:txBody>
+      </p:sp>
+      <p:sp>
+        <p:nvSpPr>
+          <p:cNvPr id="49" name="Rounded Rectangle 48"/>
+          <p:cNvSpPr/>
+          <p:nvPr/>
+        </p:nvSpPr>
+        <p:spPr>
+          <a:xfrm>
+            <a:off x="520000" y="2601000"/>
+            <a:ext cx="993000" cy="430000"/>
+          </a:xfrm>
+          <a:prstGeom prst="roundRect">
+            <a:avLst/>
+          </a:prstGeom>
+          <a:solidFill>
+            <a:srgbClr val="1F3564"/>
           </a:solidFill>
           <a:ln>
             <a:noFill/>
@@ -4030,23 +4551,44 @@
           </a:fontRef>
         </p:style>
         <p:txBody>
-          <a:bodyPr rtlCol="0" anchor="ctr"/>
+          <a:bodyPr rtlCol="0" anchor="ctr" wrap="square" lIns="28000" rIns="28000" tIns="14000" bIns="14000"/>
           <a:lstStyle/>
           <a:p>
             <a:pPr algn="ctr"/>
-          </a:p>
-        </p:txBody>
-      </p:sp>
-      <p:sp>
-        <p:nvSpPr>
-          <p:cNvPr id="44" name="Rounded Rectangle 43"/>
-          <p:cNvSpPr/>
-          <p:nvPr/>
-        </p:nvSpPr>
-        <p:spPr>
-          <a:xfrm>
-            <a:off x="490000" y="2259332"/>
-            <a:ext cx="3910000" cy="369666"/>
+            <a:r>
+              <a:rPr sz="750" b="1">
+                <a:solidFill>
+                  <a:srgbClr val="FFFFFF"/>
+                </a:solidFill>
+                <a:latin typeface="Arial"/>
+              </a:rPr>
+              <a:t>⑤ ToT 수리기</a:t>
+            </a:r>
+          </a:p>
+          <a:p>
+            <a:pPr algn="ctr"/>
+            <a:r>
+              <a:rPr sz="650" b="0">
+                <a:solidFill>
+                  <a:srgbClr val="DDE6EE"/>
+                </a:solidFill>
+                <a:latin typeface="Arial"/>
+              </a:rPr>
+              <a:t>후보 N개 → 채점</a:t>
+            </a:r>
+          </a:p>
+        </p:txBody>
+      </p:sp>
+      <p:sp>
+        <p:nvSpPr>
+          <p:cNvPr id="50" name="Rounded Rectangle 49"/>
+          <p:cNvSpPr/>
+          <p:nvPr/>
+        </p:nvSpPr>
+        <p:spPr>
+          <a:xfrm>
+            <a:off x="1559000" y="2601000"/>
+            <a:ext cx="993000" cy="430000"/>
           </a:xfrm>
           <a:prstGeom prst="roundRect">
             <a:avLst/>
@@ -4074,7 +4616,7 @@
           </a:fontRef>
         </p:style>
         <p:txBody>
-          <a:bodyPr rtlCol="0" anchor="ctr" wrap="square" lIns="36000" rIns="36000" tIns="18000" bIns="18000"/>
+          <a:bodyPr rtlCol="0" anchor="ctr" wrap="square" lIns="28000" rIns="28000" tIns="14000" bIns="14000"/>
           <a:lstStyle/>
           <a:p>
             <a:pPr algn="ctr"/>
@@ -4085,27 +4627,39 @@
                 </a:solidFill>
                 <a:latin typeface="Arial"/>
               </a:rPr>
-              <a:t>④ 정적 검증  ·  변환기와 분리된 검증기</a:t>
-            </a:r>
-          </a:p>
-        </p:txBody>
-      </p:sp>
-      <p:sp>
-        <p:nvSpPr>
-          <p:cNvPr id="45" name="Down Arrow 44"/>
-          <p:cNvSpPr/>
-          <p:nvPr/>
-        </p:nvSpPr>
-        <p:spPr>
-          <a:xfrm>
-            <a:off x="2399280" y="2634998"/>
-            <a:ext cx="91440" cy="40000"/>
-          </a:xfrm>
-          <a:prstGeom prst="downArrow">
-            <a:avLst/>
-          </a:prstGeom>
-          <a:solidFill>
-            <a:srgbClr val="C5CED8"/>
+              <a:t>⑥ 동등성 L3</a:t>
+            </a:r>
+          </a:p>
+          <a:p>
+            <a:pPr algn="ctr"/>
+            <a:r>
+              <a:rPr sz="650" b="0">
+                <a:solidFill>
+                  <a:srgbClr val="DDE6EE"/>
+                </a:solidFill>
+                <a:latin typeface="Arial"/>
+              </a:rPr>
+              <a:t>javac/java 실행</a:t>
+            </a:r>
+          </a:p>
+        </p:txBody>
+      </p:sp>
+      <p:sp>
+        <p:nvSpPr>
+          <p:cNvPr id="51" name="Rounded Rectangle 50"/>
+          <p:cNvSpPr/>
+          <p:nvPr/>
+        </p:nvSpPr>
+        <p:spPr>
+          <a:xfrm>
+            <a:off x="2598000" y="2601000"/>
+            <a:ext cx="993000" cy="430000"/>
+          </a:xfrm>
+          <a:prstGeom prst="roundRect">
+            <a:avLst/>
+          </a:prstGeom>
+          <a:solidFill>
+            <a:srgbClr val="00A591"/>
           </a:solidFill>
           <a:ln>
             <a:noFill/>
@@ -4127,29 +4681,50 @@
           </a:fontRef>
         </p:style>
         <p:txBody>
-          <a:bodyPr rtlCol="0" anchor="ctr"/>
+          <a:bodyPr rtlCol="0" anchor="ctr" wrap="square" lIns="28000" rIns="28000" tIns="14000" bIns="14000"/>
           <a:lstStyle/>
           <a:p>
             <a:pPr algn="ctr"/>
-          </a:p>
-        </p:txBody>
-      </p:sp>
-      <p:sp>
-        <p:nvSpPr>
-          <p:cNvPr id="46" name="Rounded Rectangle 45"/>
-          <p:cNvSpPr/>
-          <p:nvPr/>
-        </p:nvSpPr>
-        <p:spPr>
-          <a:xfrm>
-            <a:off x="490000" y="2680998"/>
-            <a:ext cx="3910000" cy="369666"/>
+            <a:r>
+              <a:rPr sz="750" b="1">
+                <a:solidFill>
+                  <a:srgbClr val="FFFFFF"/>
+                </a:solidFill>
+                <a:latin typeface="Arial"/>
+              </a:rPr>
+              <a:t>⑦ 교차 분석</a:t>
+            </a:r>
+          </a:p>
+          <a:p>
+            <a:pPr algn="ctr"/>
+            <a:r>
+              <a:rPr sz="650" b="0">
+                <a:solidFill>
+                  <a:srgbClr val="DDE6EE"/>
+                </a:solidFill>
+                <a:latin typeface="Arial"/>
+              </a:rPr>
+              <a:t>엔드포인트 충돌</a:t>
+            </a:r>
+          </a:p>
+        </p:txBody>
+      </p:sp>
+      <p:sp>
+        <p:nvSpPr>
+          <p:cNvPr id="52" name="Rounded Rectangle 51"/>
+          <p:cNvSpPr/>
+          <p:nvPr/>
+        </p:nvSpPr>
+        <p:spPr>
+          <a:xfrm>
+            <a:off x="3637000" y="2601000"/>
+            <a:ext cx="993000" cy="430000"/>
           </a:xfrm>
           <a:prstGeom prst="roundRect">
             <a:avLst/>
           </a:prstGeom>
           <a:solidFill>
-            <a:srgbClr val="1F3564"/>
+            <a:srgbClr val="00A591"/>
           </a:solidFill>
           <a:ln>
             <a:noFill/>
@@ -4171,7 +4746,7 @@
           </a:fontRef>
         </p:style>
         <p:txBody>
-          <a:bodyPr rtlCol="0" anchor="ctr" wrap="square" lIns="36000" rIns="36000" tIns="18000" bIns="18000"/>
+          <a:bodyPr rtlCol="0" anchor="ctr" wrap="square" lIns="28000" rIns="28000" tIns="14000" bIns="14000"/>
           <a:lstStyle/>
           <a:p>
             <a:pPr algn="ctr"/>
@@ -4182,21 +4757,68 @@
                 </a:solidFill>
                 <a:latin typeface="Arial"/>
               </a:rPr>
-              <a:t>⑤ 자기 수정  ·  ToT 후보를 검증기가 채점</a:t>
-            </a:r>
-          </a:p>
-        </p:txBody>
-      </p:sp>
-      <p:sp>
-        <p:nvSpPr>
-          <p:cNvPr id="47" name="Down Arrow 46"/>
-          <p:cNvSpPr/>
-          <p:nvPr/>
-        </p:nvSpPr>
-        <p:spPr>
-          <a:xfrm>
-            <a:off x="2399280" y="3056664"/>
-            <a:ext cx="91440" cy="40000"/>
+              <a:t>⑧ Maven 빌드</a:t>
+            </a:r>
+          </a:p>
+          <a:p>
+            <a:pPr algn="ctr"/>
+            <a:r>
+              <a:rPr sz="650" b="0">
+                <a:solidFill>
+                  <a:srgbClr val="DDE6EE"/>
+                </a:solidFill>
+                <a:latin typeface="Arial"/>
+              </a:rPr>
+              <a:t>mvn compile</a:t>
+            </a:r>
+          </a:p>
+        </p:txBody>
+      </p:sp>
+      <p:sp>
+        <p:nvSpPr>
+          <p:cNvPr id="53" name="TextBox 52"/>
+          <p:cNvSpPr txBox="1"/>
+          <p:nvPr/>
+        </p:nvSpPr>
+        <p:spPr>
+          <a:xfrm>
+            <a:off x="400000" y="3145000"/>
+            <a:ext cx="4350000" cy="150000"/>
+          </a:xfrm>
+          <a:prstGeom prst="rect">
+            <a:avLst/>
+          </a:prstGeom>
+          <a:noFill/>
+        </p:spPr>
+        <p:txBody>
+          <a:bodyPr wrap="square" lIns="0" rIns="0" tIns="0" bIns="0">
+            <a:spAutoFit/>
+          </a:bodyPr>
+          <a:lstStyle/>
+          <a:p>
+            <a:pPr algn="ctr"/>
+            <a:r>
+              <a:rPr sz="650" b="0">
+                <a:solidFill>
+                  <a:srgbClr val="666666"/>
+                </a:solidFill>
+                <a:latin typeface="Arial"/>
+              </a:rPr>
+              <a:t>⑤ 자기 수정은 ④ 검증 실패 시에만 ③으로 되돌린다 (라운드 상한 2)</a:t>
+            </a:r>
+          </a:p>
+        </p:txBody>
+      </p:sp>
+      <p:sp>
+        <p:nvSpPr>
+          <p:cNvPr id="54" name="Down Arrow 53"/>
+          <p:cNvSpPr/>
+          <p:nvPr/>
+        </p:nvSpPr>
+        <p:spPr>
+          <a:xfrm>
+            <a:off x="2529280" y="3309000"/>
+            <a:ext cx="91440" cy="74000"/>
           </a:xfrm>
           <a:prstGeom prst="downArrow">
             <a:avLst/>
@@ -4233,20 +4855,20 @@
       </p:sp>
       <p:sp>
         <p:nvSpPr>
-          <p:cNvPr id="48" name="Rounded Rectangle 47"/>
-          <p:cNvSpPr/>
-          <p:nvPr/>
-        </p:nvSpPr>
-        <p:spPr>
-          <a:xfrm>
-            <a:off x="490000" y="3102664"/>
-            <a:ext cx="3910000" cy="369666"/>
+          <p:cNvPr id="55" name="Rounded Rectangle 54"/>
+          <p:cNvSpPr/>
+          <p:nvPr/>
+        </p:nvSpPr>
+        <p:spPr>
+          <a:xfrm>
+            <a:off x="400000" y="3391000"/>
+            <a:ext cx="4350000" cy="290000"/>
           </a:xfrm>
           <a:prstGeom prst="roundRect">
             <a:avLst/>
           </a:prstGeom>
           <a:solidFill>
-            <a:srgbClr val="00A591"/>
+            <a:srgbClr val="B4621A"/>
           </a:solidFill>
           <a:ln>
             <a:noFill/>
@@ -4273,27 +4895,27 @@
           <a:p>
             <a:pPr algn="ctr"/>
             <a:r>
-              <a:rPr sz="750" b="1">
+              <a:rPr sz="800" b="1">
                 <a:solidFill>
                   <a:srgbClr val="FFFFFF"/>
                 </a:solidFill>
                 <a:latin typeface="Arial"/>
               </a:rPr>
-              <a:t>⑥ 기능 동등성 L3  ·  실제 실행 비교</a:t>
-            </a:r>
-          </a:p>
-        </p:txBody>
-      </p:sp>
-      <p:sp>
-        <p:nvSpPr>
-          <p:cNvPr id="49" name="Down Arrow 48"/>
-          <p:cNvSpPr/>
-          <p:nvPr/>
-        </p:nvSpPr>
-        <p:spPr>
-          <a:xfrm>
-            <a:off x="2399280" y="3478330"/>
-            <a:ext cx="91440" cy="40000"/>
+              <a:t>사람 승인 게이트  —  승인 전에는 산출물·DB에 아무것도 쓰지 않는다</a:t>
+            </a:r>
+          </a:p>
+        </p:txBody>
+      </p:sp>
+      <p:sp>
+        <p:nvSpPr>
+          <p:cNvPr id="56" name="Down Arrow 55"/>
+          <p:cNvSpPr/>
+          <p:nvPr/>
+        </p:nvSpPr>
+        <p:spPr>
+          <a:xfrm>
+            <a:off x="2529280" y="3689000"/>
+            <a:ext cx="91440" cy="74000"/>
           </a:xfrm>
           <a:prstGeom prst="downArrow">
             <a:avLst/>
@@ -4330,20 +4952,55 @@
       </p:sp>
       <p:sp>
         <p:nvSpPr>
-          <p:cNvPr id="50" name="Rounded Rectangle 49"/>
-          <p:cNvSpPr/>
-          <p:nvPr/>
-        </p:nvSpPr>
-        <p:spPr>
-          <a:xfrm>
-            <a:off x="490000" y="3524330"/>
-            <a:ext cx="1931000" cy="369666"/>
+          <p:cNvPr id="57" name="TextBox 56"/>
+          <p:cNvSpPr txBox="1"/>
+          <p:nvPr/>
+        </p:nvSpPr>
+        <p:spPr>
+          <a:xfrm>
+            <a:off x="400000" y="3771000"/>
+            <a:ext cx="4350000" cy="150000"/>
+          </a:xfrm>
+          <a:prstGeom prst="rect">
+            <a:avLst/>
+          </a:prstGeom>
+          <a:noFill/>
+        </p:spPr>
+        <p:txBody>
+          <a:bodyPr wrap="square" lIns="0" rIns="0" tIns="0" bIns="0">
+            <a:spAutoFit/>
+          </a:bodyPr>
+          <a:lstStyle/>
+          <a:p>
+            <a:pPr algn="l"/>
+            <a:r>
+              <a:rPr sz="750" b="1">
+                <a:solidFill>
+                  <a:srgbClr val="666666"/>
+                </a:solidFill>
+                <a:latin typeface="Arial"/>
+              </a:rPr>
+              <a:t>TO-BE  ·  Spring / MyBatis</a:t>
+            </a:r>
+          </a:p>
+        </p:txBody>
+      </p:sp>
+      <p:sp>
+        <p:nvSpPr>
+          <p:cNvPr id="58" name="Rounded Rectangle 57"/>
+          <p:cNvSpPr/>
+          <p:nvPr/>
+        </p:nvSpPr>
+        <p:spPr>
+          <a:xfrm>
+            <a:off x="400000" y="3921000"/>
+            <a:ext cx="841200" cy="250000"/>
           </a:xfrm>
           <a:prstGeom prst="roundRect">
             <a:avLst/>
           </a:prstGeom>
           <a:solidFill>
-            <a:srgbClr val="00A591"/>
+            <a:srgbClr val="1F3564"/>
           </a:solidFill>
           <a:ln>
             <a:noFill/>
@@ -4370,33 +5027,33 @@
           <a:p>
             <a:pPr algn="ctr"/>
             <a:r>
-              <a:rPr sz="750" b="1">
+              <a:rPr sz="700" b="0">
                 <a:solidFill>
                   <a:srgbClr val="FFFFFF"/>
                 </a:solidFill>
                 <a:latin typeface="Arial"/>
               </a:rPr>
-              <a:t>⑦ 교차 분석</a:t>
-            </a:r>
-          </a:p>
-        </p:txBody>
-      </p:sp>
-      <p:sp>
-        <p:nvSpPr>
-          <p:cNvPr id="51" name="Rounded Rectangle 50"/>
-          <p:cNvSpPr/>
-          <p:nvPr/>
-        </p:nvSpPr>
-        <p:spPr>
-          <a:xfrm>
-            <a:off x="2469000" y="3524330"/>
-            <a:ext cx="1931000" cy="369666"/>
+              <a:t>Api</a:t>
+            </a:r>
+          </a:p>
+        </p:txBody>
+      </p:sp>
+      <p:sp>
+        <p:nvSpPr>
+          <p:cNvPr id="59" name="Rounded Rectangle 58"/>
+          <p:cNvSpPr/>
+          <p:nvPr/>
+        </p:nvSpPr>
+        <p:spPr>
+          <a:xfrm>
+            <a:off x="1277200" y="3921000"/>
+            <a:ext cx="841200" cy="250000"/>
           </a:xfrm>
           <a:prstGeom prst="roundRect">
             <a:avLst/>
           </a:prstGeom>
           <a:solidFill>
-            <a:srgbClr val="00A591"/>
+            <a:srgbClr val="1F3564"/>
           </a:solidFill>
           <a:ln>
             <a:noFill/>
@@ -4423,38 +5080,36 @@
           <a:p>
             <a:pPr algn="ctr"/>
             <a:r>
-              <a:rPr sz="750" b="1">
+              <a:rPr sz="700" b="0">
                 <a:solidFill>
                   <a:srgbClr val="FFFFFF"/>
                 </a:solidFill>
                 <a:latin typeface="Arial"/>
               </a:rPr>
-              <a:t>⑧ Maven 빌드</a:t>
-            </a:r>
-          </a:p>
-        </p:txBody>
-      </p:sp>
-      <p:sp>
-        <p:nvSpPr>
-          <p:cNvPr id="52" name="Up Arrow 51"/>
-          <p:cNvSpPr/>
-          <p:nvPr/>
-        </p:nvSpPr>
-        <p:spPr>
-          <a:xfrm>
-            <a:off x="4450000" y="2022499"/>
-            <a:ext cx="210000" cy="843332"/>
-          </a:xfrm>
-          <a:prstGeom prst="upArrow">
-            <a:avLst/>
-          </a:prstGeom>
-          <a:solidFill>
-            <a:srgbClr val="E2DAF2"/>
-          </a:solidFill>
-          <a:ln w="9525">
-            <a:solidFill>
-              <a:srgbClr val="B197E0"/>
-            </a:solidFill>
+              <a:t>Service</a:t>
+            </a:r>
+          </a:p>
+        </p:txBody>
+      </p:sp>
+      <p:sp>
+        <p:nvSpPr>
+          <p:cNvPr id="60" name="Rounded Rectangle 59"/>
+          <p:cNvSpPr/>
+          <p:nvPr/>
+        </p:nvSpPr>
+        <p:spPr>
+          <a:xfrm>
+            <a:off x="2154400" y="3921000"/>
+            <a:ext cx="841200" cy="250000"/>
+          </a:xfrm>
+          <a:prstGeom prst="roundRect">
+            <a:avLst/>
+          </a:prstGeom>
+          <a:solidFill>
+            <a:srgbClr val="1F3564"/>
+          </a:solidFill>
+          <a:ln>
+            <a:noFill/>
           </a:ln>
           <a:effectLst/>
         </p:spPr>
@@ -4478,35 +5133,33 @@
           <a:p>
             <a:pPr algn="ctr"/>
             <a:r>
-              <a:rPr sz="650" b="1">
-                <a:solidFill>
-                  <a:srgbClr val="5B4B8A"/>
-                </a:solidFill>
-                <a:latin typeface="Arial"/>
-              </a:rPr>
-              <a:t>재
-생
-성</a:t>
-            </a:r>
-          </a:p>
-        </p:txBody>
-      </p:sp>
-      <p:sp>
-        <p:nvSpPr>
-          <p:cNvPr id="53" name="Down Arrow 52"/>
-          <p:cNvSpPr/>
-          <p:nvPr/>
-        </p:nvSpPr>
-        <p:spPr>
-          <a:xfrm>
-            <a:off x="2529280" y="3972000"/>
-            <a:ext cx="91440" cy="70000"/>
-          </a:xfrm>
-          <a:prstGeom prst="downArrow">
-            <a:avLst/>
-          </a:prstGeom>
-          <a:solidFill>
-            <a:srgbClr val="C5CED8"/>
+              <a:rPr sz="700" b="0">
+                <a:solidFill>
+                  <a:srgbClr val="FFFFFF"/>
+                </a:solidFill>
+                <a:latin typeface="Arial"/>
+              </a:rPr>
+              <a:t>Store</a:t>
+            </a:r>
+          </a:p>
+        </p:txBody>
+      </p:sp>
+      <p:sp>
+        <p:nvSpPr>
+          <p:cNvPr id="61" name="Rounded Rectangle 60"/>
+          <p:cNvSpPr/>
+          <p:nvPr/>
+        </p:nvSpPr>
+        <p:spPr>
+          <a:xfrm>
+            <a:off x="3031600" y="3921000"/>
+            <a:ext cx="841200" cy="250000"/>
+          </a:xfrm>
+          <a:prstGeom prst="roundRect">
+            <a:avLst/>
+          </a:prstGeom>
+          <a:solidFill>
+            <a:srgbClr val="1F3564"/>
           </a:solidFill>
           <a:ln>
             <a:noFill/>
@@ -4528,29 +5181,38 @@
           </a:fontRef>
         </p:style>
         <p:txBody>
-          <a:bodyPr rtlCol="0" anchor="ctr"/>
+          <a:bodyPr rtlCol="0" anchor="ctr" wrap="square" lIns="36000" rIns="36000" tIns="18000" bIns="18000"/>
           <a:lstStyle/>
           <a:p>
             <a:pPr algn="ctr"/>
-          </a:p>
-        </p:txBody>
-      </p:sp>
-      <p:sp>
-        <p:nvSpPr>
-          <p:cNvPr id="54" name="Rounded Rectangle 53"/>
-          <p:cNvSpPr/>
-          <p:nvPr/>
-        </p:nvSpPr>
-        <p:spPr>
-          <a:xfrm>
-            <a:off x="400000" y="4042000"/>
-            <a:ext cx="4350000" cy="250000"/>
+            <a:r>
+              <a:rPr sz="700" b="0">
+                <a:solidFill>
+                  <a:srgbClr val="FFFFFF"/>
+                </a:solidFill>
+                <a:latin typeface="Arial"/>
+              </a:rPr>
+              <a:t>Dto</a:t>
+            </a:r>
+          </a:p>
+        </p:txBody>
+      </p:sp>
+      <p:sp>
+        <p:nvSpPr>
+          <p:cNvPr id="62" name="Rounded Rectangle 61"/>
+          <p:cNvSpPr/>
+          <p:nvPr/>
+        </p:nvSpPr>
+        <p:spPr>
+          <a:xfrm>
+            <a:off x="3908800" y="3921000"/>
+            <a:ext cx="841200" cy="250000"/>
           </a:xfrm>
           <a:prstGeom prst="roundRect">
             <a:avLst/>
           </a:prstGeom>
           <a:solidFill>
-            <a:srgbClr val="B4621A"/>
+            <a:srgbClr val="1F3564"/>
           </a:solidFill>
           <a:ln>
             <a:noFill/>
@@ -4577,33 +5239,33 @@
           <a:p>
             <a:pPr algn="ctr"/>
             <a:r>
-              <a:rPr sz="800" b="1">
+              <a:rPr sz="700" b="0">
                 <a:solidFill>
                   <a:srgbClr val="FFFFFF"/>
                 </a:solidFill>
                 <a:latin typeface="Arial"/>
               </a:rPr>
-              <a:t>사람 승인 게이트  —  승인 전에는 산출물·DB에 아무것도 쓰지 않는다</a:t>
-            </a:r>
-          </a:p>
-        </p:txBody>
-      </p:sp>
-      <p:sp>
-        <p:nvSpPr>
-          <p:cNvPr id="55" name="Down Arrow 54"/>
-          <p:cNvSpPr/>
-          <p:nvPr/>
-        </p:nvSpPr>
-        <p:spPr>
-          <a:xfrm>
-            <a:off x="2529280" y="4300000"/>
-            <a:ext cx="91440" cy="70000"/>
-          </a:xfrm>
-          <a:prstGeom prst="downArrow">
-            <a:avLst/>
-          </a:prstGeom>
-          <a:solidFill>
-            <a:srgbClr val="C5CED8"/>
+              <a:t>Mapper.xml</a:t>
+            </a:r>
+          </a:p>
+        </p:txBody>
+      </p:sp>
+      <p:sp>
+        <p:nvSpPr>
+          <p:cNvPr id="63" name="Rounded Rectangle 62"/>
+          <p:cNvSpPr/>
+          <p:nvPr/>
+        </p:nvSpPr>
+        <p:spPr>
+          <a:xfrm>
+            <a:off x="400000" y="4233000"/>
+            <a:ext cx="92000" cy="92000"/>
+          </a:xfrm>
+          <a:prstGeom prst="roundRect">
+            <a:avLst/>
+          </a:prstGeom>
+          <a:solidFill>
+            <a:srgbClr val="00A591"/>
           </a:solidFill>
           <a:ln>
             <a:noFill/>
@@ -4634,14 +5296,14 @@
       </p:sp>
       <p:sp>
         <p:nvSpPr>
-          <p:cNvPr id="56" name="TextBox 55"/>
+          <p:cNvPr id="64" name="TextBox 63"/>
           <p:cNvSpPr txBox="1"/>
           <p:nvPr/>
         </p:nvSpPr>
         <p:spPr>
           <a:xfrm>
-            <a:off x="400000" y="4370000"/>
-            <a:ext cx="4350000" cy="150000"/>
+            <a:off x="526000" y="4231000"/>
+            <a:ext cx="900000" cy="130000"/>
           </a:xfrm>
           <a:prstGeom prst="rect">
             <a:avLst/>
@@ -4656,27 +5318,27 @@
           <a:p>
             <a:pPr algn="l"/>
             <a:r>
-              <a:rPr sz="750" b="1">
+              <a:rPr sz="650" b="0">
                 <a:solidFill>
                   <a:srgbClr val="666666"/>
                 </a:solidFill>
                 <a:latin typeface="Arial"/>
               </a:rPr>
-              <a:t>TO-BE  ·  Spring / MyBatis</a:t>
-            </a:r>
-          </a:p>
-        </p:txBody>
-      </p:sp>
-      <p:sp>
-        <p:nvSpPr>
-          <p:cNvPr id="57" name="Rounded Rectangle 56"/>
-          <p:cNvSpPr/>
-          <p:nvPr/>
-        </p:nvSpPr>
-        <p:spPr>
-          <a:xfrm>
-            <a:off x="400000" y="4520000"/>
-            <a:ext cx="841200" cy="210000"/>
+              <a:t>결정론 (LLM 0회)</a:t>
+            </a:r>
+          </a:p>
+        </p:txBody>
+      </p:sp>
+      <p:sp>
+        <p:nvSpPr>
+          <p:cNvPr id="65" name="Rounded Rectangle 64"/>
+          <p:cNvSpPr/>
+          <p:nvPr/>
+        </p:nvSpPr>
+        <p:spPr>
+          <a:xfrm>
+            <a:off x="1520000" y="4233000"/>
+            <a:ext cx="92000" cy="92000"/>
           </a:xfrm>
           <a:prstGeom prst="roundRect">
             <a:avLst/>
@@ -4704,244 +5366,23 @@
           </a:fontRef>
         </p:style>
         <p:txBody>
-          <a:bodyPr rtlCol="0" anchor="ctr" wrap="square" lIns="36000" rIns="36000" tIns="18000" bIns="18000"/>
+          <a:bodyPr rtlCol="0" anchor="ctr"/>
           <a:lstStyle/>
           <a:p>
             <a:pPr algn="ctr"/>
-            <a:r>
-              <a:rPr sz="700" b="0">
-                <a:solidFill>
-                  <a:srgbClr val="FFFFFF"/>
-                </a:solidFill>
-                <a:latin typeface="Arial"/>
-              </a:rPr>
-              <a:t>Api</a:t>
-            </a:r>
-          </a:p>
-        </p:txBody>
-      </p:sp>
-      <p:sp>
-        <p:nvSpPr>
-          <p:cNvPr id="58" name="Rounded Rectangle 57"/>
-          <p:cNvSpPr/>
-          <p:nvPr/>
-        </p:nvSpPr>
-        <p:spPr>
-          <a:xfrm>
-            <a:off x="1277200" y="4520000"/>
-            <a:ext cx="841200" cy="210000"/>
-          </a:xfrm>
-          <a:prstGeom prst="roundRect">
-            <a:avLst/>
-          </a:prstGeom>
-          <a:solidFill>
-            <a:srgbClr val="1F3564"/>
-          </a:solidFill>
-          <a:ln>
-            <a:noFill/>
-          </a:ln>
-          <a:effectLst/>
-        </p:spPr>
-        <p:style>
-          <a:lnRef idx="1">
-            <a:schemeClr val="accent1"/>
-          </a:lnRef>
-          <a:fillRef idx="3">
-            <a:schemeClr val="accent1"/>
-          </a:fillRef>
-          <a:effectRef idx="2">
-            <a:schemeClr val="accent1"/>
-          </a:effectRef>
-          <a:fontRef idx="minor">
-            <a:schemeClr val="lt1"/>
-          </a:fontRef>
-        </p:style>
-        <p:txBody>
-          <a:bodyPr rtlCol="0" anchor="ctr" wrap="square" lIns="36000" rIns="36000" tIns="18000" bIns="18000"/>
-          <a:lstStyle/>
-          <a:p>
-            <a:pPr algn="ctr"/>
-            <a:r>
-              <a:rPr sz="700" b="0">
-                <a:solidFill>
-                  <a:srgbClr val="FFFFFF"/>
-                </a:solidFill>
-                <a:latin typeface="Arial"/>
-              </a:rPr>
-              <a:t>Service</a:t>
-            </a:r>
-          </a:p>
-        </p:txBody>
-      </p:sp>
-      <p:sp>
-        <p:nvSpPr>
-          <p:cNvPr id="59" name="Rounded Rectangle 58"/>
-          <p:cNvSpPr/>
-          <p:nvPr/>
-        </p:nvSpPr>
-        <p:spPr>
-          <a:xfrm>
-            <a:off x="2154400" y="4520000"/>
-            <a:ext cx="841200" cy="210000"/>
-          </a:xfrm>
-          <a:prstGeom prst="roundRect">
-            <a:avLst/>
-          </a:prstGeom>
-          <a:solidFill>
-            <a:srgbClr val="1F3564"/>
-          </a:solidFill>
-          <a:ln>
-            <a:noFill/>
-          </a:ln>
-          <a:effectLst/>
-        </p:spPr>
-        <p:style>
-          <a:lnRef idx="1">
-            <a:schemeClr val="accent1"/>
-          </a:lnRef>
-          <a:fillRef idx="3">
-            <a:schemeClr val="accent1"/>
-          </a:fillRef>
-          <a:effectRef idx="2">
-            <a:schemeClr val="accent1"/>
-          </a:effectRef>
-          <a:fontRef idx="minor">
-            <a:schemeClr val="lt1"/>
-          </a:fontRef>
-        </p:style>
-        <p:txBody>
-          <a:bodyPr rtlCol="0" anchor="ctr" wrap="square" lIns="36000" rIns="36000" tIns="18000" bIns="18000"/>
-          <a:lstStyle/>
-          <a:p>
-            <a:pPr algn="ctr"/>
-            <a:r>
-              <a:rPr sz="700" b="0">
-                <a:solidFill>
-                  <a:srgbClr val="FFFFFF"/>
-                </a:solidFill>
-                <a:latin typeface="Arial"/>
-              </a:rPr>
-              <a:t>Store</a:t>
-            </a:r>
-          </a:p>
-        </p:txBody>
-      </p:sp>
-      <p:sp>
-        <p:nvSpPr>
-          <p:cNvPr id="60" name="Rounded Rectangle 59"/>
-          <p:cNvSpPr/>
-          <p:nvPr/>
-        </p:nvSpPr>
-        <p:spPr>
-          <a:xfrm>
-            <a:off x="3031600" y="4520000"/>
-            <a:ext cx="841200" cy="210000"/>
-          </a:xfrm>
-          <a:prstGeom prst="roundRect">
-            <a:avLst/>
-          </a:prstGeom>
-          <a:solidFill>
-            <a:srgbClr val="1F3564"/>
-          </a:solidFill>
-          <a:ln>
-            <a:noFill/>
-          </a:ln>
-          <a:effectLst/>
-        </p:spPr>
-        <p:style>
-          <a:lnRef idx="1">
-            <a:schemeClr val="accent1"/>
-          </a:lnRef>
-          <a:fillRef idx="3">
-            <a:schemeClr val="accent1"/>
-          </a:fillRef>
-          <a:effectRef idx="2">
-            <a:schemeClr val="accent1"/>
-          </a:effectRef>
-          <a:fontRef idx="minor">
-            <a:schemeClr val="lt1"/>
-          </a:fontRef>
-        </p:style>
-        <p:txBody>
-          <a:bodyPr rtlCol="0" anchor="ctr" wrap="square" lIns="36000" rIns="36000" tIns="18000" bIns="18000"/>
-          <a:lstStyle/>
-          <a:p>
-            <a:pPr algn="ctr"/>
-            <a:r>
-              <a:rPr sz="700" b="0">
-                <a:solidFill>
-                  <a:srgbClr val="FFFFFF"/>
-                </a:solidFill>
-                <a:latin typeface="Arial"/>
-              </a:rPr>
-              <a:t>Dto</a:t>
-            </a:r>
-          </a:p>
-        </p:txBody>
-      </p:sp>
-      <p:sp>
-        <p:nvSpPr>
-          <p:cNvPr id="61" name="Rounded Rectangle 60"/>
-          <p:cNvSpPr/>
-          <p:nvPr/>
-        </p:nvSpPr>
-        <p:spPr>
-          <a:xfrm>
-            <a:off x="3908800" y="4520000"/>
-            <a:ext cx="841200" cy="210000"/>
-          </a:xfrm>
-          <a:prstGeom prst="roundRect">
-            <a:avLst/>
-          </a:prstGeom>
-          <a:solidFill>
-            <a:srgbClr val="1F3564"/>
-          </a:solidFill>
-          <a:ln>
-            <a:noFill/>
-          </a:ln>
-          <a:effectLst/>
-        </p:spPr>
-        <p:style>
-          <a:lnRef idx="1">
-            <a:schemeClr val="accent1"/>
-          </a:lnRef>
-          <a:fillRef idx="3">
-            <a:schemeClr val="accent1"/>
-          </a:fillRef>
-          <a:effectRef idx="2">
-            <a:schemeClr val="accent1"/>
-          </a:effectRef>
-          <a:fontRef idx="minor">
-            <a:schemeClr val="lt1"/>
-          </a:fontRef>
-        </p:style>
-        <p:txBody>
-          <a:bodyPr rtlCol="0" anchor="ctr" wrap="square" lIns="36000" rIns="36000" tIns="18000" bIns="18000"/>
-          <a:lstStyle/>
-          <a:p>
-            <a:pPr algn="ctr"/>
-            <a:r>
-              <a:rPr sz="700" b="0">
-                <a:solidFill>
-                  <a:srgbClr val="FFFFFF"/>
-                </a:solidFill>
-                <a:latin typeface="Arial"/>
-              </a:rPr>
-              <a:t>Mapper.xml</a:t>
-            </a:r>
-          </a:p>
-        </p:txBody>
-      </p:sp>
-      <p:sp>
-        <p:nvSpPr>
-          <p:cNvPr id="62" name="TextBox 61"/>
+          </a:p>
+        </p:txBody>
+      </p:sp>
+      <p:sp>
+        <p:nvSpPr>
+          <p:cNvPr id="66" name="TextBox 65"/>
           <p:cNvSpPr txBox="1"/>
           <p:nvPr/>
         </p:nvSpPr>
         <p:spPr>
           <a:xfrm>
-            <a:off x="400000" y="4764000"/>
-            <a:ext cx="4350000" cy="140000"/>
+            <a:off x="1646000" y="4231000"/>
+            <a:ext cx="700000" cy="130000"/>
           </a:xfrm>
           <a:prstGeom prst="rect">
             <a:avLst/>
@@ -4954,7 +5395,7 @@
           </a:bodyPr>
           <a:lstStyle/>
           <a:p>
-            <a:pPr algn="ctr"/>
+            <a:pPr algn="l"/>
             <a:r>
               <a:rPr sz="650" b="0">
                 <a:solidFill>
@@ -4962,7 +5403,42 @@
                 </a:solidFill>
                 <a:latin typeface="Arial"/>
               </a:rPr>
-              <a:t>MCP 조회 서버(읽기 전용 4종)는 ①④⑦의 그래프만 노출 — 변환 실행은 노출하지 않는다</a:t>
+              <a:t>LLM 호출</a:t>
+            </a:r>
+          </a:p>
+        </p:txBody>
+      </p:sp>
+      <p:sp>
+        <p:nvSpPr>
+          <p:cNvPr id="67" name="TextBox 66"/>
+          <p:cNvSpPr txBox="1"/>
+          <p:nvPr/>
+        </p:nvSpPr>
+        <p:spPr>
+          <a:xfrm>
+            <a:off x="2500000" y="4231000"/>
+            <a:ext cx="2250000" cy="130000"/>
+          </a:xfrm>
+          <a:prstGeom prst="rect">
+            <a:avLst/>
+          </a:prstGeom>
+          <a:noFill/>
+        </p:spPr>
+        <p:txBody>
+          <a:bodyPr wrap="square" lIns="0" rIns="0" tIns="0" bIns="0">
+            <a:spAutoFit/>
+          </a:bodyPr>
+          <a:lstStyle/>
+          <a:p>
+            <a:pPr algn="r"/>
+            <a:r>
+              <a:rPr sz="650" b="0">
+                <a:solidFill>
+                  <a:srgbClr val="666666"/>
+                </a:solidFill>
+                <a:latin typeface="Arial"/>
+              </a:rPr>
+              <a:t>MCP 조회 서버(읽기 전용 4종) — 변환 실행 미노출</a:t>
             </a:r>
           </a:p>
         </p:txBody>
@@ -5317,26 +5793,26 @@
               <a:buNone/>
             </a:pPr>
             <a:r>
+              <a:rPr sz="950" b="1">
+                <a:solidFill>
+                  <a:srgbClr val="333333"/>
+                </a:solidFill>
+                <a:latin typeface="Arial"/>
+              </a:rPr>
+              <a:t>정적 검증 100% 통과 코드가 실행에서는 동작 불일치 — 검증 수단 자체가 부재</a:t>
+            </a:r>
+            <a:endParaRPr lang="en-US" sz="1000" dirty="0"/>
+          </a:p>
+          <a:p>
+            <a:pPr algn="l"/>
+            <a:r>
               <a:rPr sz="900" b="0">
                 <a:solidFill>
-                  <a:srgbClr val="333333"/>
-                </a:solidFill>
-                <a:latin typeface="Arial"/>
-              </a:rPr>
-              <a:t>정적 검증을 100% 통과한 코드가 실제 실행에서는 동작이 달랐습니다. 그런데 AS-IS 레포에 테스트가 없어 '기능이 맞는지'를 검증할 수단 자체가 없었습니다.</a:t>
-            </a:r>
-            <a:endParaRPr lang="en-US" sz="1000" dirty="0"/>
-          </a:p>
-          <a:p>
-            <a:pPr algn="l"/>
-            <a:r>
-              <a:rPr sz="900" b="0">
-                <a:solidFill>
                   <a:srgbClr val="666666"/>
                 </a:solidFill>
                 <a:latin typeface="Arial"/>
               </a:rPr>
-              <a:t>AlphaTrans(FSE 2025)도 같은 간극을 보고합니다 — 문법 96.40% vs 기능 동등성 25.14%.</a:t>
+              <a:t>AlphaTrans(FSE 2025) 동일 간극 보고 : 문법 96.40%  vs  기능 동등성 25.14%</a:t>
             </a:r>
           </a:p>
         </p:txBody>
@@ -5457,13 +5933,13 @@
               <a:buNone/>
             </a:pPr>
             <a:r>
-              <a:rPr sz="900" b="1">
+              <a:rPr sz="850" b="1">
                 <a:solidFill>
                   <a:srgbClr val="00A591"/>
                 </a:solidFill>
                 <a:latin typeface="Arial"/>
               </a:rPr>
-              <a:t>전제를 의심했습니다</a:t>
+              <a:t>전제 재검토</a:t>
             </a:r>
             <a:endParaRPr lang="en-US" sz="900" dirty="0"/>
           </a:p>
@@ -5476,12 +5952,24 @@
                 </a:solidFill>
                 <a:latin typeface="Arial"/>
               </a:rPr>
-              <a:t>"실행할 수단이 없다"가 틀렸습니다. 필요한 건 애플리케이션 기동이 아니라 F 메서드를 부를 최소 환경이었고, AS-IS가 쓰는 프레임워크 API는 10개 남짓의 닫힌 집합이었습니다.</a:t>
+              <a:t>“실행 수단이 없다”가 오판 — 필요한 건 앱 기동이 아닌 F 메서드 호출 환경.</a:t>
             </a:r>
           </a:p>
           <a:p>
             <a:pPr algn="l"/>
             <a:r>
+              <a:rPr sz="800" b="0">
+                <a:solidFill>
+                  <a:srgbClr val="666666"/>
+                </a:solidFill>
+                <a:latin typeface="Arial"/>
+              </a:rPr>
+              <a:t>AS-IS 프레임워크 API는 10개 남짓의 닫힌 집합</a:t>
+            </a:r>
+          </a:p>
+          <a:p>
+            <a:pPr algn="l"/>
+            <a:r>
               <a:rPr sz="300" b="0">
                 <a:solidFill>
                   <a:srgbClr val="666666"/>
@@ -5494,7 +5982,7 @@
           <a:p>
             <a:pPr algn="l"/>
             <a:r>
-              <a:rPr sz="800" b="1">
+              <a:rPr sz="850" b="1">
                 <a:solidFill>
                   <a:srgbClr val="333333"/>
                 </a:solidFill>
@@ -5512,13 +6000,37 @@
                 </a:solidFill>
                 <a:latin typeface="Arial"/>
               </a:rPr>
-              <a:t>데이터 계층을 양쪽 동일한 캔드 데이터로 고정 → 두 실행의 차이가 오직 포팅 차이에서만 나오게 설계. 0행/1행/3행으로 분기 경로를 훑습니다.</a:t>
+              <a:t>데이터 계층을 양쪽 동일 캔드 데이터로 고정 → 차이는 포팅 차이만</a:t>
             </a:r>
           </a:p>
           <a:p>
             <a:pPr algn="l"/>
             <a:r>
-              <a:rPr sz="800" b="1">
+              <a:rPr sz="800" b="0">
+                <a:solidFill>
+                  <a:srgbClr val="666666"/>
+                </a:solidFill>
+                <a:latin typeface="Arial"/>
+              </a:rPr>
+              <a:t>0행 / 1행 / 3행으로 분기 경로 전수</a:t>
+            </a:r>
+          </a:p>
+          <a:p>
+            <a:pPr algn="l"/>
+            <a:r>
+              <a:rPr sz="300" b="0">
+                <a:solidFill>
+                  <a:srgbClr val="666666"/>
+                </a:solidFill>
+                <a:latin typeface="Arial"/>
+              </a:rPr>
+              <a:t/>
+            </a:r>
+          </a:p>
+          <a:p>
+            <a:pPr algn="l"/>
+            <a:r>
+              <a:rPr sz="850" b="1">
                 <a:solidFill>
                   <a:srgbClr val="333333"/>
                 </a:solidFill>
@@ -5536,19 +6048,31 @@
                 </a:solidFill>
                 <a:latin typeface="Arial"/>
               </a:rPr>
-              <a:t>콜그래프에서 뽑은 실제 메서드명·반환 타입·카디널리티 불일치를 프롬프트에 명시적 계약으로 전달 (AlphaTrans의 조각별 콜러/콜리 메타데이터 방식).</a:t>
+              <a:t>콜그래프의 실제 메서드명·반환 타입·카디널리티를 프롬프트에 명시</a:t>
             </a:r>
           </a:p>
           <a:p>
             <a:pPr algn="l"/>
             <a:r>
-              <a:rPr sz="800" b="1">
+              <a:rPr sz="300" b="0">
+                <a:solidFill>
+                  <a:srgbClr val="666666"/>
+                </a:solidFill>
+                <a:latin typeface="Arial"/>
+              </a:rPr>
+              <a:t/>
+            </a:r>
+          </a:p>
+          <a:p>
+            <a:pPr algn="l"/>
+            <a:r>
+              <a:rPr sz="850" b="1">
                 <a:solidFill>
                   <a:srgbClr val="333333"/>
                 </a:solidFill>
                 <a:latin typeface="Arial"/>
               </a:rPr>
-              <a:t>③ ToT 수리 — 채점자를 LLM에서 분리</a:t>
+              <a:t>③ ToT 수리 — 채점자 분리</a:t>
             </a:r>
           </a:p>
           <a:p>
@@ -5560,19 +6084,31 @@
                 </a:solidFill>
                 <a:latin typeface="Arial"/>
               </a:rPr>
-              <a:t>후보를 병렬 생성하고 결정론적 검증기가 잔여 BLOCKER 수로 채점. 모델의 자기평가를 쓰지 않습니다.</a:t>
+              <a:t>후보 병렬 생성, 결정론적 검증기가 채점 (모델 자기평가 미사용)</a:t>
             </a:r>
           </a:p>
           <a:p>
             <a:pPr algn="l"/>
             <a:r>
-              <a:rPr sz="800" b="1">
+              <a:rPr sz="300" b="0">
+                <a:solidFill>
+                  <a:srgbClr val="666666"/>
+                </a:solidFill>
+                <a:latin typeface="Arial"/>
+              </a:rPr>
+              <a:t/>
+            </a:r>
+          </a:p>
+          <a:p>
+            <a:pPr algn="l"/>
+            <a:r>
+              <a:rPr sz="850" b="1">
                 <a:solidFill>
                   <a:srgbClr val="333333"/>
                 </a:solidFill>
                 <a:latin typeface="Arial"/>
               </a:rPr>
-              <a:t>④ 자동화하지 않을 것을 정했습니다</a:t>
+              <a:t>④ 자동화하지 않을 것을 확정</a:t>
             </a:r>
           </a:p>
           <a:p>
@@ -5584,7 +6120,7 @@
                 </a:solidFill>
                 <a:latin typeface="Arial"/>
               </a:rPr>
-              <a:t>원본 결함은 고치지 않고 보존·표시하고, 본 적 없는 패턴엔 규칙을 만들지 않습니다.</a:t>
+              <a:t>원본 결함은 보존·표시, 미확인 패턴에 규칙 생성 금지</a:t>
             </a:r>
           </a:p>
         </p:txBody>
@@ -5914,7 +6450,7 @@
                   </a:solidFill>
                   <a:latin typeface="Arial"/>
                 </a:rPr>
-                <a:t>정적 검증을 통과한 코드가 27건 중 9건만 일치. 원인(배관 규칙이 레코드셋 추출 단계를 빠뜨림)을 고쳐 48/48.</a:t>
+                <a:t>27건 중 9건 일치 → 원인(레코드셋 추출 누락) 수정 후 48/48</a:t>
               </a:r>
             </a:p>
           </p:txBody>
@@ -6064,7 +6600,7 @@
                   </a:solidFill>
                   <a:latin typeface="Arial"/>
                 </a:rPr>
-                <a:t>"P는 순수 위임"이 표본 1건짜리 가정이었음을 코퍼스 30화면 전수 확인으로 발견. 권한 게이트가 통째로 빠져 있었습니다.</a:t>
+                <a:t>“P는 순수 위임” = 표본 1건 가정. 30화면 전수 확인 → 권한 게이트 누락 발견</a:t>
               </a:r>
             </a:p>
           </p:txBody>
@@ -6214,7 +6750,7 @@
                   </a:solidFill>
                   <a:latin typeface="Arial"/>
                 </a:rPr>
-                <a:t>재시도 루프가 성공 불가능한 대상을 반복 호출하던 낭비 80%를 제거. 규칙 기반 회피 46% 포함.</a:t>
+                <a:t>성공 불가 대상 반복 호출 80% 제거 · 규칙 기반 회피 46% 포함</a:t>
               </a:r>
             </a:p>
           </p:txBody>

--- a/docs/weekly/assets/최종발표장표.pptx
+++ b/docs/weekly/assets/최종발표장표.pptx
@@ -2125,7 +2125,7 @@
                 </a:solidFill>
                 <a:latin typeface="Arial"/>
               </a:rPr>
-              <a:t>원본 결함 탐지 재현율</a:t>
+              <a:t>원본 결함 탐지 탐지율</a:t>
             </a:r>
           </a:p>
           <a:p>
@@ -2415,7 +2415,7 @@
                 </a:solidFill>
                 <a:latin typeface="Arial"/>
               </a:rPr>
-              <a:t>“결정론 변환에 LLM을 쓰지 않아 호출 46% 절감,</a:t>
+              <a:t>“규칙 기반 변환에 LLM을 쓰지 않아 호출 46% 절감,</a:t>
             </a:r>
             <a:endParaRPr lang="en-US" sz="950" dirty="0"/>
           </a:p>
@@ -3027,7 +3027,7 @@
                 </a:solidFill>
                 <a:latin typeface="Arial"/>
               </a:rPr>
-              <a:t>계획을 파일로 확정 → 이후 단계는 지목된 대상만 호출. Send() fan-out 병렬</a:t>
+              <a:t>계획을 파일로 확정 → 이후 단계는 지목된 대상만 호출. Send() 병렬 분배 병렬</a:t>
             </a:r>
           </a:p>
           <a:p>
@@ -3491,7 +3491,7 @@
                 </a:solidFill>
                 <a:latin typeface="Arial"/>
               </a:rPr>
-              <a:t>통상 ToT는 모델이 자기 가지를 자평 → 결정론적 검증기로 대체</a:t>
+              <a:t>통상 ToT는 모델이 자기 가지를 자평 → 규칙 기반 검증기로 대체</a:t>
             </a:r>
             <a:endParaRPr lang="en-US" sz="850" dirty="0"/>
           </a:p>
@@ -3534,7 +3534,7 @@
                 </a:solidFill>
                 <a:latin typeface="Arial"/>
               </a:rPr>
-              <a:t>채점자가 LLM이 아니라 결정론적 검증기</a:t>
+              <a:t>채점자가 LLM이 아니라 규칙 기반 검증기</a:t>
             </a:r>
           </a:p>
         </p:txBody>
@@ -3569,7 +3569,7 @@
                 </a:solidFill>
                 <a:latin typeface="Arial"/>
               </a:rPr>
-              <a:t>AS-IS  ·  화면 1개 = 5 fragment</a:t>
+              <a:t>AS-IS  ·  화면 1개 = 구성 파일 5종</a:t>
             </a:r>
           </a:p>
         </p:txBody>
@@ -4367,7 +4367,7 @@
                 </a:solidFill>
                 <a:latin typeface="Arial"/>
               </a:rPr>
-              <a:t>② 골격·DTO 생성</a:t>
+              <a:t>② 코드 뼈대·DTO 생성</a:t>
             </a:r>
           </a:p>
           <a:p>
@@ -4627,7 +4627,7 @@
                 </a:solidFill>
                 <a:latin typeface="Arial"/>
               </a:rPr>
-              <a:t>⑥ 동등성 L3</a:t>
+              <a:t>⑥ 동작 일치 L3</a:t>
             </a:r>
           </a:p>
           <a:p>
@@ -5324,7 +5324,7 @@
                 </a:solidFill>
                 <a:latin typeface="Arial"/>
               </a:rPr>
-              <a:t>결정론 (LLM 0회)</a:t>
+              <a:t>규칙 기반 (LLM 0회)</a:t>
             </a:r>
           </a:p>
         </p:txBody>
@@ -5812,7 +5812,7 @@
                 </a:solidFill>
                 <a:latin typeface="Arial"/>
               </a:rPr>
-              <a:t>AlphaTrans(FSE 2025) 동일 간극 보고 : 문법 96.40%  vs  기능 동등성 25.14%</a:t>
+              <a:t>AlphaTrans(FSE 2025) 동일 간극 보고 : 문법 96.40%  vs  동작 일치 25.14%</a:t>
             </a:r>
           </a:p>
         </p:txBody>
@@ -5988,7 +5988,7 @@
                 </a:solidFill>
                 <a:latin typeface="Arial"/>
               </a:rPr>
-              <a:t>① 최소 실행 하네스 (L3)</a:t>
+              <a:t>① 최소 실행 검증 실행 환경 (L3)</a:t>
             </a:r>
           </a:p>
           <a:p>
@@ -6000,7 +6000,7 @@
                 </a:solidFill>
                 <a:latin typeface="Arial"/>
               </a:rPr>
-              <a:t>데이터 계층을 양쪽 동일 캔드 데이터로 고정 → 차이는 포팅 차이만</a:t>
+              <a:t>데이터 계층을 양쪽 동일 고정 테스트 데이터로 고정 → 차이는 포팅 차이만</a:t>
             </a:r>
           </a:p>
           <a:p>
@@ -6036,7 +6036,7 @@
                 </a:solidFill>
                 <a:latin typeface="Arial"/>
               </a:rPr>
-              <a:t>② 피호출자 계약 JSON 주입</a:t>
+              <a:t>② 호출 대상 계약 JSON 주입</a:t>
             </a:r>
           </a:p>
           <a:p>
@@ -6048,7 +6048,7 @@
                 </a:solidFill>
                 <a:latin typeface="Arial"/>
               </a:rPr>
-              <a:t>콜그래프의 실제 메서드명·반환 타입·카디널리티를 프롬프트에 명시</a:t>
+              <a:t>호출 관계도의 실제 메서드명·반환 타입·결과 건수를 프롬프트에 명시</a:t>
             </a:r>
           </a:p>
           <a:p>
@@ -6084,7 +6084,7 @@
                 </a:solidFill>
                 <a:latin typeface="Arial"/>
               </a:rPr>
-              <a:t>후보 병렬 생성, 결정론적 검증기가 채점 (모델 자기평가 미사용)</a:t>
+              <a:t>후보 병렬 생성, 규칙 기반 검증기가 채점 (모델 자기평가 미사용)</a:t>
             </a:r>
           </a:p>
           <a:p>
@@ -6437,7 +6437,7 @@
                   </a:solidFill>
                   <a:latin typeface="Arial"/>
                 </a:rPr>
-                <a:t>F 계층 실행 일치율</a:t>
+                <a:t>업무 로직(F) 실행 일치율</a:t>
               </a:r>
               <a:endParaRPr lang="en-US" sz="850" dirty="0"/>
             </a:p>
@@ -6587,7 +6587,7 @@
                   </a:solidFill>
                   <a:latin typeface="Arial"/>
                 </a:rPr>
-                <a:t>Api 계층 페이로드 일치율</a:t>
+                <a:t>화면 요청(Api) 페이로드 일치율</a:t>
               </a:r>
               <a:endParaRPr lang="en-US" sz="850" dirty="0"/>
             </a:p>

--- a/docs/weekly/assets/최종발표장표.pptx
+++ b/docs/weekly/assets/최종발표장표.pptx
@@ -1950,7 +1950,7 @@
                 </a:solidFill>
                 <a:latin typeface="Arial"/>
               </a:rPr>
-              <a:t>Repairer  자기 수정, 라운드 상한 2</a:t>
+              <a:t>Repairer  자기 수정, 회차 상한 2</a:t>
             </a:r>
           </a:p>
           <a:p>
@@ -4379,7 +4379,7 @@
                 </a:solidFill>
                 <a:latin typeface="Arial"/>
               </a:rPr>
-              <a:t>시그니처 → 클래스</a:t>
+              <a:t>선언부 → 클래스</a:t>
             </a:r>
           </a:p>
         </p:txBody>
@@ -4804,7 +4804,7 @@
                 </a:solidFill>
                 <a:latin typeface="Arial"/>
               </a:rPr>
-              <a:t>⑤ 자기 수정은 ④ 검증 실패 시에만 ③으로 되돌린다 (라운드 상한 2)</a:t>
+              <a:t>⑤ 자기 수정은 ④ 검증 실패 시에만 ③으로 되돌린다 (회차 상한 2)</a:t>
             </a:r>
           </a:p>
         </p:txBody>

--- a/docs/weekly/assets/최종발표장표.pptx
+++ b/docs/weekly/assets/최종발표장표.pptx
@@ -1950,7 +1950,7 @@
                 </a:solidFill>
                 <a:latin typeface="Arial"/>
               </a:rPr>
-              <a:t>Repairer  자기 수정, 회차 상한 2</a:t>
+              <a:t>Repairer  검증 기반 자가 교정, 회차 상한 2</a:t>
             </a:r>
           </a:p>
           <a:p>
@@ -3443,7 +3443,7 @@
                 </a:solidFill>
                 <a:latin typeface="Arial"/>
               </a:rPr>
-              <a:t>Tree-of-Thoughts + Self-Correction</a:t>
+              <a:t>Tree-of-Thoughts + Validator-driven Self-Correction</a:t>
             </a:r>
             <a:endParaRPr lang="en-US" sz="950" dirty="0"/>
           </a:p>
@@ -4804,7 +4804,7 @@
                 </a:solidFill>
                 <a:latin typeface="Arial"/>
               </a:rPr>
-              <a:t>⑤ 자기 수정은 ④ 검증 실패 시에만 ③으로 되돌린다 (회차 상한 2)</a:t>
+              <a:t>⑤ 검증 기반 자가 교정은 ④ 검증 실패 시에만 ③으로 되돌린다 (회차 상한 2)</a:t>
             </a:r>
           </a:p>
         </p:txBody>

--- a/docs/weekly/assets/최종발표장표.pptx
+++ b/docs/weekly/assets/최종발표장표.pptx
@@ -3563,33 +3563,33 @@
           <a:p>
             <a:pPr algn="l"/>
             <a:r>
-              <a:rPr sz="750" b="1">
+              <a:rPr sz="800" b="1">
                 <a:solidFill>
                   <a:srgbClr val="666666"/>
                 </a:solidFill>
                 <a:latin typeface="Arial"/>
               </a:rPr>
-              <a:t>AS-IS  ·  화면 1개 = 구성 파일 5종</a:t>
-            </a:r>
-          </a:p>
-        </p:txBody>
-      </p:sp>
-      <p:sp>
-        <p:nvSpPr>
-          <p:cNvPr id="31" name="Rounded Rectangle 30"/>
-          <p:cNvSpPr/>
-          <p:nvPr/>
-        </p:nvSpPr>
-        <p:spPr>
-          <a:xfrm>
-            <a:off x="400000" y="870000"/>
-            <a:ext cx="841200" cy="250000"/>
-          </a:xfrm>
-          <a:prstGeom prst="roundRect">
-            <a:avLst/>
-          </a:prstGeom>
-          <a:solidFill>
-            <a:srgbClr val="E8ECF0"/>
+              <a:t>AS-IS   P · F · D BizUnit + XSQL   (구성 파일 5종)</a:t>
+            </a:r>
+          </a:p>
+        </p:txBody>
+      </p:sp>
+      <p:sp>
+        <p:nvSpPr>
+          <p:cNvPr id="31" name="Down Arrow 30"/>
+          <p:cNvSpPr/>
+          <p:nvPr/>
+        </p:nvSpPr>
+        <p:spPr>
+          <a:xfrm>
+            <a:off x="2529280" y="876000"/>
+            <a:ext cx="91440" cy="62000"/>
+          </a:xfrm>
+          <a:prstGeom prst="downArrow">
+            <a:avLst/>
+          </a:prstGeom>
+          <a:solidFill>
+            <a:srgbClr val="C5CED8"/>
           </a:solidFill>
           <a:ln>
             <a:noFill/>
@@ -3611,19 +3611,10 @@
           </a:fontRef>
         </p:style>
         <p:txBody>
-          <a:bodyPr rtlCol="0" anchor="ctr" wrap="square" lIns="36000" rIns="36000" tIns="18000" bIns="18000"/>
+          <a:bodyPr rtlCol="0" anchor="ctr"/>
           <a:lstStyle/>
           <a:p>
             <a:pPr algn="ctr"/>
-            <a:r>
-              <a:rPr sz="700" b="0">
-                <a:solidFill>
-                  <a:srgbClr val="333333"/>
-                </a:solidFill>
-                <a:latin typeface="Arial"/>
-              </a:rPr>
-              <a:t>.BIZUNIT</a:t>
-            </a:r>
           </a:p>
         </p:txBody>
       </p:sp>
@@ -3635,17 +3626,19 @@
         </p:nvSpPr>
         <p:spPr>
           <a:xfrm>
-            <a:off x="1277200" y="870000"/>
-            <a:ext cx="841200" cy="250000"/>
+            <a:off x="400000" y="944000"/>
+            <a:ext cx="4350000" cy="370000"/>
           </a:xfrm>
           <a:prstGeom prst="roundRect">
             <a:avLst/>
           </a:prstGeom>
           <a:solidFill>
-            <a:srgbClr val="E8ECF0"/>
-          </a:solidFill>
-          <a:ln>
-            <a:noFill/>
+            <a:srgbClr val="1F3564"/>
+          </a:solidFill>
+          <a:ln w="15875">
+            <a:solidFill>
+              <a:srgbClr val="00A591"/>
+            </a:solidFill>
           </a:ln>
           <a:effectLst/>
         </p:spPr>
@@ -3664,38 +3657,50 @@
           </a:fontRef>
         </p:style>
         <p:txBody>
-          <a:bodyPr rtlCol="0" anchor="ctr" wrap="square" lIns="36000" rIns="36000" tIns="18000" bIns="18000"/>
+          <a:bodyPr rtlCol="0" anchor="ctr" wrap="square" lIns="28000" rIns="28000" tIns="14000" bIns="14000"/>
           <a:lstStyle/>
           <a:p>
             <a:pPr algn="ctr"/>
             <a:r>
-              <a:rPr sz="700" b="0">
-                <a:solidFill>
-                  <a:srgbClr val="333333"/>
-                </a:solidFill>
-                <a:latin typeface="Arial"/>
-              </a:rPr>
-              <a:t>P BizUnit</a:t>
-            </a:r>
-          </a:p>
-        </p:txBody>
-      </p:sp>
-      <p:sp>
-        <p:nvSpPr>
-          <p:cNvPr id="33" name="Rounded Rectangle 32"/>
-          <p:cNvSpPr/>
-          <p:nvPr/>
-        </p:nvSpPr>
-        <p:spPr>
-          <a:xfrm>
-            <a:off x="2154400" y="870000"/>
-            <a:ext cx="841200" cy="250000"/>
-          </a:xfrm>
-          <a:prstGeom prst="roundRect">
-            <a:avLst/>
-          </a:prstGeom>
-          <a:solidFill>
-            <a:srgbClr val="E8ECF0"/>
+              <a:rPr sz="950" b="1">
+                <a:solidFill>
+                  <a:srgbClr val="FFFFFF"/>
+                </a:solidFill>
+                <a:latin typeface="Arial"/>
+              </a:rPr>
+              <a:t>①  PLAN   계획 수립 — 무엇을 어떤 도구로 처리할지 먼저 확정</a:t>
+            </a:r>
+          </a:p>
+          <a:p>
+            <a:pPr algn="ctr"/>
+            <a:r>
+              <a:rPr sz="750" b="0">
+                <a:solidFill>
+                  <a:srgbClr val="C9D6E8"/>
+                </a:solidFill>
+                <a:latin typeface="Arial"/>
+              </a:rPr>
+              <a:t>정적 분석 · LLM 미사용 · 파일로 고정해 이후 단계가 이 계획만 따른다</a:t>
+            </a:r>
+          </a:p>
+        </p:txBody>
+      </p:sp>
+      <p:sp>
+        <p:nvSpPr>
+          <p:cNvPr id="33" name="Down Arrow 32"/>
+          <p:cNvSpPr/>
+          <p:nvPr/>
+        </p:nvSpPr>
+        <p:spPr>
+          <a:xfrm>
+            <a:off x="2529280" y="1320000"/>
+            <a:ext cx="91440" cy="62000"/>
+          </a:xfrm>
+          <a:prstGeom prst="downArrow">
+            <a:avLst/>
+          </a:prstGeom>
+          <a:solidFill>
+            <a:srgbClr val="C5CED8"/>
           </a:solidFill>
           <a:ln>
             <a:noFill/>
@@ -3717,19 +3722,10 @@
           </a:fontRef>
         </p:style>
         <p:txBody>
-          <a:bodyPr rtlCol="0" anchor="ctr" wrap="square" lIns="36000" rIns="36000" tIns="18000" bIns="18000"/>
+          <a:bodyPr rtlCol="0" anchor="ctr"/>
           <a:lstStyle/>
           <a:p>
             <a:pPr algn="ctr"/>
-            <a:r>
-              <a:rPr sz="700" b="0">
-                <a:solidFill>
-                  <a:srgbClr val="333333"/>
-                </a:solidFill>
-                <a:latin typeface="Arial"/>
-              </a:rPr>
-              <a:t>F BizUnit</a:t>
-            </a:r>
           </a:p>
         </p:txBody>
       </p:sp>
@@ -3741,454 +3737,14 @@
         </p:nvSpPr>
         <p:spPr>
           <a:xfrm>
-            <a:off x="3031600" y="870000"/>
-            <a:ext cx="841200" cy="250000"/>
+            <a:off x="400000" y="1388000"/>
+            <a:ext cx="4350000" cy="1020000"/>
           </a:xfrm>
           <a:prstGeom prst="roundRect">
             <a:avLst/>
           </a:prstGeom>
           <a:solidFill>
-            <a:srgbClr val="E8ECF0"/>
-          </a:solidFill>
-          <a:ln>
-            <a:noFill/>
-          </a:ln>
-          <a:effectLst/>
-        </p:spPr>
-        <p:style>
-          <a:lnRef idx="1">
-            <a:schemeClr val="accent1"/>
-          </a:lnRef>
-          <a:fillRef idx="3">
-            <a:schemeClr val="accent1"/>
-          </a:fillRef>
-          <a:effectRef idx="2">
-            <a:schemeClr val="accent1"/>
-          </a:effectRef>
-          <a:fontRef idx="minor">
-            <a:schemeClr val="lt1"/>
-          </a:fontRef>
-        </p:style>
-        <p:txBody>
-          <a:bodyPr rtlCol="0" anchor="ctr" wrap="square" lIns="36000" rIns="36000" tIns="18000" bIns="18000"/>
-          <a:lstStyle/>
-          <a:p>
-            <a:pPr algn="ctr"/>
-            <a:r>
-              <a:rPr sz="700" b="0">
-                <a:solidFill>
-                  <a:srgbClr val="333333"/>
-                </a:solidFill>
-                <a:latin typeface="Arial"/>
-              </a:rPr>
-              <a:t>D BizUnit</a:t>
-            </a:r>
-          </a:p>
-        </p:txBody>
-      </p:sp>
-      <p:sp>
-        <p:nvSpPr>
-          <p:cNvPr id="35" name="Rounded Rectangle 34"/>
-          <p:cNvSpPr/>
-          <p:nvPr/>
-        </p:nvSpPr>
-        <p:spPr>
-          <a:xfrm>
-            <a:off x="3908800" y="870000"/>
-            <a:ext cx="841200" cy="250000"/>
-          </a:xfrm>
-          <a:prstGeom prst="roundRect">
-            <a:avLst/>
-          </a:prstGeom>
-          <a:solidFill>
-            <a:srgbClr val="E8ECF0"/>
-          </a:solidFill>
-          <a:ln>
-            <a:noFill/>
-          </a:ln>
-          <a:effectLst/>
-        </p:spPr>
-        <p:style>
-          <a:lnRef idx="1">
-            <a:schemeClr val="accent1"/>
-          </a:lnRef>
-          <a:fillRef idx="3">
-            <a:schemeClr val="accent1"/>
-          </a:fillRef>
-          <a:effectRef idx="2">
-            <a:schemeClr val="accent1"/>
-          </a:effectRef>
-          <a:fontRef idx="minor">
-            <a:schemeClr val="lt1"/>
-          </a:fontRef>
-        </p:style>
-        <p:txBody>
-          <a:bodyPr rtlCol="0" anchor="ctr" wrap="square" lIns="36000" rIns="36000" tIns="18000" bIns="18000"/>
-          <a:lstStyle/>
-          <a:p>
-            <a:pPr algn="ctr"/>
-            <a:r>
-              <a:rPr sz="700" b="0">
-                <a:solidFill>
-                  <a:srgbClr val="333333"/>
-                </a:solidFill>
-                <a:latin typeface="Arial"/>
-              </a:rPr>
-              <a:t>XSQL</a:t>
-            </a:r>
-          </a:p>
-        </p:txBody>
-      </p:sp>
-      <p:sp>
-        <p:nvSpPr>
-          <p:cNvPr id="36" name="Down Arrow 35"/>
-          <p:cNvSpPr/>
-          <p:nvPr/>
-        </p:nvSpPr>
-        <p:spPr>
-          <a:xfrm>
-            <a:off x="2529280" y="1128000"/>
-            <a:ext cx="91440" cy="74000"/>
-          </a:xfrm>
-          <a:prstGeom prst="downArrow">
-            <a:avLst/>
-          </a:prstGeom>
-          <a:solidFill>
-            <a:srgbClr val="C5CED8"/>
-          </a:solidFill>
-          <a:ln>
-            <a:noFill/>
-          </a:ln>
-          <a:effectLst/>
-        </p:spPr>
-        <p:style>
-          <a:lnRef idx="1">
-            <a:schemeClr val="accent1"/>
-          </a:lnRef>
-          <a:fillRef idx="3">
-            <a:schemeClr val="accent1"/>
-          </a:fillRef>
-          <a:effectRef idx="2">
-            <a:schemeClr val="accent1"/>
-          </a:effectRef>
-          <a:fontRef idx="minor">
-            <a:schemeClr val="lt1"/>
-          </a:fontRef>
-        </p:style>
-        <p:txBody>
-          <a:bodyPr rtlCol="0" anchor="ctr"/>
-          <a:lstStyle/>
-          <a:p>
-            <a:pPr algn="ctr"/>
-          </a:p>
-        </p:txBody>
-      </p:sp>
-      <p:sp>
-        <p:nvSpPr>
-          <p:cNvPr id="37" name="Rounded Rectangle 36"/>
-          <p:cNvSpPr/>
-          <p:nvPr/>
-        </p:nvSpPr>
-        <p:spPr>
-          <a:xfrm>
-            <a:off x="400000" y="1210000"/>
-            <a:ext cx="4350000" cy="620000"/>
-          </a:xfrm>
-          <a:prstGeom prst="roundRect">
-            <a:avLst/>
-          </a:prstGeom>
-          <a:solidFill>
-            <a:srgbClr val="1F3564"/>
-          </a:solidFill>
-          <a:ln w="19050">
-            <a:solidFill>
-              <a:srgbClr val="00A591"/>
-            </a:solidFill>
-          </a:ln>
-          <a:effectLst/>
-        </p:spPr>
-        <p:style>
-          <a:lnRef idx="1">
-            <a:schemeClr val="accent1"/>
-          </a:lnRef>
-          <a:fillRef idx="3">
-            <a:schemeClr val="accent1"/>
-          </a:fillRef>
-          <a:effectRef idx="2">
-            <a:schemeClr val="accent1"/>
-          </a:effectRef>
-          <a:fontRef idx="minor">
-            <a:schemeClr val="lt1"/>
-          </a:fontRef>
-        </p:style>
-        <p:txBody>
-          <a:bodyPr rtlCol="0" anchor="ctr" wrap="square" lIns="28000" rIns="28000" tIns="14000" bIns="14000"/>
-          <a:lstStyle/>
-          <a:p>
-            <a:pPr algn="ctr"/>
-            <a:r>
-              <a:rPr sz="950" b="1">
-                <a:solidFill>
-                  <a:srgbClr val="FFFFFF"/>
-                </a:solidFill>
-                <a:latin typeface="Arial"/>
-              </a:rPr>
-              <a:t>① Planner  —  무엇을 어떤 도구로 처리할지 먼저 판단한다</a:t>
-            </a:r>
-          </a:p>
-          <a:p>
-            <a:pPr algn="ctr"/>
-            <a:r>
-              <a:rPr sz="750" b="0">
-                <a:solidFill>
-                  <a:srgbClr val="C9D6E8"/>
-                </a:solidFill>
-                <a:latin typeface="Arial"/>
-              </a:rPr>
-              <a:t>메서드 단위로 규칙 / LLM을 가르고, 호출 대상·순서·예산을 확정</a:t>
-            </a:r>
-          </a:p>
-          <a:p>
-            <a:pPr algn="ctr"/>
-            <a:r>
-              <a:rPr sz="700" b="0">
-                <a:solidFill>
-                  <a:srgbClr val="00A591"/>
-                </a:solidFill>
-                <a:latin typeface="Arial"/>
-              </a:rPr>
-              <a:t>정적 분석 · LLM 미사용 · conversion-plan.json 으로 고정</a:t>
-            </a:r>
-          </a:p>
-        </p:txBody>
-      </p:sp>
-      <p:sp>
-        <p:nvSpPr>
-          <p:cNvPr id="38" name="Down Arrow 37"/>
-          <p:cNvSpPr/>
-          <p:nvPr/>
-        </p:nvSpPr>
-        <p:spPr>
-          <a:xfrm>
-            <a:off x="898030" y="1838000"/>
-            <a:ext cx="91440" cy="74000"/>
-          </a:xfrm>
-          <a:prstGeom prst="downArrow">
-            <a:avLst/>
-          </a:prstGeom>
-          <a:solidFill>
-            <a:srgbClr val="C5CED8"/>
-          </a:solidFill>
-          <a:ln>
-            <a:noFill/>
-          </a:ln>
-          <a:effectLst/>
-        </p:spPr>
-        <p:style>
-          <a:lnRef idx="1">
-            <a:schemeClr val="accent1"/>
-          </a:lnRef>
-          <a:fillRef idx="3">
-            <a:schemeClr val="accent1"/>
-          </a:fillRef>
-          <a:effectRef idx="2">
-            <a:schemeClr val="accent1"/>
-          </a:effectRef>
-          <a:fontRef idx="minor">
-            <a:schemeClr val="lt1"/>
-          </a:fontRef>
-        </p:style>
-        <p:txBody>
-          <a:bodyPr rtlCol="0" anchor="ctr"/>
-          <a:lstStyle/>
-          <a:p>
-            <a:pPr algn="ctr"/>
-          </a:p>
-        </p:txBody>
-      </p:sp>
-      <p:sp>
-        <p:nvSpPr>
-          <p:cNvPr id="39" name="Down Arrow 38"/>
-          <p:cNvSpPr/>
-          <p:nvPr/>
-        </p:nvSpPr>
-        <p:spPr>
-          <a:xfrm>
-            <a:off x="1985530" y="1838000"/>
-            <a:ext cx="91440" cy="74000"/>
-          </a:xfrm>
-          <a:prstGeom prst="downArrow">
-            <a:avLst/>
-          </a:prstGeom>
-          <a:solidFill>
-            <a:srgbClr val="C5CED8"/>
-          </a:solidFill>
-          <a:ln>
-            <a:noFill/>
-          </a:ln>
-          <a:effectLst/>
-        </p:spPr>
-        <p:style>
-          <a:lnRef idx="1">
-            <a:schemeClr val="accent1"/>
-          </a:lnRef>
-          <a:fillRef idx="3">
-            <a:schemeClr val="accent1"/>
-          </a:fillRef>
-          <a:effectRef idx="2">
-            <a:schemeClr val="accent1"/>
-          </a:effectRef>
-          <a:fontRef idx="minor">
-            <a:schemeClr val="lt1"/>
-          </a:fontRef>
-        </p:style>
-        <p:txBody>
-          <a:bodyPr rtlCol="0" anchor="ctr"/>
-          <a:lstStyle/>
-          <a:p>
-            <a:pPr algn="ctr"/>
-          </a:p>
-        </p:txBody>
-      </p:sp>
-      <p:sp>
-        <p:nvSpPr>
-          <p:cNvPr id="40" name="Down Arrow 39"/>
-          <p:cNvSpPr/>
-          <p:nvPr/>
-        </p:nvSpPr>
-        <p:spPr>
-          <a:xfrm>
-            <a:off x="3073030" y="1838000"/>
-            <a:ext cx="91440" cy="74000"/>
-          </a:xfrm>
-          <a:prstGeom prst="downArrow">
-            <a:avLst/>
-          </a:prstGeom>
-          <a:solidFill>
-            <a:srgbClr val="C5CED8"/>
-          </a:solidFill>
-          <a:ln>
-            <a:noFill/>
-          </a:ln>
-          <a:effectLst/>
-        </p:spPr>
-        <p:style>
-          <a:lnRef idx="1">
-            <a:schemeClr val="accent1"/>
-          </a:lnRef>
-          <a:fillRef idx="3">
-            <a:schemeClr val="accent1"/>
-          </a:fillRef>
-          <a:effectRef idx="2">
-            <a:schemeClr val="accent1"/>
-          </a:effectRef>
-          <a:fontRef idx="minor">
-            <a:schemeClr val="lt1"/>
-          </a:fontRef>
-        </p:style>
-        <p:txBody>
-          <a:bodyPr rtlCol="0" anchor="ctr"/>
-          <a:lstStyle/>
-          <a:p>
-            <a:pPr algn="ctr"/>
-          </a:p>
-        </p:txBody>
-      </p:sp>
-      <p:sp>
-        <p:nvSpPr>
-          <p:cNvPr id="41" name="Down Arrow 40"/>
-          <p:cNvSpPr/>
-          <p:nvPr/>
-        </p:nvSpPr>
-        <p:spPr>
-          <a:xfrm>
-            <a:off x="4160530" y="1838000"/>
-            <a:ext cx="91440" cy="74000"/>
-          </a:xfrm>
-          <a:prstGeom prst="downArrow">
-            <a:avLst/>
-          </a:prstGeom>
-          <a:solidFill>
-            <a:srgbClr val="C5CED8"/>
-          </a:solidFill>
-          <a:ln>
-            <a:noFill/>
-          </a:ln>
-          <a:effectLst/>
-        </p:spPr>
-        <p:style>
-          <a:lnRef idx="1">
-            <a:schemeClr val="accent1"/>
-          </a:lnRef>
-          <a:fillRef idx="3">
-            <a:schemeClr val="accent1"/>
-          </a:fillRef>
-          <a:effectRef idx="2">
-            <a:schemeClr val="accent1"/>
-          </a:effectRef>
-          <a:fontRef idx="minor">
-            <a:schemeClr val="lt1"/>
-          </a:fontRef>
-        </p:style>
-        <p:txBody>
-          <a:bodyPr rtlCol="0" anchor="ctr"/>
-          <a:lstStyle/>
-          <a:p>
-            <a:pPr algn="ctr"/>
-          </a:p>
-        </p:txBody>
-      </p:sp>
-      <p:sp>
-        <p:nvSpPr>
-          <p:cNvPr id="42" name="TextBox 41"/>
-          <p:cNvSpPr txBox="1"/>
-          <p:nvPr/>
-        </p:nvSpPr>
-        <p:spPr>
-          <a:xfrm>
-            <a:off x="400000" y="1844000"/>
-            <a:ext cx="4350000" cy="120000"/>
-          </a:xfrm>
-          <a:prstGeom prst="rect">
-            <a:avLst/>
-          </a:prstGeom>
-          <a:noFill/>
-        </p:spPr>
-        <p:txBody>
-          <a:bodyPr wrap="square" lIns="0" rIns="0" tIns="0" bIns="0">
-            <a:spAutoFit/>
-          </a:bodyPr>
-          <a:lstStyle/>
-          <a:p>
-            <a:pPr algn="l"/>
-            <a:r>
-              <a:rPr sz="600" b="0">
-                <a:solidFill>
-                  <a:srgbClr val="666666"/>
-                </a:solidFill>
-                <a:latin typeface="Arial"/>
-              </a:rPr>
-              <a:t/>
-            </a:r>
-          </a:p>
-        </p:txBody>
-      </p:sp>
-      <p:sp>
-        <p:nvSpPr>
-          <p:cNvPr id="43" name="Rounded Rectangle 42"/>
-          <p:cNvSpPr/>
-          <p:nvPr/>
-        </p:nvSpPr>
-        <p:spPr>
-          <a:xfrm>
-            <a:off x="400000" y="1920000"/>
-            <a:ext cx="4350000" cy="1191000"/>
-          </a:xfrm>
-          <a:prstGeom prst="roundRect">
-            <a:avLst/>
-          </a:prstGeom>
-          <a:solidFill>
-            <a:srgbClr val="F7F9FA"/>
+            <a:srgbClr val="FAFBFC"/>
           </a:solidFill>
           <a:ln w="9525">
             <a:solidFill>
@@ -4221,14 +3777,14 @@
       </p:sp>
       <p:sp>
         <p:nvSpPr>
-          <p:cNvPr id="44" name="TextBox 43"/>
+          <p:cNvPr id="35" name="TextBox 34"/>
           <p:cNvSpPr txBox="1"/>
           <p:nvPr/>
         </p:nvSpPr>
         <p:spPr>
           <a:xfrm>
-            <a:off x="500000" y="1975000"/>
-            <a:ext cx="4150000" cy="165000"/>
+            <a:off x="500000" y="1436000"/>
+            <a:ext cx="4150000" cy="150000"/>
           </a:xfrm>
           <a:prstGeom prst="rect">
             <a:avLst/>
@@ -4243,27 +3799,27 @@
           <a:p>
             <a:pPr algn="l"/>
             <a:r>
-              <a:rPr sz="750" b="1">
+              <a:rPr sz="850" b="1">
                 <a:solidFill>
                   <a:srgbClr val="1F3564"/>
                 </a:solidFill>
                 <a:latin typeface="Arial"/>
               </a:rPr>
-              <a:t>Planner가 지목한 대상만 호출  —  모델이 도구를 스스로 고르지 않는다</a:t>
-            </a:r>
-          </a:p>
-        </p:txBody>
-      </p:sp>
-      <p:sp>
-        <p:nvSpPr>
-          <p:cNvPr id="45" name="Rounded Rectangle 44"/>
-          <p:cNvSpPr/>
-          <p:nvPr/>
-        </p:nvSpPr>
-        <p:spPr>
-          <a:xfrm>
-            <a:off x="520000" y="2125000"/>
-            <a:ext cx="993000" cy="430000"/>
+              <a:t>추론 순환   REASON → ACT → OBSERVE → REFLECT</a:t>
+            </a:r>
+          </a:p>
+        </p:txBody>
+      </p:sp>
+      <p:sp>
+        <p:nvSpPr>
+          <p:cNvPr id="36" name="Rounded Rectangle 35"/>
+          <p:cNvSpPr/>
+          <p:nvPr/>
+        </p:nvSpPr>
+        <p:spPr>
+          <a:xfrm>
+            <a:off x="542000" y="1613000"/>
+            <a:ext cx="985000" cy="490000"/>
           </a:xfrm>
           <a:prstGeom prst="roundRect">
             <a:avLst/>
@@ -4296,45 +3852,45 @@
           <a:p>
             <a:pPr algn="ctr"/>
             <a:r>
-              <a:rPr sz="750" b="1">
+              <a:rPr sz="900" b="1">
                 <a:solidFill>
                   <a:srgbClr val="FFFFFF"/>
                 </a:solidFill>
                 <a:latin typeface="Arial"/>
               </a:rPr>
-              <a:t>② 규칙 변환기</a:t>
+              <a:t>REASON</a:t>
             </a:r>
           </a:p>
           <a:p>
             <a:pPr algn="ctr"/>
             <a:r>
-              <a:rPr sz="650" b="0">
-                <a:solidFill>
-                  <a:srgbClr val="DDE6EE"/>
-                </a:solidFill>
-                <a:latin typeface="Arial"/>
-              </a:rPr>
-              <a:t>iBatis → MyBatis</a:t>
-            </a:r>
-          </a:p>
-        </p:txBody>
-      </p:sp>
-      <p:sp>
-        <p:nvSpPr>
-          <p:cNvPr id="46" name="Rounded Rectangle 45"/>
-          <p:cNvSpPr/>
-          <p:nvPr/>
-        </p:nvSpPr>
-        <p:spPr>
-          <a:xfrm>
-            <a:off x="1559000" y="2125000"/>
-            <a:ext cx="993000" cy="430000"/>
+              <a:rPr sz="700" b="0">
+                <a:solidFill>
+                  <a:srgbClr val="DEE8F0"/>
+                </a:solidFill>
+                <a:latin typeface="Arial"/>
+              </a:rPr>
+              <a:t>계획이 지목한 대상 판단</a:t>
+            </a:r>
+          </a:p>
+        </p:txBody>
+      </p:sp>
+      <p:sp>
+        <p:nvSpPr>
+          <p:cNvPr id="37" name="Rounded Rectangle 36"/>
+          <p:cNvSpPr/>
+          <p:nvPr/>
+        </p:nvSpPr>
+        <p:spPr>
+          <a:xfrm>
+            <a:off x="1569000" y="1613000"/>
+            <a:ext cx="985000" cy="490000"/>
           </a:xfrm>
           <a:prstGeom prst="roundRect">
             <a:avLst/>
           </a:prstGeom>
           <a:solidFill>
-            <a:srgbClr val="00A591"/>
+            <a:srgbClr val="1F3564"/>
           </a:solidFill>
           <a:ln>
             <a:noFill/>
@@ -4361,45 +3917,45 @@
           <a:p>
             <a:pPr algn="ctr"/>
             <a:r>
-              <a:rPr sz="750" b="1">
+              <a:rPr sz="900" b="1">
                 <a:solidFill>
                   <a:srgbClr val="FFFFFF"/>
                 </a:solidFill>
                 <a:latin typeface="Arial"/>
               </a:rPr>
-              <a:t>② 코드 뼈대·DTO 생성</a:t>
+              <a:t>ACT</a:t>
             </a:r>
           </a:p>
           <a:p>
             <a:pPr algn="ctr"/>
             <a:r>
-              <a:rPr sz="650" b="0">
-                <a:solidFill>
-                  <a:srgbClr val="DDE6EE"/>
-                </a:solidFill>
-                <a:latin typeface="Arial"/>
-              </a:rPr>
-              <a:t>선언부 → 클래스</a:t>
-            </a:r>
-          </a:p>
-        </p:txBody>
-      </p:sp>
-      <p:sp>
-        <p:nvSpPr>
-          <p:cNvPr id="47" name="Rounded Rectangle 46"/>
-          <p:cNvSpPr/>
-          <p:nvPr/>
-        </p:nvSpPr>
-        <p:spPr>
-          <a:xfrm>
-            <a:off x="2598000" y="2125000"/>
-            <a:ext cx="993000" cy="430000"/>
+              <a:rPr sz="700" b="0">
+                <a:solidFill>
+                  <a:srgbClr val="DEE8F0"/>
+                </a:solidFill>
+                <a:latin typeface="Arial"/>
+              </a:rPr>
+              <a:t>도구 호출 · LLM 포팅</a:t>
+            </a:r>
+          </a:p>
+        </p:txBody>
+      </p:sp>
+      <p:sp>
+        <p:nvSpPr>
+          <p:cNvPr id="38" name="Rounded Rectangle 37"/>
+          <p:cNvSpPr/>
+          <p:nvPr/>
+        </p:nvSpPr>
+        <p:spPr>
+          <a:xfrm>
+            <a:off x="2596000" y="1613000"/>
+            <a:ext cx="985000" cy="490000"/>
           </a:xfrm>
           <a:prstGeom prst="roundRect">
             <a:avLst/>
           </a:prstGeom>
           <a:solidFill>
-            <a:srgbClr val="1F3564"/>
+            <a:srgbClr val="00A591"/>
           </a:solidFill>
           <a:ln>
             <a:noFill/>
@@ -4426,45 +3982,45 @@
           <a:p>
             <a:pPr algn="ctr"/>
             <a:r>
-              <a:rPr sz="750" b="1">
+              <a:rPr sz="900" b="1">
                 <a:solidFill>
                   <a:srgbClr val="FFFFFF"/>
                 </a:solidFill>
                 <a:latin typeface="Arial"/>
               </a:rPr>
-              <a:t>③ LLM Gateway</a:t>
+              <a:t>OBSERVE</a:t>
             </a:r>
           </a:p>
           <a:p>
             <a:pPr algn="ctr"/>
             <a:r>
-              <a:rPr sz="650" b="0">
-                <a:solidFill>
-                  <a:srgbClr val="DDE6EE"/>
-                </a:solidFill>
-                <a:latin typeface="Arial"/>
-              </a:rPr>
-              <a:t>업무 로직 포팅</a:t>
-            </a:r>
-          </a:p>
-        </p:txBody>
-      </p:sp>
-      <p:sp>
-        <p:nvSpPr>
-          <p:cNvPr id="48" name="Rounded Rectangle 47"/>
-          <p:cNvSpPr/>
-          <p:nvPr/>
-        </p:nvSpPr>
-        <p:spPr>
-          <a:xfrm>
-            <a:off x="3637000" y="2125000"/>
-            <a:ext cx="993000" cy="430000"/>
+              <a:rPr sz="700" b="0">
+                <a:solidFill>
+                  <a:srgbClr val="DEE8F0"/>
+                </a:solidFill>
+                <a:latin typeface="Arial"/>
+              </a:rPr>
+              <a:t>규칙 기반 검증</a:t>
+            </a:r>
+          </a:p>
+        </p:txBody>
+      </p:sp>
+      <p:sp>
+        <p:nvSpPr>
+          <p:cNvPr id="39" name="Rounded Rectangle 38"/>
+          <p:cNvSpPr/>
+          <p:nvPr/>
+        </p:nvSpPr>
+        <p:spPr>
+          <a:xfrm>
+            <a:off x="3623000" y="1613000"/>
+            <a:ext cx="985000" cy="490000"/>
           </a:xfrm>
           <a:prstGeom prst="roundRect">
             <a:avLst/>
           </a:prstGeom>
           <a:solidFill>
-            <a:srgbClr val="00A591"/>
+            <a:srgbClr val="B4621A"/>
           </a:solidFill>
           <a:ln>
             <a:noFill/>
@@ -4491,45 +4047,45 @@
           <a:p>
             <a:pPr algn="ctr"/>
             <a:r>
-              <a:rPr sz="750" b="1">
+              <a:rPr sz="900" b="1">
                 <a:solidFill>
                   <a:srgbClr val="FFFFFF"/>
                 </a:solidFill>
                 <a:latin typeface="Arial"/>
               </a:rPr>
-              <a:t>④ 정적 검증기</a:t>
+              <a:t>REFLECT</a:t>
             </a:r>
           </a:p>
           <a:p>
             <a:pPr algn="ctr"/>
             <a:r>
-              <a:rPr sz="650" b="0">
-                <a:solidFill>
-                  <a:srgbClr val="DDE6EE"/>
-                </a:solidFill>
-                <a:latin typeface="Arial"/>
-              </a:rPr>
-              <a:t>변환기와 분리</a:t>
-            </a:r>
-          </a:p>
-        </p:txBody>
-      </p:sp>
-      <p:sp>
-        <p:nvSpPr>
-          <p:cNvPr id="49" name="Rounded Rectangle 48"/>
-          <p:cNvSpPr/>
-          <p:nvPr/>
-        </p:nvSpPr>
-        <p:spPr>
-          <a:xfrm>
-            <a:off x="520000" y="2601000"/>
-            <a:ext cx="993000" cy="430000"/>
-          </a:xfrm>
-          <a:prstGeom prst="roundRect">
-            <a:avLst/>
-          </a:prstGeom>
-          <a:solidFill>
-            <a:srgbClr val="1F3564"/>
+              <a:rPr sz="700" b="0">
+                <a:solidFill>
+                  <a:srgbClr val="DEE8F0"/>
+                </a:solidFill>
+                <a:latin typeface="Arial"/>
+              </a:rPr>
+              <a:t>교정 판단 · 회차 상한 2</a:t>
+            </a:r>
+          </a:p>
+        </p:txBody>
+      </p:sp>
+      <p:sp>
+        <p:nvSpPr>
+          <p:cNvPr id="40" name="Right Arrow 39"/>
+          <p:cNvSpPr/>
+          <p:nvPr/>
+        </p:nvSpPr>
+        <p:spPr>
+          <a:xfrm>
+            <a:off x="1533000" y="1824000"/>
+            <a:ext cx="30000" cy="68000"/>
+          </a:xfrm>
+          <a:prstGeom prst="rightArrow">
+            <a:avLst/>
+          </a:prstGeom>
+          <a:solidFill>
+            <a:srgbClr val="B8C2CC"/>
           </a:solidFill>
           <a:ln>
             <a:noFill/>
@@ -4551,50 +4107,29 @@
           </a:fontRef>
         </p:style>
         <p:txBody>
-          <a:bodyPr rtlCol="0" anchor="ctr" wrap="square" lIns="28000" rIns="28000" tIns="14000" bIns="14000"/>
+          <a:bodyPr rtlCol="0" anchor="ctr"/>
           <a:lstStyle/>
           <a:p>
             <a:pPr algn="ctr"/>
-            <a:r>
-              <a:rPr sz="750" b="1">
-                <a:solidFill>
-                  <a:srgbClr val="FFFFFF"/>
-                </a:solidFill>
-                <a:latin typeface="Arial"/>
-              </a:rPr>
-              <a:t>⑤ ToT 수리기</a:t>
-            </a:r>
-          </a:p>
-          <a:p>
-            <a:pPr algn="ctr"/>
-            <a:r>
-              <a:rPr sz="650" b="0">
-                <a:solidFill>
-                  <a:srgbClr val="DDE6EE"/>
-                </a:solidFill>
-                <a:latin typeface="Arial"/>
-              </a:rPr>
-              <a:t>후보 N개 → 채점</a:t>
-            </a:r>
-          </a:p>
-        </p:txBody>
-      </p:sp>
-      <p:sp>
-        <p:nvSpPr>
-          <p:cNvPr id="50" name="Rounded Rectangle 49"/>
-          <p:cNvSpPr/>
-          <p:nvPr/>
-        </p:nvSpPr>
-        <p:spPr>
-          <a:xfrm>
-            <a:off x="1559000" y="2601000"/>
-            <a:ext cx="993000" cy="430000"/>
-          </a:xfrm>
-          <a:prstGeom prst="roundRect">
-            <a:avLst/>
-          </a:prstGeom>
-          <a:solidFill>
-            <a:srgbClr val="00A591"/>
+          </a:p>
+        </p:txBody>
+      </p:sp>
+      <p:sp>
+        <p:nvSpPr>
+          <p:cNvPr id="41" name="Right Arrow 40"/>
+          <p:cNvSpPr/>
+          <p:nvPr/>
+        </p:nvSpPr>
+        <p:spPr>
+          <a:xfrm>
+            <a:off x="2560000" y="1824000"/>
+            <a:ext cx="30000" cy="68000"/>
+          </a:xfrm>
+          <a:prstGeom prst="rightArrow">
+            <a:avLst/>
+          </a:prstGeom>
+          <a:solidFill>
+            <a:srgbClr val="B8C2CC"/>
           </a:solidFill>
           <a:ln>
             <a:noFill/>
@@ -4616,50 +4151,29 @@
           </a:fontRef>
         </p:style>
         <p:txBody>
-          <a:bodyPr rtlCol="0" anchor="ctr" wrap="square" lIns="28000" rIns="28000" tIns="14000" bIns="14000"/>
+          <a:bodyPr rtlCol="0" anchor="ctr"/>
           <a:lstStyle/>
           <a:p>
             <a:pPr algn="ctr"/>
-            <a:r>
-              <a:rPr sz="750" b="1">
-                <a:solidFill>
-                  <a:srgbClr val="FFFFFF"/>
-                </a:solidFill>
-                <a:latin typeface="Arial"/>
-              </a:rPr>
-              <a:t>⑥ 동작 일치 L3</a:t>
-            </a:r>
-          </a:p>
-          <a:p>
-            <a:pPr algn="ctr"/>
-            <a:r>
-              <a:rPr sz="650" b="0">
-                <a:solidFill>
-                  <a:srgbClr val="DDE6EE"/>
-                </a:solidFill>
-                <a:latin typeface="Arial"/>
-              </a:rPr>
-              <a:t>javac/java 실행</a:t>
-            </a:r>
-          </a:p>
-        </p:txBody>
-      </p:sp>
-      <p:sp>
-        <p:nvSpPr>
-          <p:cNvPr id="51" name="Rounded Rectangle 50"/>
-          <p:cNvSpPr/>
-          <p:nvPr/>
-        </p:nvSpPr>
-        <p:spPr>
-          <a:xfrm>
-            <a:off x="2598000" y="2601000"/>
-            <a:ext cx="993000" cy="430000"/>
-          </a:xfrm>
-          <a:prstGeom prst="roundRect">
-            <a:avLst/>
-          </a:prstGeom>
-          <a:solidFill>
-            <a:srgbClr val="00A591"/>
+          </a:p>
+        </p:txBody>
+      </p:sp>
+      <p:sp>
+        <p:nvSpPr>
+          <p:cNvPr id="42" name="Right Arrow 41"/>
+          <p:cNvSpPr/>
+          <p:nvPr/>
+        </p:nvSpPr>
+        <p:spPr>
+          <a:xfrm>
+            <a:off x="3587000" y="1824000"/>
+            <a:ext cx="30000" cy="68000"/>
+          </a:xfrm>
+          <a:prstGeom prst="rightArrow">
+            <a:avLst/>
+          </a:prstGeom>
+          <a:solidFill>
+            <a:srgbClr val="B8C2CC"/>
           </a:solidFill>
           <a:ln>
             <a:noFill/>
@@ -4681,50 +4195,29 @@
           </a:fontRef>
         </p:style>
         <p:txBody>
-          <a:bodyPr rtlCol="0" anchor="ctr" wrap="square" lIns="28000" rIns="28000" tIns="14000" bIns="14000"/>
+          <a:bodyPr rtlCol="0" anchor="ctr"/>
           <a:lstStyle/>
           <a:p>
             <a:pPr algn="ctr"/>
-            <a:r>
-              <a:rPr sz="750" b="1">
-                <a:solidFill>
-                  <a:srgbClr val="FFFFFF"/>
-                </a:solidFill>
-                <a:latin typeface="Arial"/>
-              </a:rPr>
-              <a:t>⑦ 교차 분석</a:t>
-            </a:r>
-          </a:p>
-          <a:p>
-            <a:pPr algn="ctr"/>
-            <a:r>
-              <a:rPr sz="650" b="0">
-                <a:solidFill>
-                  <a:srgbClr val="DDE6EE"/>
-                </a:solidFill>
-                <a:latin typeface="Arial"/>
-              </a:rPr>
-              <a:t>엔드포인트 충돌</a:t>
-            </a:r>
-          </a:p>
-        </p:txBody>
-      </p:sp>
-      <p:sp>
-        <p:nvSpPr>
-          <p:cNvPr id="52" name="Rounded Rectangle 51"/>
-          <p:cNvSpPr/>
-          <p:nvPr/>
-        </p:nvSpPr>
-        <p:spPr>
-          <a:xfrm>
-            <a:off x="3637000" y="2601000"/>
-            <a:ext cx="993000" cy="430000"/>
-          </a:xfrm>
-          <a:prstGeom prst="roundRect">
-            <a:avLst/>
-          </a:prstGeom>
-          <a:solidFill>
-            <a:srgbClr val="00A591"/>
+          </a:p>
+        </p:txBody>
+      </p:sp>
+      <p:sp>
+        <p:nvSpPr>
+          <p:cNvPr id="43" name="Rectangle 42"/>
+          <p:cNvSpPr/>
+          <p:nvPr/>
+        </p:nvSpPr>
+        <p:spPr>
+          <a:xfrm>
+            <a:off x="4115500" y="2103000"/>
+            <a:ext cx="26000" cy="66000"/>
+          </a:xfrm>
+          <a:prstGeom prst="rect">
+            <a:avLst/>
+          </a:prstGeom>
+          <a:solidFill>
+            <a:srgbClr val="C8965A"/>
           </a:solidFill>
           <a:ln>
             <a:noFill/>
@@ -4746,85 +4239,29 @@
           </a:fontRef>
         </p:style>
         <p:txBody>
-          <a:bodyPr rtlCol="0" anchor="ctr" wrap="square" lIns="28000" rIns="28000" tIns="14000" bIns="14000"/>
+          <a:bodyPr rtlCol="0" anchor="ctr"/>
           <a:lstStyle/>
           <a:p>
             <a:pPr algn="ctr"/>
-            <a:r>
-              <a:rPr sz="750" b="1">
-                <a:solidFill>
-                  <a:srgbClr val="FFFFFF"/>
-                </a:solidFill>
-                <a:latin typeface="Arial"/>
-              </a:rPr>
-              <a:t>⑧ Maven 빌드</a:t>
-            </a:r>
-          </a:p>
-          <a:p>
-            <a:pPr algn="ctr"/>
-            <a:r>
-              <a:rPr sz="650" b="0">
-                <a:solidFill>
-                  <a:srgbClr val="DDE6EE"/>
-                </a:solidFill>
-                <a:latin typeface="Arial"/>
-              </a:rPr>
-              <a:t>mvn compile</a:t>
-            </a:r>
-          </a:p>
-        </p:txBody>
-      </p:sp>
-      <p:sp>
-        <p:nvSpPr>
-          <p:cNvPr id="53" name="TextBox 52"/>
-          <p:cNvSpPr txBox="1"/>
-          <p:nvPr/>
-        </p:nvSpPr>
-        <p:spPr>
-          <a:xfrm>
-            <a:off x="400000" y="3145000"/>
-            <a:ext cx="4350000" cy="150000"/>
-          </a:xfrm>
-          <a:prstGeom prst="rect">
-            <a:avLst/>
-          </a:prstGeom>
-          <a:noFill/>
-        </p:spPr>
-        <p:txBody>
-          <a:bodyPr wrap="square" lIns="0" rIns="0" tIns="0" bIns="0">
-            <a:spAutoFit/>
-          </a:bodyPr>
-          <a:lstStyle/>
-          <a:p>
-            <a:pPr algn="ctr"/>
-            <a:r>
-              <a:rPr sz="650" b="0">
-                <a:solidFill>
-                  <a:srgbClr val="666666"/>
-                </a:solidFill>
-                <a:latin typeface="Arial"/>
-              </a:rPr>
-              <a:t>⑤ 검증 기반 자가 교정은 ④ 검증 실패 시에만 ③으로 되돌린다 (회차 상한 2)</a:t>
-            </a:r>
-          </a:p>
-        </p:txBody>
-      </p:sp>
-      <p:sp>
-        <p:nvSpPr>
-          <p:cNvPr id="54" name="Down Arrow 53"/>
-          <p:cNvSpPr/>
-          <p:nvPr/>
-        </p:nvSpPr>
-        <p:spPr>
-          <a:xfrm>
-            <a:off x="2529280" y="3309000"/>
-            <a:ext cx="91440" cy="74000"/>
-          </a:xfrm>
-          <a:prstGeom prst="downArrow">
-            <a:avLst/>
-          </a:prstGeom>
-          <a:solidFill>
-            <a:srgbClr val="C5CED8"/>
+          </a:p>
+        </p:txBody>
+      </p:sp>
+      <p:sp>
+        <p:nvSpPr>
+          <p:cNvPr id="44" name="Rectangle 43"/>
+          <p:cNvSpPr/>
+          <p:nvPr/>
+        </p:nvSpPr>
+        <p:spPr>
+          <a:xfrm>
+            <a:off x="2061500" y="2169000"/>
+            <a:ext cx="2054000" cy="26000"/>
+          </a:xfrm>
+          <a:prstGeom prst="rect">
+            <a:avLst/>
+          </a:prstGeom>
+          <a:solidFill>
+            <a:srgbClr val="C8965A"/>
           </a:solidFill>
           <a:ln>
             <a:noFill/>
@@ -4855,20 +4292,20 @@
       </p:sp>
       <p:sp>
         <p:nvSpPr>
-          <p:cNvPr id="55" name="Rounded Rectangle 54"/>
-          <p:cNvSpPr/>
-          <p:nvPr/>
-        </p:nvSpPr>
-        <p:spPr>
-          <a:xfrm>
-            <a:off x="400000" y="3391000"/>
-            <a:ext cx="4350000" cy="290000"/>
-          </a:xfrm>
-          <a:prstGeom prst="roundRect">
-            <a:avLst/>
-          </a:prstGeom>
-          <a:solidFill>
-            <a:srgbClr val="B4621A"/>
+          <p:cNvPr id="45" name="Up Arrow 44"/>
+          <p:cNvSpPr/>
+          <p:nvPr/>
+        </p:nvSpPr>
+        <p:spPr>
+          <a:xfrm>
+            <a:off x="2015500" y="2113000"/>
+            <a:ext cx="92000" cy="56000"/>
+          </a:xfrm>
+          <a:prstGeom prst="upArrow">
+            <a:avLst/>
+          </a:prstGeom>
+          <a:solidFill>
+            <a:srgbClr val="C8965A"/>
           </a:solidFill>
           <a:ln>
             <a:noFill/>
@@ -4890,32 +4327,93 @@
           </a:fontRef>
         </p:style>
         <p:txBody>
-          <a:bodyPr rtlCol="0" anchor="ctr" wrap="square" lIns="36000" rIns="36000" tIns="18000" bIns="18000"/>
+          <a:bodyPr rtlCol="0" anchor="ctr"/>
           <a:lstStyle/>
           <a:p>
             <a:pPr algn="ctr"/>
+          </a:p>
+        </p:txBody>
+      </p:sp>
+      <p:sp>
+        <p:nvSpPr>
+          <p:cNvPr id="46" name="TextBox 45"/>
+          <p:cNvSpPr txBox="1"/>
+          <p:nvPr/>
+        </p:nvSpPr>
+        <p:spPr>
+          <a:xfrm>
+            <a:off x="542000" y="2199000"/>
+            <a:ext cx="4066000" cy="140000"/>
+          </a:xfrm>
+          <a:prstGeom prst="rect">
+            <a:avLst/>
+          </a:prstGeom>
+          <a:noFill/>
+        </p:spPr>
+        <p:txBody>
+          <a:bodyPr wrap="square" lIns="0" rIns="0" tIns="0" bIns="0">
+            <a:spAutoFit/>
+          </a:bodyPr>
+          <a:lstStyle/>
+          <a:p>
+            <a:pPr algn="ctr"/>
+            <a:r>
+              <a:rPr sz="700" b="0">
+                <a:solidFill>
+                  <a:srgbClr val="666666"/>
+                </a:solidFill>
+                <a:latin typeface="Arial"/>
+              </a:rPr>
+              <a:t>검증 실패 시에만 되돌아간다 — 통과하거나 예산을 소진하면 순환을 빠져나온다</a:t>
+            </a:r>
+          </a:p>
+        </p:txBody>
+      </p:sp>
+      <p:sp>
+        <p:nvSpPr>
+          <p:cNvPr id="47" name="TextBox 46"/>
+          <p:cNvSpPr txBox="1"/>
+          <p:nvPr/>
+        </p:nvSpPr>
+        <p:spPr>
+          <a:xfrm>
+            <a:off x="400000" y="2424000"/>
+            <a:ext cx="4350000" cy="150000"/>
+          </a:xfrm>
+          <a:prstGeom prst="rect">
+            <a:avLst/>
+          </a:prstGeom>
+          <a:noFill/>
+        </p:spPr>
+        <p:txBody>
+          <a:bodyPr wrap="square" lIns="0" rIns="0" tIns="0" bIns="0">
+            <a:spAutoFit/>
+          </a:bodyPr>
+          <a:lstStyle/>
+          <a:p>
+            <a:pPr algn="ctr"/>
             <a:r>
               <a:rPr sz="800" b="1">
                 <a:solidFill>
-                  <a:srgbClr val="FFFFFF"/>
-                </a:solidFill>
-                <a:latin typeface="Arial"/>
-              </a:rPr>
-              <a:t>사람 승인 게이트  —  승인 전에는 산출물·DB에 아무것도 쓰지 않는다</a:t>
-            </a:r>
-          </a:p>
-        </p:txBody>
-      </p:sp>
-      <p:sp>
-        <p:nvSpPr>
-          <p:cNvPr id="56" name="Down Arrow 55"/>
-          <p:cNvSpPr/>
-          <p:nvPr/>
-        </p:nvSpPr>
-        <p:spPr>
-          <a:xfrm>
-            <a:off x="2529280" y="3689000"/>
-            <a:ext cx="91440" cy="74000"/>
+                  <a:srgbClr val="00A591"/>
+                </a:solidFill>
+                <a:latin typeface="Arial"/>
+              </a:rPr>
+              <a:t>관찰자가 모델이 아니라 규칙 기반 검증기다   —   자기 평가를 쓰지 않는다</a:t>
+            </a:r>
+          </a:p>
+        </p:txBody>
+      </p:sp>
+      <p:sp>
+        <p:nvSpPr>
+          <p:cNvPr id="48" name="Down Arrow 47"/>
+          <p:cNvSpPr/>
+          <p:nvPr/>
+        </p:nvSpPr>
+        <p:spPr>
+          <a:xfrm>
+            <a:off x="2529280" y="2594000"/>
+            <a:ext cx="91440" cy="62000"/>
           </a:xfrm>
           <a:prstGeom prst="downArrow">
             <a:avLst/>
@@ -4952,58 +4450,25 @@
       </p:sp>
       <p:sp>
         <p:nvSpPr>
-          <p:cNvPr id="57" name="TextBox 56"/>
-          <p:cNvSpPr txBox="1"/>
-          <p:nvPr/>
-        </p:nvSpPr>
-        <p:spPr>
-          <a:xfrm>
-            <a:off x="400000" y="3771000"/>
-            <a:ext cx="4350000" cy="150000"/>
-          </a:xfrm>
-          <a:prstGeom prst="rect">
-            <a:avLst/>
-          </a:prstGeom>
-          <a:noFill/>
-        </p:spPr>
-        <p:txBody>
-          <a:bodyPr wrap="square" lIns="0" rIns="0" tIns="0" bIns="0">
-            <a:spAutoFit/>
-          </a:bodyPr>
-          <a:lstStyle/>
-          <a:p>
-            <a:pPr algn="l"/>
-            <a:r>
-              <a:rPr sz="750" b="1">
-                <a:solidFill>
-                  <a:srgbClr val="666666"/>
-                </a:solidFill>
-                <a:latin typeface="Arial"/>
-              </a:rPr>
-              <a:t>TO-BE  ·  Spring / MyBatis</a:t>
-            </a:r>
-          </a:p>
-        </p:txBody>
-      </p:sp>
-      <p:sp>
-        <p:nvSpPr>
-          <p:cNvPr id="58" name="Rounded Rectangle 57"/>
-          <p:cNvSpPr/>
-          <p:nvPr/>
-        </p:nvSpPr>
-        <p:spPr>
-          <a:xfrm>
-            <a:off x="400000" y="3921000"/>
-            <a:ext cx="841200" cy="250000"/>
+          <p:cNvPr id="49" name="Rounded Rectangle 48"/>
+          <p:cNvSpPr/>
+          <p:nvPr/>
+        </p:nvSpPr>
+        <p:spPr>
+          <a:xfrm>
+            <a:off x="400000" y="2662000"/>
+            <a:ext cx="4350000" cy="788000"/>
           </a:xfrm>
           <a:prstGeom prst="roundRect">
             <a:avLst/>
           </a:prstGeom>
           <a:solidFill>
-            <a:srgbClr val="1F3564"/>
-          </a:solidFill>
-          <a:ln>
-            <a:noFill/>
+            <a:srgbClr val="F7F9FA"/>
+          </a:solidFill>
+          <a:ln w="9525">
+            <a:solidFill>
+              <a:srgbClr val="C5CED8"/>
+            </a:solidFill>
           </a:ln>
           <a:effectLst/>
         </p:spPr>
@@ -5022,38 +4487,64 @@
           </a:fontRef>
         </p:style>
         <p:txBody>
-          <a:bodyPr rtlCol="0" anchor="ctr" wrap="square" lIns="36000" rIns="36000" tIns="18000" bIns="18000"/>
+          <a:bodyPr rtlCol="0" anchor="ctr"/>
           <a:lstStyle/>
           <a:p>
             <a:pPr algn="ctr"/>
-            <a:r>
-              <a:rPr sz="700" b="0">
-                <a:solidFill>
-                  <a:srgbClr val="FFFFFF"/>
-                </a:solidFill>
-                <a:latin typeface="Arial"/>
-              </a:rPr>
-              <a:t>Api</a:t>
-            </a:r>
-          </a:p>
-        </p:txBody>
-      </p:sp>
-      <p:sp>
-        <p:nvSpPr>
-          <p:cNvPr id="59" name="Rounded Rectangle 58"/>
-          <p:cNvSpPr/>
-          <p:nvPr/>
-        </p:nvSpPr>
-        <p:spPr>
-          <a:xfrm>
-            <a:off x="1277200" y="3921000"/>
-            <a:ext cx="841200" cy="250000"/>
+          </a:p>
+        </p:txBody>
+      </p:sp>
+      <p:sp>
+        <p:nvSpPr>
+          <p:cNvPr id="50" name="TextBox 49"/>
+          <p:cNvSpPr txBox="1"/>
+          <p:nvPr/>
+        </p:nvSpPr>
+        <p:spPr>
+          <a:xfrm>
+            <a:off x="492000" y="2708000"/>
+            <a:ext cx="4166000" cy="150000"/>
+          </a:xfrm>
+          <a:prstGeom prst="rect">
+            <a:avLst/>
+          </a:prstGeom>
+          <a:noFill/>
+        </p:spPr>
+        <p:txBody>
+          <a:bodyPr wrap="square" lIns="0" rIns="0" tIns="0" bIns="0">
+            <a:spAutoFit/>
+          </a:bodyPr>
+          <a:lstStyle/>
+          <a:p>
+            <a:pPr algn="l"/>
+            <a:r>
+              <a:rPr sz="800" b="1">
+                <a:solidFill>
+                  <a:srgbClr val="1F3564"/>
+                </a:solidFill>
+                <a:latin typeface="Arial"/>
+              </a:rPr>
+              <a:t>ACT 가 호출하는 도구 — 계획이 지목한 대상만</a:t>
+            </a:r>
+          </a:p>
+        </p:txBody>
+      </p:sp>
+      <p:sp>
+        <p:nvSpPr>
+          <p:cNvPr id="51" name="Rounded Rectangle 50"/>
+          <p:cNvSpPr/>
+          <p:nvPr/>
+        </p:nvSpPr>
+        <p:spPr>
+          <a:xfrm>
+            <a:off x="500000" y="2846000"/>
+            <a:ext cx="1009000" cy="250000"/>
           </a:xfrm>
           <a:prstGeom prst="roundRect">
             <a:avLst/>
           </a:prstGeom>
           <a:solidFill>
-            <a:srgbClr val="1F3564"/>
+            <a:srgbClr val="00A591"/>
           </a:solidFill>
           <a:ln>
             <a:noFill/>
@@ -5080,33 +4571,33 @@
           <a:p>
             <a:pPr algn="ctr"/>
             <a:r>
-              <a:rPr sz="700" b="0">
+              <a:rPr sz="750" b="1">
                 <a:solidFill>
                   <a:srgbClr val="FFFFFF"/>
                 </a:solidFill>
                 <a:latin typeface="Arial"/>
               </a:rPr>
-              <a:t>Service</a:t>
-            </a:r>
-          </a:p>
-        </p:txBody>
-      </p:sp>
-      <p:sp>
-        <p:nvSpPr>
-          <p:cNvPr id="60" name="Rounded Rectangle 59"/>
-          <p:cNvSpPr/>
-          <p:nvPr/>
-        </p:nvSpPr>
-        <p:spPr>
-          <a:xfrm>
-            <a:off x="2154400" y="3921000"/>
-            <a:ext cx="841200" cy="250000"/>
+              <a:t>② 규칙 변환기</a:t>
+            </a:r>
+          </a:p>
+        </p:txBody>
+      </p:sp>
+      <p:sp>
+        <p:nvSpPr>
+          <p:cNvPr id="52" name="Rounded Rectangle 51"/>
+          <p:cNvSpPr/>
+          <p:nvPr/>
+        </p:nvSpPr>
+        <p:spPr>
+          <a:xfrm>
+            <a:off x="1547000" y="2846000"/>
+            <a:ext cx="1009000" cy="250000"/>
           </a:xfrm>
           <a:prstGeom prst="roundRect">
             <a:avLst/>
           </a:prstGeom>
           <a:solidFill>
-            <a:srgbClr val="1F3564"/>
+            <a:srgbClr val="00A591"/>
           </a:solidFill>
           <a:ln>
             <a:noFill/>
@@ -5133,27 +4624,27 @@
           <a:p>
             <a:pPr algn="ctr"/>
             <a:r>
-              <a:rPr sz="700" b="0">
+              <a:rPr sz="750" b="1">
                 <a:solidFill>
                   <a:srgbClr val="FFFFFF"/>
                 </a:solidFill>
                 <a:latin typeface="Arial"/>
               </a:rPr>
-              <a:t>Store</a:t>
-            </a:r>
-          </a:p>
-        </p:txBody>
-      </p:sp>
-      <p:sp>
-        <p:nvSpPr>
-          <p:cNvPr id="61" name="Rounded Rectangle 60"/>
-          <p:cNvSpPr/>
-          <p:nvPr/>
-        </p:nvSpPr>
-        <p:spPr>
-          <a:xfrm>
-            <a:off x="3031600" y="3921000"/>
-            <a:ext cx="841200" cy="250000"/>
+              <a:t>② 코드 뼈대·DTO</a:t>
+            </a:r>
+          </a:p>
+        </p:txBody>
+      </p:sp>
+      <p:sp>
+        <p:nvSpPr>
+          <p:cNvPr id="53" name="Rounded Rectangle 52"/>
+          <p:cNvSpPr/>
+          <p:nvPr/>
+        </p:nvSpPr>
+        <p:spPr>
+          <a:xfrm>
+            <a:off x="2594000" y="2846000"/>
+            <a:ext cx="1009000" cy="250000"/>
           </a:xfrm>
           <a:prstGeom prst="roundRect">
             <a:avLst/>
@@ -5186,33 +4677,33 @@
           <a:p>
             <a:pPr algn="ctr"/>
             <a:r>
-              <a:rPr sz="700" b="0">
+              <a:rPr sz="750" b="1">
                 <a:solidFill>
                   <a:srgbClr val="FFFFFF"/>
                 </a:solidFill>
                 <a:latin typeface="Arial"/>
               </a:rPr>
-              <a:t>Dto</a:t>
-            </a:r>
-          </a:p>
-        </p:txBody>
-      </p:sp>
-      <p:sp>
-        <p:nvSpPr>
-          <p:cNvPr id="62" name="Rounded Rectangle 61"/>
-          <p:cNvSpPr/>
-          <p:nvPr/>
-        </p:nvSpPr>
-        <p:spPr>
-          <a:xfrm>
-            <a:off x="3908800" y="3921000"/>
-            <a:ext cx="841200" cy="250000"/>
+              <a:t>③ LLM Gateway</a:t>
+            </a:r>
+          </a:p>
+        </p:txBody>
+      </p:sp>
+      <p:sp>
+        <p:nvSpPr>
+          <p:cNvPr id="54" name="Rounded Rectangle 53"/>
+          <p:cNvSpPr/>
+          <p:nvPr/>
+        </p:nvSpPr>
+        <p:spPr>
+          <a:xfrm>
+            <a:off x="3641000" y="2846000"/>
+            <a:ext cx="1009000" cy="250000"/>
           </a:xfrm>
           <a:prstGeom prst="roundRect">
             <a:avLst/>
           </a:prstGeom>
           <a:solidFill>
-            <a:srgbClr val="1F3564"/>
+            <a:srgbClr val="00A591"/>
           </a:solidFill>
           <a:ln>
             <a:noFill/>
@@ -5239,33 +4730,33 @@
           <a:p>
             <a:pPr algn="ctr"/>
             <a:r>
-              <a:rPr sz="700" b="0">
+              <a:rPr sz="750" b="1">
                 <a:solidFill>
                   <a:srgbClr val="FFFFFF"/>
                 </a:solidFill>
                 <a:latin typeface="Arial"/>
               </a:rPr>
-              <a:t>Mapper.xml</a:t>
-            </a:r>
-          </a:p>
-        </p:txBody>
-      </p:sp>
-      <p:sp>
-        <p:nvSpPr>
-          <p:cNvPr id="63" name="Rounded Rectangle 62"/>
-          <p:cNvSpPr/>
-          <p:nvPr/>
-        </p:nvSpPr>
-        <p:spPr>
-          <a:xfrm>
-            <a:off x="400000" y="4233000"/>
-            <a:ext cx="92000" cy="92000"/>
+              <a:t>④ 정적 검증기</a:t>
+            </a:r>
+          </a:p>
+        </p:txBody>
+      </p:sp>
+      <p:sp>
+        <p:nvSpPr>
+          <p:cNvPr id="55" name="Rounded Rectangle 54"/>
+          <p:cNvSpPr/>
+          <p:nvPr/>
+        </p:nvSpPr>
+        <p:spPr>
+          <a:xfrm>
+            <a:off x="500000" y="3134000"/>
+            <a:ext cx="1009000" cy="250000"/>
           </a:xfrm>
           <a:prstGeom prst="roundRect">
             <a:avLst/>
           </a:prstGeom>
           <a:solidFill>
-            <a:srgbClr val="00A591"/>
+            <a:srgbClr val="1F3564"/>
           </a:solidFill>
           <a:ln>
             <a:noFill/>
@@ -5287,64 +4778,38 @@
           </a:fontRef>
         </p:style>
         <p:txBody>
-          <a:bodyPr rtlCol="0" anchor="ctr"/>
+          <a:bodyPr rtlCol="0" anchor="ctr" wrap="square" lIns="36000" rIns="36000" tIns="18000" bIns="18000"/>
           <a:lstStyle/>
           <a:p>
             <a:pPr algn="ctr"/>
-          </a:p>
-        </p:txBody>
-      </p:sp>
-      <p:sp>
-        <p:nvSpPr>
-          <p:cNvPr id="64" name="TextBox 63"/>
-          <p:cNvSpPr txBox="1"/>
-          <p:nvPr/>
-        </p:nvSpPr>
-        <p:spPr>
-          <a:xfrm>
-            <a:off x="526000" y="4231000"/>
-            <a:ext cx="900000" cy="130000"/>
-          </a:xfrm>
-          <a:prstGeom prst="rect">
-            <a:avLst/>
-          </a:prstGeom>
-          <a:noFill/>
-        </p:spPr>
-        <p:txBody>
-          <a:bodyPr wrap="square" lIns="0" rIns="0" tIns="0" bIns="0">
-            <a:spAutoFit/>
-          </a:bodyPr>
-          <a:lstStyle/>
-          <a:p>
-            <a:pPr algn="l"/>
-            <a:r>
-              <a:rPr sz="650" b="0">
-                <a:solidFill>
-                  <a:srgbClr val="666666"/>
-                </a:solidFill>
-                <a:latin typeface="Arial"/>
-              </a:rPr>
-              <a:t>규칙 기반 (LLM 0회)</a:t>
-            </a:r>
-          </a:p>
-        </p:txBody>
-      </p:sp>
-      <p:sp>
-        <p:nvSpPr>
-          <p:cNvPr id="65" name="Rounded Rectangle 64"/>
-          <p:cNvSpPr/>
-          <p:nvPr/>
-        </p:nvSpPr>
-        <p:spPr>
-          <a:xfrm>
-            <a:off x="1520000" y="4233000"/>
-            <a:ext cx="92000" cy="92000"/>
+            <a:r>
+              <a:rPr sz="750" b="1">
+                <a:solidFill>
+                  <a:srgbClr val="FFFFFF"/>
+                </a:solidFill>
+                <a:latin typeface="Arial"/>
+              </a:rPr>
+              <a:t>⑤ ToT 교정기</a:t>
+            </a:r>
+          </a:p>
+        </p:txBody>
+      </p:sp>
+      <p:sp>
+        <p:nvSpPr>
+          <p:cNvPr id="56" name="Rounded Rectangle 55"/>
+          <p:cNvSpPr/>
+          <p:nvPr/>
+        </p:nvSpPr>
+        <p:spPr>
+          <a:xfrm>
+            <a:off x="1547000" y="3134000"/>
+            <a:ext cx="1009000" cy="250000"/>
           </a:xfrm>
           <a:prstGeom prst="roundRect">
             <a:avLst/>
           </a:prstGeom>
           <a:solidFill>
-            <a:srgbClr val="1F3564"/>
+            <a:srgbClr val="00A591"/>
           </a:solidFill>
           <a:ln>
             <a:noFill/>
@@ -5366,6 +4831,165 @@
           </a:fontRef>
         </p:style>
         <p:txBody>
+          <a:bodyPr rtlCol="0" anchor="ctr" wrap="square" lIns="36000" rIns="36000" tIns="18000" bIns="18000"/>
+          <a:lstStyle/>
+          <a:p>
+            <a:pPr algn="ctr"/>
+            <a:r>
+              <a:rPr sz="750" b="1">
+                <a:solidFill>
+                  <a:srgbClr val="FFFFFF"/>
+                </a:solidFill>
+                <a:latin typeface="Arial"/>
+              </a:rPr>
+              <a:t>⑥ 동작 일치</a:t>
+            </a:r>
+          </a:p>
+        </p:txBody>
+      </p:sp>
+      <p:sp>
+        <p:nvSpPr>
+          <p:cNvPr id="57" name="Rounded Rectangle 56"/>
+          <p:cNvSpPr/>
+          <p:nvPr/>
+        </p:nvSpPr>
+        <p:spPr>
+          <a:xfrm>
+            <a:off x="2594000" y="3134000"/>
+            <a:ext cx="1009000" cy="250000"/>
+          </a:xfrm>
+          <a:prstGeom prst="roundRect">
+            <a:avLst/>
+          </a:prstGeom>
+          <a:solidFill>
+            <a:srgbClr val="00A591"/>
+          </a:solidFill>
+          <a:ln>
+            <a:noFill/>
+          </a:ln>
+          <a:effectLst/>
+        </p:spPr>
+        <p:style>
+          <a:lnRef idx="1">
+            <a:schemeClr val="accent1"/>
+          </a:lnRef>
+          <a:fillRef idx="3">
+            <a:schemeClr val="accent1"/>
+          </a:fillRef>
+          <a:effectRef idx="2">
+            <a:schemeClr val="accent1"/>
+          </a:effectRef>
+          <a:fontRef idx="minor">
+            <a:schemeClr val="lt1"/>
+          </a:fontRef>
+        </p:style>
+        <p:txBody>
+          <a:bodyPr rtlCol="0" anchor="ctr" wrap="square" lIns="36000" rIns="36000" tIns="18000" bIns="18000"/>
+          <a:lstStyle/>
+          <a:p>
+            <a:pPr algn="ctr"/>
+            <a:r>
+              <a:rPr sz="750" b="1">
+                <a:solidFill>
+                  <a:srgbClr val="FFFFFF"/>
+                </a:solidFill>
+                <a:latin typeface="Arial"/>
+              </a:rPr>
+              <a:t>⑦ 교차 분석</a:t>
+            </a:r>
+          </a:p>
+        </p:txBody>
+      </p:sp>
+      <p:sp>
+        <p:nvSpPr>
+          <p:cNvPr id="58" name="Rounded Rectangle 57"/>
+          <p:cNvSpPr/>
+          <p:nvPr/>
+        </p:nvSpPr>
+        <p:spPr>
+          <a:xfrm>
+            <a:off x="3641000" y="3134000"/>
+            <a:ext cx="1009000" cy="250000"/>
+          </a:xfrm>
+          <a:prstGeom prst="roundRect">
+            <a:avLst/>
+          </a:prstGeom>
+          <a:solidFill>
+            <a:srgbClr val="00A591"/>
+          </a:solidFill>
+          <a:ln>
+            <a:noFill/>
+          </a:ln>
+          <a:effectLst/>
+        </p:spPr>
+        <p:style>
+          <a:lnRef idx="1">
+            <a:schemeClr val="accent1"/>
+          </a:lnRef>
+          <a:fillRef idx="3">
+            <a:schemeClr val="accent1"/>
+          </a:fillRef>
+          <a:effectRef idx="2">
+            <a:schemeClr val="accent1"/>
+          </a:effectRef>
+          <a:fontRef idx="minor">
+            <a:schemeClr val="lt1"/>
+          </a:fontRef>
+        </p:style>
+        <p:txBody>
+          <a:bodyPr rtlCol="0" anchor="ctr" wrap="square" lIns="36000" rIns="36000" tIns="18000" bIns="18000"/>
+          <a:lstStyle/>
+          <a:p>
+            <a:pPr algn="ctr"/>
+            <a:r>
+              <a:rPr sz="750" b="1">
+                <a:solidFill>
+                  <a:srgbClr val="FFFFFF"/>
+                </a:solidFill>
+                <a:latin typeface="Arial"/>
+              </a:rPr>
+              <a:t>⑧ 빌드 검증</a:t>
+            </a:r>
+          </a:p>
+        </p:txBody>
+      </p:sp>
+      <p:sp>
+        <p:nvSpPr>
+          <p:cNvPr id="59" name="Down Arrow 58"/>
+          <p:cNvSpPr/>
+          <p:nvPr/>
+        </p:nvSpPr>
+        <p:spPr>
+          <a:xfrm>
+            <a:off x="2529280" y="3456000"/>
+            <a:ext cx="91440" cy="62000"/>
+          </a:xfrm>
+          <a:prstGeom prst="downArrow">
+            <a:avLst/>
+          </a:prstGeom>
+          <a:solidFill>
+            <a:srgbClr val="C5CED8"/>
+          </a:solidFill>
+          <a:ln>
+            <a:noFill/>
+          </a:ln>
+          <a:effectLst/>
+        </p:spPr>
+        <p:style>
+          <a:lnRef idx="1">
+            <a:schemeClr val="accent1"/>
+          </a:lnRef>
+          <a:fillRef idx="3">
+            <a:schemeClr val="accent1"/>
+          </a:fillRef>
+          <a:effectRef idx="2">
+            <a:schemeClr val="accent1"/>
+          </a:effectRef>
+          <a:fontRef idx="minor">
+            <a:schemeClr val="lt1"/>
+          </a:fontRef>
+        </p:style>
+        <p:txBody>
           <a:bodyPr rtlCol="0" anchor="ctr"/>
           <a:lstStyle/>
           <a:p>
@@ -5375,14 +4999,111 @@
       </p:sp>
       <p:sp>
         <p:nvSpPr>
-          <p:cNvPr id="66" name="TextBox 65"/>
+          <p:cNvPr id="60" name="Rounded Rectangle 59"/>
+          <p:cNvSpPr/>
+          <p:nvPr/>
+        </p:nvSpPr>
+        <p:spPr>
+          <a:xfrm>
+            <a:off x="400000" y="3524000"/>
+            <a:ext cx="4350000" cy="250000"/>
+          </a:xfrm>
+          <a:prstGeom prst="roundRect">
+            <a:avLst/>
+          </a:prstGeom>
+          <a:solidFill>
+            <a:srgbClr val="B4621A"/>
+          </a:solidFill>
+          <a:ln>
+            <a:noFill/>
+          </a:ln>
+          <a:effectLst/>
+        </p:spPr>
+        <p:style>
+          <a:lnRef idx="1">
+            <a:schemeClr val="accent1"/>
+          </a:lnRef>
+          <a:fillRef idx="3">
+            <a:schemeClr val="accent1"/>
+          </a:fillRef>
+          <a:effectRef idx="2">
+            <a:schemeClr val="accent1"/>
+          </a:effectRef>
+          <a:fontRef idx="minor">
+            <a:schemeClr val="lt1"/>
+          </a:fontRef>
+        </p:style>
+        <p:txBody>
+          <a:bodyPr rtlCol="0" anchor="ctr" wrap="square" lIns="36000" rIns="36000" tIns="18000" bIns="18000"/>
+          <a:lstStyle/>
+          <a:p>
+            <a:pPr algn="ctr"/>
+            <a:r>
+              <a:rPr sz="850" b="1">
+                <a:solidFill>
+                  <a:srgbClr val="FFFFFF"/>
+                </a:solidFill>
+                <a:latin typeface="Arial"/>
+              </a:rPr>
+              <a:t>사람 승인 게이트 — 승인 전에는 산출물·DB에 아무것도 쓰지 않는다</a:t>
+            </a:r>
+          </a:p>
+        </p:txBody>
+      </p:sp>
+      <p:sp>
+        <p:nvSpPr>
+          <p:cNvPr id="61" name="Down Arrow 60"/>
+          <p:cNvSpPr/>
+          <p:nvPr/>
+        </p:nvSpPr>
+        <p:spPr>
+          <a:xfrm>
+            <a:off x="2529280" y="3780000"/>
+            <a:ext cx="91440" cy="62000"/>
+          </a:xfrm>
+          <a:prstGeom prst="downArrow">
+            <a:avLst/>
+          </a:prstGeom>
+          <a:solidFill>
+            <a:srgbClr val="C5CED8"/>
+          </a:solidFill>
+          <a:ln>
+            <a:noFill/>
+          </a:ln>
+          <a:effectLst/>
+        </p:spPr>
+        <p:style>
+          <a:lnRef idx="1">
+            <a:schemeClr val="accent1"/>
+          </a:lnRef>
+          <a:fillRef idx="3">
+            <a:schemeClr val="accent1"/>
+          </a:fillRef>
+          <a:effectRef idx="2">
+            <a:schemeClr val="accent1"/>
+          </a:effectRef>
+          <a:fontRef idx="minor">
+            <a:schemeClr val="lt1"/>
+          </a:fontRef>
+        </p:style>
+        <p:txBody>
+          <a:bodyPr rtlCol="0" anchor="ctr"/>
+          <a:lstStyle/>
+          <a:p>
+            <a:pPr algn="ctr"/>
+          </a:p>
+        </p:txBody>
+      </p:sp>
+      <p:sp>
+        <p:nvSpPr>
+          <p:cNvPr id="62" name="TextBox 61"/>
           <p:cNvSpPr txBox="1"/>
           <p:nvPr/>
         </p:nvSpPr>
         <p:spPr>
           <a:xfrm>
-            <a:off x="1646000" y="4231000"/>
-            <a:ext cx="700000" cy="130000"/>
+            <a:off x="400000" y="3848000"/>
+            <a:ext cx="4350000" cy="150000"/>
           </a:xfrm>
           <a:prstGeom prst="rect">
             <a:avLst/>
@@ -5397,27 +5118,71 @@
           <a:p>
             <a:pPr algn="l"/>
             <a:r>
-              <a:rPr sz="650" b="0">
+              <a:rPr sz="800" b="1">
                 <a:solidFill>
                   <a:srgbClr val="666666"/>
                 </a:solidFill>
                 <a:latin typeface="Arial"/>
               </a:rPr>
-              <a:t>LLM 호출</a:t>
-            </a:r>
-          </a:p>
-        </p:txBody>
-      </p:sp>
-      <p:sp>
-        <p:nvSpPr>
-          <p:cNvPr id="67" name="TextBox 66"/>
+              <a:t>TO-BE   Api · Service · Store · Dto · Mapper.xml   (Spring / MyBatis)</a:t>
+            </a:r>
+          </a:p>
+        </p:txBody>
+      </p:sp>
+      <p:sp>
+        <p:nvSpPr>
+          <p:cNvPr id="63" name="Rounded Rectangle 62"/>
+          <p:cNvSpPr/>
+          <p:nvPr/>
+        </p:nvSpPr>
+        <p:spPr>
+          <a:xfrm>
+            <a:off x="400000" y="4042000"/>
+            <a:ext cx="88000" cy="88000"/>
+          </a:xfrm>
+          <a:prstGeom prst="roundRect">
+            <a:avLst/>
+          </a:prstGeom>
+          <a:solidFill>
+            <a:srgbClr val="00A591"/>
+          </a:solidFill>
+          <a:ln>
+            <a:noFill/>
+          </a:ln>
+          <a:effectLst/>
+        </p:spPr>
+        <p:style>
+          <a:lnRef idx="1">
+            <a:schemeClr val="accent1"/>
+          </a:lnRef>
+          <a:fillRef idx="3">
+            <a:schemeClr val="accent1"/>
+          </a:fillRef>
+          <a:effectRef idx="2">
+            <a:schemeClr val="accent1"/>
+          </a:effectRef>
+          <a:fontRef idx="minor">
+            <a:schemeClr val="lt1"/>
+          </a:fontRef>
+        </p:style>
+        <p:txBody>
+          <a:bodyPr rtlCol="0" anchor="ctr"/>
+          <a:lstStyle/>
+          <a:p>
+            <a:pPr algn="ctr"/>
+          </a:p>
+        </p:txBody>
+      </p:sp>
+      <p:sp>
+        <p:nvSpPr>
+          <p:cNvPr id="64" name="TextBox 63"/>
           <p:cNvSpPr txBox="1"/>
           <p:nvPr/>
         </p:nvSpPr>
         <p:spPr>
           <a:xfrm>
-            <a:off x="2500000" y="4231000"/>
-            <a:ext cx="2250000" cy="130000"/>
+            <a:off x="516000" y="4040000"/>
+            <a:ext cx="1052000" cy="130000"/>
           </a:xfrm>
           <a:prstGeom prst="rect">
             <a:avLst/>
@@ -5430,6 +5195,199 @@
           </a:bodyPr>
           <a:lstStyle/>
           <a:p>
+            <a:pPr algn="l"/>
+            <a:r>
+              <a:rPr sz="650" b="0">
+                <a:solidFill>
+                  <a:srgbClr val="666666"/>
+                </a:solidFill>
+                <a:latin typeface="Arial"/>
+              </a:rPr>
+              <a:t>규칙 기반 (LLM 0회)</a:t>
+            </a:r>
+          </a:p>
+        </p:txBody>
+      </p:sp>
+      <p:sp>
+        <p:nvSpPr>
+          <p:cNvPr id="65" name="Rounded Rectangle 64"/>
+          <p:cNvSpPr/>
+          <p:nvPr/>
+        </p:nvSpPr>
+        <p:spPr>
+          <a:xfrm>
+            <a:off x="1580000" y="4042000"/>
+            <a:ext cx="88000" cy="88000"/>
+          </a:xfrm>
+          <a:prstGeom prst="roundRect">
+            <a:avLst/>
+          </a:prstGeom>
+          <a:solidFill>
+            <a:srgbClr val="1F3564"/>
+          </a:solidFill>
+          <a:ln>
+            <a:noFill/>
+          </a:ln>
+          <a:effectLst/>
+        </p:spPr>
+        <p:style>
+          <a:lnRef idx="1">
+            <a:schemeClr val="accent1"/>
+          </a:lnRef>
+          <a:fillRef idx="3">
+            <a:schemeClr val="accent1"/>
+          </a:fillRef>
+          <a:effectRef idx="2">
+            <a:schemeClr val="accent1"/>
+          </a:effectRef>
+          <a:fontRef idx="minor">
+            <a:schemeClr val="lt1"/>
+          </a:fontRef>
+        </p:style>
+        <p:txBody>
+          <a:bodyPr rtlCol="0" anchor="ctr"/>
+          <a:lstStyle/>
+          <a:p>
+            <a:pPr algn="ctr"/>
+          </a:p>
+        </p:txBody>
+      </p:sp>
+      <p:sp>
+        <p:nvSpPr>
+          <p:cNvPr id="66" name="TextBox 65"/>
+          <p:cNvSpPr txBox="1"/>
+          <p:nvPr/>
+        </p:nvSpPr>
+        <p:spPr>
+          <a:xfrm>
+            <a:off x="1696000" y="4040000"/>
+            <a:ext cx="1052000" cy="130000"/>
+          </a:xfrm>
+          <a:prstGeom prst="rect">
+            <a:avLst/>
+          </a:prstGeom>
+          <a:noFill/>
+        </p:spPr>
+        <p:txBody>
+          <a:bodyPr wrap="square" lIns="0" rIns="0" tIns="0" bIns="0">
+            <a:spAutoFit/>
+          </a:bodyPr>
+          <a:lstStyle/>
+          <a:p>
+            <a:pPr algn="l"/>
+            <a:r>
+              <a:rPr sz="650" b="0">
+                <a:solidFill>
+                  <a:srgbClr val="666666"/>
+                </a:solidFill>
+                <a:latin typeface="Arial"/>
+              </a:rPr>
+              <a:t>LLM 호출</a:t>
+            </a:r>
+          </a:p>
+        </p:txBody>
+      </p:sp>
+      <p:sp>
+        <p:nvSpPr>
+          <p:cNvPr id="67" name="Rounded Rectangle 66"/>
+          <p:cNvSpPr/>
+          <p:nvPr/>
+        </p:nvSpPr>
+        <p:spPr>
+          <a:xfrm>
+            <a:off x="2760000" y="4042000"/>
+            <a:ext cx="88000" cy="88000"/>
+          </a:xfrm>
+          <a:prstGeom prst="roundRect">
+            <a:avLst/>
+          </a:prstGeom>
+          <a:solidFill>
+            <a:srgbClr val="B4621A"/>
+          </a:solidFill>
+          <a:ln>
+            <a:noFill/>
+          </a:ln>
+          <a:effectLst/>
+        </p:spPr>
+        <p:style>
+          <a:lnRef idx="1">
+            <a:schemeClr val="accent1"/>
+          </a:lnRef>
+          <a:fillRef idx="3">
+            <a:schemeClr val="accent1"/>
+          </a:fillRef>
+          <a:effectRef idx="2">
+            <a:schemeClr val="accent1"/>
+          </a:effectRef>
+          <a:fontRef idx="minor">
+            <a:schemeClr val="lt1"/>
+          </a:fontRef>
+        </p:style>
+        <p:txBody>
+          <a:bodyPr rtlCol="0" anchor="ctr"/>
+          <a:lstStyle/>
+          <a:p>
+            <a:pPr algn="ctr"/>
+          </a:p>
+        </p:txBody>
+      </p:sp>
+      <p:sp>
+        <p:nvSpPr>
+          <p:cNvPr id="68" name="TextBox 67"/>
+          <p:cNvSpPr txBox="1"/>
+          <p:nvPr/>
+        </p:nvSpPr>
+        <p:spPr>
+          <a:xfrm>
+            <a:off x="2876000" y="4040000"/>
+            <a:ext cx="1052000" cy="130000"/>
+          </a:xfrm>
+          <a:prstGeom prst="rect">
+            <a:avLst/>
+          </a:prstGeom>
+          <a:noFill/>
+        </p:spPr>
+        <p:txBody>
+          <a:bodyPr wrap="square" lIns="0" rIns="0" tIns="0" bIns="0">
+            <a:spAutoFit/>
+          </a:bodyPr>
+          <a:lstStyle/>
+          <a:p>
+            <a:pPr algn="l"/>
+            <a:r>
+              <a:rPr sz="650" b="0">
+                <a:solidFill>
+                  <a:srgbClr val="666666"/>
+                </a:solidFill>
+                <a:latin typeface="Arial"/>
+              </a:rPr>
+              <a:t>분기 · 승인</a:t>
+            </a:r>
+          </a:p>
+        </p:txBody>
+      </p:sp>
+      <p:sp>
+        <p:nvSpPr>
+          <p:cNvPr id="69" name="TextBox 68"/>
+          <p:cNvSpPr txBox="1"/>
+          <p:nvPr/>
+        </p:nvSpPr>
+        <p:spPr>
+          <a:xfrm>
+            <a:off x="400000" y="4040000"/>
+            <a:ext cx="4350000" cy="130000"/>
+          </a:xfrm>
+          <a:prstGeom prst="rect">
+            <a:avLst/>
+          </a:prstGeom>
+          <a:noFill/>
+        </p:spPr>
+        <p:txBody>
+          <a:bodyPr wrap="square" lIns="0" rIns="0" tIns="0" bIns="0">
+            <a:spAutoFit/>
+          </a:bodyPr>
+          <a:lstStyle/>
+          <a:p>
             <a:pPr algn="r"/>
             <a:r>
               <a:rPr sz="650" b="0">
@@ -5438,7 +5396,7 @@
                 </a:solidFill>
                 <a:latin typeface="Arial"/>
               </a:rPr>
-              <a:t>MCP 조회 서버(읽기 전용 4종) — 변환 실행 미노출</a:t>
+              <a:t>MCP 읽기 전용 조회 4종 — 변환 실행은 노출하지 않는다</a:t>
             </a:r>
           </a:p>
         </p:txBody>

--- a/docs/weekly/assets/최종발표장표.pptx
+++ b/docs/weekly/assets/최종발표장표.pptx
@@ -5904,36 +5904,72 @@
           <a:p>
             <a:pPr algn="l"/>
             <a:r>
-              <a:rPr sz="800" b="0">
+              <a:rPr sz="750" b="0">
                 <a:solidFill>
                   <a:srgbClr val="666666"/>
                 </a:solidFill>
                 <a:latin typeface="Arial"/>
               </a:rPr>
-              <a:t>“실행 수단이 없다”가 오판 — 필요한 건 앱 기동이 아닌 F 메서드 호출 환경.</a:t>
+              <a:t>“실행 수단이 없다”가 오판 — 앱 기동이 아니라 메서드 호출 환경이면 됐다</a:t>
             </a:r>
           </a:p>
           <a:p>
             <a:pPr algn="l"/>
             <a:r>
-              <a:rPr sz="800" b="0">
+              <a:rPr sz="200" b="0">
                 <a:solidFill>
                   <a:srgbClr val="666666"/>
                 </a:solidFill>
                 <a:latin typeface="Arial"/>
               </a:rPr>
-              <a:t>AS-IS 프레임워크 API는 10개 남짓의 닫힌 집합</a:t>
+              <a:t/>
             </a:r>
           </a:p>
           <a:p>
             <a:pPr algn="l"/>
             <a:r>
-              <a:rPr sz="300" b="0">
+              <a:rPr sz="850" b="1">
+                <a:solidFill>
+                  <a:srgbClr val="333333"/>
+                </a:solidFill>
+                <a:latin typeface="Arial"/>
+              </a:rPr>
+              <a:t>① 최소 실행 Harness</a:t>
+            </a:r>
+          </a:p>
+          <a:p>
+            <a:pPr algn="l"/>
+            <a:r>
+              <a:rPr sz="750" b="0">
                 <a:solidFill>
                   <a:srgbClr val="666666"/>
                 </a:solidFill>
                 <a:latin typeface="Arial"/>
               </a:rPr>
+              <a:t>데이터 계층을 양쪽 동일 고정값으로 → 차이는 포팅 차이만</a:t>
+            </a:r>
+          </a:p>
+          <a:p>
+            <a:pPr algn="l"/>
+            <a:r>
+              <a:rPr sz="750" b="0">
+                <a:solidFill>
+                  <a:srgbClr val="666666"/>
+                </a:solidFill>
+                <a:latin typeface="Arial"/>
+              </a:rPr>
+              <a:t>0행 / 1행 / 3행으로 분기 전수</a:t>
+            </a:r>
+          </a:p>
+          <a:p>
+            <a:pPr algn="l"/>
+            <a:r>
+              <a:rPr sz="200" b="0">
+                <a:solidFill>
+                  <a:srgbClr val="666666"/>
+                </a:solidFill>
+                <a:latin typeface="Arial"/>
+              </a:rPr>
               <a:t/>
             </a:r>
           </a:p>
@@ -5946,42 +5982,78 @@
                 </a:solidFill>
                 <a:latin typeface="Arial"/>
               </a:rPr>
-              <a:t>① 최소 실행 검증 실행 환경 (L3)</a:t>
+              <a:t>② 호출 대상 계약 JSON 주입</a:t>
             </a:r>
           </a:p>
           <a:p>
             <a:pPr algn="l"/>
             <a:r>
-              <a:rPr sz="800" b="0">
+              <a:rPr sz="750" b="0">
                 <a:solidFill>
                   <a:srgbClr val="666666"/>
                 </a:solidFill>
                 <a:latin typeface="Arial"/>
               </a:rPr>
-              <a:t>데이터 계층을 양쪽 동일 고정 테스트 데이터로 고정 → 차이는 포팅 차이만</a:t>
+              <a:t>실제 메서드명·반환 타입·결과 건수를 프롬프트에 명시</a:t>
             </a:r>
           </a:p>
           <a:p>
             <a:pPr algn="l"/>
             <a:r>
-              <a:rPr sz="800" b="0">
+              <a:rPr sz="200" b="0">
                 <a:solidFill>
                   <a:srgbClr val="666666"/>
                 </a:solidFill>
                 <a:latin typeface="Arial"/>
               </a:rPr>
-              <a:t>0행 / 1행 / 3행으로 분기 경로 전수</a:t>
+              <a:t/>
             </a:r>
           </a:p>
           <a:p>
             <a:pPr algn="l"/>
             <a:r>
-              <a:rPr sz="300" b="0">
+              <a:rPr sz="850" b="1">
+                <a:solidFill>
+                  <a:srgbClr val="333333"/>
+                </a:solidFill>
+                <a:latin typeface="Arial"/>
+              </a:rPr>
+              <a:t>③ ToT 교정 — 채점자 분리</a:t>
+            </a:r>
+          </a:p>
+          <a:p>
+            <a:pPr algn="l"/>
+            <a:r>
+              <a:rPr sz="750" b="0">
                 <a:solidFill>
                   <a:srgbClr val="666666"/>
                 </a:solidFill>
                 <a:latin typeface="Arial"/>
               </a:rPr>
+              <a:t>후보 병렬 생성, 규칙 기반 검증기가 채점</a:t>
+            </a:r>
+          </a:p>
+          <a:p>
+            <a:pPr algn="l"/>
+            <a:r>
+              <a:rPr sz="750" b="0">
+                <a:solidFill>
+                  <a:srgbClr val="666666"/>
+                </a:solidFill>
+                <a:latin typeface="Arial"/>
+              </a:rPr>
+              <a:t>BLOCKER 10건 중 9건만 교정 — 나머지는 사람에게</a:t>
+            </a:r>
+          </a:p>
+          <a:p>
+            <a:pPr algn="l"/>
+            <a:r>
+              <a:rPr sz="200" b="0">
+                <a:solidFill>
+                  <a:srgbClr val="666666"/>
+                </a:solidFill>
+                <a:latin typeface="Arial"/>
+              </a:rPr>
               <a:t/>
             </a:r>
           </a:p>
@@ -5994,25 +6066,25 @@
                 </a:solidFill>
                 <a:latin typeface="Arial"/>
               </a:rPr>
-              <a:t>② 호출 대상 계약 JSON 주입</a:t>
+              <a:t>④ 판단 근거를 로그로</a:t>
             </a:r>
           </a:p>
           <a:p>
             <a:pPr algn="l"/>
             <a:r>
-              <a:rPr sz="800" b="0">
+              <a:rPr sz="750" b="0">
                 <a:solidFill>
                   <a:srgbClr val="666666"/>
                 </a:solidFill>
                 <a:latin typeface="Arial"/>
               </a:rPr>
-              <a:t>호출 관계도의 실제 메서드명·반환 타입·결과 건수를 프롬프트에 명시</a:t>
+              <a:t>모델이 밝힌 근거를 인용 출력 — 원본 버그 2건을 스스로 지적</a:t>
             </a:r>
           </a:p>
           <a:p>
             <a:pPr algn="l"/>
             <a:r>
-              <a:rPr sz="300" b="0">
+              <a:rPr sz="200" b="0">
                 <a:solidFill>
                   <a:srgbClr val="666666"/>
                 </a:solidFill>
@@ -6030,49 +6102,13 @@
                 </a:solidFill>
                 <a:latin typeface="Arial"/>
               </a:rPr>
-              <a:t>③ ToT 수리 — 채점자 분리</a:t>
+              <a:t>⑤ 자동화하지 않을 것을 확정</a:t>
             </a:r>
           </a:p>
           <a:p>
             <a:pPr algn="l"/>
             <a:r>
-              <a:rPr sz="800" b="0">
-                <a:solidFill>
-                  <a:srgbClr val="666666"/>
-                </a:solidFill>
-                <a:latin typeface="Arial"/>
-              </a:rPr>
-              <a:t>후보 병렬 생성, 규칙 기반 검증기가 채점 (모델 자기평가 미사용)</a:t>
-            </a:r>
-          </a:p>
-          <a:p>
-            <a:pPr algn="l"/>
-            <a:r>
-              <a:rPr sz="300" b="0">
-                <a:solidFill>
-                  <a:srgbClr val="666666"/>
-                </a:solidFill>
-                <a:latin typeface="Arial"/>
-              </a:rPr>
-              <a:t/>
-            </a:r>
-          </a:p>
-          <a:p>
-            <a:pPr algn="l"/>
-            <a:r>
-              <a:rPr sz="850" b="1">
-                <a:solidFill>
-                  <a:srgbClr val="333333"/>
-                </a:solidFill>
-                <a:latin typeface="Arial"/>
-              </a:rPr>
-              <a:t>④ 자동화하지 않을 것을 확정</a:t>
-            </a:r>
-          </a:p>
-          <a:p>
-            <a:pPr algn="l"/>
-            <a:r>
-              <a:rPr sz="800" b="0">
+              <a:rPr sz="750" b="0">
                 <a:solidFill>
                   <a:srgbClr val="666666"/>
                 </a:solidFill>
@@ -6408,7 +6444,19 @@
                   </a:solidFill>
                   <a:latin typeface="Arial"/>
                 </a:rPr>
-                <a:t>27건 중 9건 일치 → 원인(레코드셋 추출 누락) 수정 후 48/48</a:t>
+                <a:t>27건 중 9건 → 원인(레코드셋 추출 누락) 수정 후 48/48</a:t>
+              </a:r>
+            </a:p>
+            <a:p>
+              <a:pPr algn="l"/>
+              <a:r>
+                <a:rPr sz="650" b="0">
+                  <a:solidFill>
+                    <a:srgbClr val="00A591"/>
+                  </a:solidFill>
+                  <a:latin typeface="Arial"/>
+                </a:rPr>
+                <a:t>※ 실행 가능한 3화면 기준 (2화면은 원본 컴파일 불가)</a:t>
               </a:r>
             </a:p>
           </p:txBody>
@@ -6558,7 +6606,19 @@
                   </a:solidFill>
                   <a:latin typeface="Arial"/>
                 </a:rPr>
-                <a:t>“P는 순수 위임” = 표본 1건 가정. 30화면 전수 확인 → 권한 게이트 누락 발견</a:t>
+                <a:t>“P는 순수 위임” = 표본 1건 가정 → 30화면 전수 확인으로 반증</a:t>
+              </a:r>
+            </a:p>
+            <a:p>
+              <a:pPr algn="l"/>
+              <a:r>
+                <a:rPr sz="650" b="0">
+                  <a:solidFill>
+                    <a:srgbClr val="00A591"/>
+                  </a:solidFill>
+                  <a:latin typeface="Arial"/>
+                </a:rPr>
+                <a:t>※ 메시지 키는 0/9 — 응답 규약 미확정, 지어내지 않음</a:t>
               </a:r>
             </a:p>
           </p:txBody>

--- a/docs/weekly/assets/최종발표장표.pptx
+++ b/docs/weekly/assets/최종발표장표.pptx
@@ -1968,18 +1968,6 @@
           <a:p>
             <a:pPr algn="l"/>
             <a:r>
-              <a:rPr sz="300" b="0">
-                <a:solidFill>
-                  <a:srgbClr val="666666"/>
-                </a:solidFill>
-                <a:latin typeface="Arial"/>
-              </a:rPr>
-              <a:t/>
-            </a:r>
-          </a:p>
-          <a:p>
-            <a:pPr algn="l"/>
-            <a:r>
               <a:rPr sz="900" b="1">
                 <a:solidFill>
                   <a:srgbClr val="00A591"/>
@@ -5916,12 +5904,156 @@
           <a:p>
             <a:pPr algn="l"/>
             <a:r>
-              <a:rPr sz="200" b="0">
+              <a:rPr sz="850" b="1">
+                <a:solidFill>
+                  <a:srgbClr val="333333"/>
+                </a:solidFill>
+                <a:latin typeface="Arial"/>
+              </a:rPr>
+              <a:t>① 최소 실행 Harness</a:t>
+            </a:r>
+          </a:p>
+          <a:p>
+            <a:pPr algn="l"/>
+            <a:r>
+              <a:rPr sz="750" b="0">
                 <a:solidFill>
                   <a:srgbClr val="666666"/>
                 </a:solidFill>
                 <a:latin typeface="Arial"/>
               </a:rPr>
+              <a:t>데이터 계층을 양쪽 동일 고정값으로 → 차이는 포팅 차이만</a:t>
+            </a:r>
+          </a:p>
+          <a:p>
+            <a:pPr algn="l"/>
+            <a:r>
+              <a:rPr sz="750" b="0">
+                <a:solidFill>
+                  <a:srgbClr val="666666"/>
+                </a:solidFill>
+                <a:latin typeface="Arial"/>
+              </a:rPr>
+              <a:t>0행 / 1행 / 3행으로 분기 전수</a:t>
+            </a:r>
+          </a:p>
+          <a:p>
+            <a:pPr algn="l"/>
+            <a:r>
+              <a:rPr sz="850" b="1">
+                <a:solidFill>
+                  <a:srgbClr val="333333"/>
+                </a:solidFill>
+                <a:latin typeface="Arial"/>
+              </a:rPr>
+              <a:t>② 호출 대상 계약 JSON 주입</a:t>
+            </a:r>
+          </a:p>
+          <a:p>
+            <a:pPr algn="l"/>
+            <a:r>
+              <a:rPr sz="750" b="0">
+                <a:solidFill>
+                  <a:srgbClr val="666666"/>
+                </a:solidFill>
+                <a:latin typeface="Arial"/>
+              </a:rPr>
+              <a:t>실제 메서드명·반환 타입·결과 건수를 명시</a:t>
+            </a:r>
+          </a:p>
+          <a:p>
+            <a:pPr algn="l"/>
+            <a:r>
+              <a:rPr sz="850" b="1">
+                <a:solidFill>
+                  <a:srgbClr val="333333"/>
+                </a:solidFill>
+                <a:latin typeface="Arial"/>
+              </a:rPr>
+              <a:t>③ ToT 교정 — 채점자 분리</a:t>
+            </a:r>
+          </a:p>
+          <a:p>
+            <a:pPr algn="l"/>
+            <a:r>
+              <a:rPr sz="750" b="0">
+                <a:solidFill>
+                  <a:srgbClr val="666666"/>
+                </a:solidFill>
+                <a:latin typeface="Arial"/>
+              </a:rPr>
+              <a:t>후보 병렬 생성, 규칙 기반 검증기가 채점</a:t>
+            </a:r>
+          </a:p>
+          <a:p>
+            <a:pPr algn="l"/>
+            <a:r>
+              <a:rPr sz="750" b="0">
+                <a:solidFill>
+                  <a:srgbClr val="666666"/>
+                </a:solidFill>
+                <a:latin typeface="Arial"/>
+              </a:rPr>
+              <a:t>BLOCKER 10건 중 9건만 교정, 나머지는 사람에게</a:t>
+            </a:r>
+          </a:p>
+          <a:p>
+            <a:pPr algn="l"/>
+            <a:r>
+              <a:rPr sz="850" b="1">
+                <a:solidFill>
+                  <a:srgbClr val="333333"/>
+                </a:solidFill>
+                <a:latin typeface="Arial"/>
+              </a:rPr>
+              <a:t>④ 판단 근거를 로그로</a:t>
+            </a:r>
+          </a:p>
+          <a:p>
+            <a:pPr algn="l"/>
+            <a:r>
+              <a:rPr sz="750" b="0">
+                <a:solidFill>
+                  <a:srgbClr val="666666"/>
+                </a:solidFill>
+                <a:latin typeface="Arial"/>
+              </a:rPr>
+              <a:t>모델이 원본 버그 2건을 스스로 지적</a:t>
+            </a:r>
+          </a:p>
+          <a:p>
+            <a:pPr algn="l"/>
+            <a:r>
+              <a:rPr sz="850" b="1">
+                <a:solidFill>
+                  <a:srgbClr val="333333"/>
+                </a:solidFill>
+                <a:latin typeface="Arial"/>
+              </a:rPr>
+              <a:t>⑤ 자동화하지 않을 것을 확정</a:t>
+            </a:r>
+          </a:p>
+          <a:p>
+            <a:pPr algn="l"/>
+            <a:r>
+              <a:rPr sz="750" b="0">
+                <a:solidFill>
+                  <a:srgbClr val="666666"/>
+                </a:solidFill>
+                <a:latin typeface="Arial"/>
+              </a:rPr>
+              <a:t>원본 결함은 보존·표시, 미확인 패턴에 규칙 생성 금지</a:t>
+            </a:r>
+          </a:p>
+          <a:p>
+            <a:pPr algn="l"/>
+            <a:r>
+              <a:rPr sz="300" b="0">
+                <a:solidFill>
+                  <a:srgbClr val="666666"/>
+                </a:solidFill>
+                <a:latin typeface="Arial"/>
+              </a:rPr>
               <a:t/>
             </a:r>
           </a:p>
@@ -5930,11 +6062,11 @@
             <a:r>
               <a:rPr sz="850" b="1">
                 <a:solidFill>
-                  <a:srgbClr val="333333"/>
-                </a:solidFill>
-                <a:latin typeface="Arial"/>
-              </a:rPr>
-              <a:t>① 최소 실행 Harness</a:t>
+                  <a:srgbClr val="B4621A"/>
+                </a:solidFill>
+                <a:latin typeface="Arial"/>
+              </a:rPr>
+              <a:t>2차 적용 — 개발 표준 내재화</a:t>
             </a:r>
           </a:p>
           <a:p>
@@ -5946,7 +6078,7 @@
                 </a:solidFill>
                 <a:latin typeface="Arial"/>
               </a:rPr>
-              <a:t>데이터 계층을 양쪽 동일 고정값으로 → 차이는 포팅 차이만</a:t>
+              <a:t>네이밍·계층 책임·예외 규약을 암묵지에서 규칙으로</a:t>
             </a:r>
           </a:p>
           <a:p>
@@ -5958,163 +6090,19 @@
                 </a:solidFill>
                 <a:latin typeface="Arial"/>
               </a:rPr>
-              <a:t>0행 / 1행 / 3행으로 분기 전수</a:t>
+              <a:t>전환 직후 LLM이 표준 기준으로 한 번 더 검토</a:t>
             </a:r>
           </a:p>
           <a:p>
             <a:pPr algn="l"/>
             <a:r>
-              <a:rPr sz="200" b="0">
+              <a:rPr sz="750" b="0">
                 <a:solidFill>
                   <a:srgbClr val="666666"/>
                 </a:solidFill>
                 <a:latin typeface="Arial"/>
               </a:rPr>
-              <a:t/>
-            </a:r>
-          </a:p>
-          <a:p>
-            <a:pPr algn="l"/>
-            <a:r>
-              <a:rPr sz="850" b="1">
-                <a:solidFill>
-                  <a:srgbClr val="333333"/>
-                </a:solidFill>
-                <a:latin typeface="Arial"/>
-              </a:rPr>
-              <a:t>② 호출 대상 계약 JSON 주입</a:t>
-            </a:r>
-          </a:p>
-          <a:p>
-            <a:pPr algn="l"/>
-            <a:r>
-              <a:rPr sz="750" b="0">
-                <a:solidFill>
-                  <a:srgbClr val="666666"/>
-                </a:solidFill>
-                <a:latin typeface="Arial"/>
-              </a:rPr>
-              <a:t>실제 메서드명·반환 타입·결과 건수를 프롬프트에 명시</a:t>
-            </a:r>
-          </a:p>
-          <a:p>
-            <a:pPr algn="l"/>
-            <a:r>
-              <a:rPr sz="200" b="0">
-                <a:solidFill>
-                  <a:srgbClr val="666666"/>
-                </a:solidFill>
-                <a:latin typeface="Arial"/>
-              </a:rPr>
-              <a:t/>
-            </a:r>
-          </a:p>
-          <a:p>
-            <a:pPr algn="l"/>
-            <a:r>
-              <a:rPr sz="850" b="1">
-                <a:solidFill>
-                  <a:srgbClr val="333333"/>
-                </a:solidFill>
-                <a:latin typeface="Arial"/>
-              </a:rPr>
-              <a:t>③ ToT 교정 — 채점자 분리</a:t>
-            </a:r>
-          </a:p>
-          <a:p>
-            <a:pPr algn="l"/>
-            <a:r>
-              <a:rPr sz="750" b="0">
-                <a:solidFill>
-                  <a:srgbClr val="666666"/>
-                </a:solidFill>
-                <a:latin typeface="Arial"/>
-              </a:rPr>
-              <a:t>후보 병렬 생성, 규칙 기반 검증기가 채점</a:t>
-            </a:r>
-          </a:p>
-          <a:p>
-            <a:pPr algn="l"/>
-            <a:r>
-              <a:rPr sz="750" b="0">
-                <a:solidFill>
-                  <a:srgbClr val="666666"/>
-                </a:solidFill>
-                <a:latin typeface="Arial"/>
-              </a:rPr>
-              <a:t>BLOCKER 10건 중 9건만 교정 — 나머지는 사람에게</a:t>
-            </a:r>
-          </a:p>
-          <a:p>
-            <a:pPr algn="l"/>
-            <a:r>
-              <a:rPr sz="200" b="0">
-                <a:solidFill>
-                  <a:srgbClr val="666666"/>
-                </a:solidFill>
-                <a:latin typeface="Arial"/>
-              </a:rPr>
-              <a:t/>
-            </a:r>
-          </a:p>
-          <a:p>
-            <a:pPr algn="l"/>
-            <a:r>
-              <a:rPr sz="850" b="1">
-                <a:solidFill>
-                  <a:srgbClr val="333333"/>
-                </a:solidFill>
-                <a:latin typeface="Arial"/>
-              </a:rPr>
-              <a:t>④ 판단 근거를 로그로</a:t>
-            </a:r>
-          </a:p>
-          <a:p>
-            <a:pPr algn="l"/>
-            <a:r>
-              <a:rPr sz="750" b="0">
-                <a:solidFill>
-                  <a:srgbClr val="666666"/>
-                </a:solidFill>
-                <a:latin typeface="Arial"/>
-              </a:rPr>
-              <a:t>모델이 밝힌 근거를 인용 출력 — 원본 버그 2건을 스스로 지적</a:t>
-            </a:r>
-          </a:p>
-          <a:p>
-            <a:pPr algn="l"/>
-            <a:r>
-              <a:rPr sz="200" b="0">
-                <a:solidFill>
-                  <a:srgbClr val="666666"/>
-                </a:solidFill>
-                <a:latin typeface="Arial"/>
-              </a:rPr>
-              <a:t/>
-            </a:r>
-          </a:p>
-          <a:p>
-            <a:pPr algn="l"/>
-            <a:r>
-              <a:rPr sz="850" b="1">
-                <a:solidFill>
-                  <a:srgbClr val="333333"/>
-                </a:solidFill>
-                <a:latin typeface="Arial"/>
-              </a:rPr>
-              <a:t>⑤ 자동화하지 않을 것을 확정</a:t>
-            </a:r>
-          </a:p>
-          <a:p>
-            <a:pPr algn="l"/>
-            <a:r>
-              <a:rPr sz="750" b="0">
-                <a:solidFill>
-                  <a:srgbClr val="666666"/>
-                </a:solidFill>
-                <a:latin typeface="Arial"/>
-              </a:rPr>
-              <a:t>원본 결함은 보존·표시, 미확인 패턴에 규칙 생성 금지</a:t>
+              <a:t>이관이 아니라 운영 품질까지 보장하는 소스로</a:t>
             </a:r>
           </a:p>
         </p:txBody>

--- a/docs/weekly/assets/최종발표장표.pptx
+++ b/docs/weekly/assets/최종발표장표.pptx
@@ -1656,14 +1656,32 @@
           </a:p>
           <a:p>
             <a:pPr algn="l"/>
-            <a:r>
-              <a:rPr sz="300" b="0">
+            <a:endParaRPr sz="900" b="0">
+              <a:solidFill>
+                <a:srgbClr val="666666"/>
+              </a:solidFill>
+              <a:latin typeface="Arial"/>
+            </a:endParaRPr>
+          </a:p>
+          <a:p>
+            <a:pPr algn="l"/>
+            <a:r>
+              <a:rPr sz="900" b="1">
+                <a:solidFill>
+                  <a:srgbClr val="00A591"/>
+                </a:solidFill>
+                <a:latin typeface="Arial"/>
+              </a:rPr>
+              <a:t>규모  </a:t>
+            </a:r>
+            <a:r>
+              <a:rPr sz="900" b="0">
                 <a:solidFill>
                   <a:srgbClr val="666666"/>
                 </a:solidFill>
                 <a:latin typeface="Arial"/>
               </a:rPr>
-              <a:t/>
+              <a:t>1,416개 화면에서 동일 추적 반복</a:t>
             </a:r>
           </a:p>
           <a:p>
@@ -1675,7 +1693,7 @@
                 </a:solidFill>
                 <a:latin typeface="Arial"/>
               </a:rPr>
-              <a:t>규모  </a:t>
+              <a:t>품질  </a:t>
             </a:r>
             <a:r>
               <a:rPr sz="900" b="0">
@@ -1684,7 +1702,7 @@
                 </a:solidFill>
                 <a:latin typeface="Arial"/>
               </a:rPr>
-              <a:t>1,416개 화면에서 동일 추적 반복</a:t>
+              <a:t>개발자별 응답·예외 처리 이원화</a:t>
             </a:r>
           </a:p>
           <a:p>
@@ -1696,7 +1714,7 @@
                 </a:solidFill>
                 <a:latin typeface="Arial"/>
               </a:rPr>
-              <a:t>품질  </a:t>
+              <a:t>리스크  </a:t>
             </a:r>
             <a:r>
               <a:rPr sz="900" b="0">
@@ -1705,41 +1723,17 @@
                 </a:solidFill>
                 <a:latin typeface="Arial"/>
               </a:rPr>
-              <a:t>개발자별 응답·예외 처리 이원화</a:t>
+              <a:t>원본에 결함 혼재 — 컴파일 불가·XML·SQL 오류</a:t>
             </a:r>
           </a:p>
           <a:p>
             <a:pPr algn="l"/>
-            <a:r>
-              <a:rPr sz="900" b="1">
-                <a:solidFill>
-                  <a:srgbClr val="00A591"/>
-                </a:solidFill>
-                <a:latin typeface="Arial"/>
-              </a:rPr>
-              <a:t>리스크  </a:t>
-            </a:r>
-            <a:r>
-              <a:rPr sz="900" b="0">
-                <a:solidFill>
-                  <a:srgbClr val="666666"/>
-                </a:solidFill>
-                <a:latin typeface="Arial"/>
-              </a:rPr>
-              <a:t>원본에 결함 혼재 — 컴파일 불가·XML·SQL 오류</a:t>
-            </a:r>
-          </a:p>
-          <a:p>
-            <a:pPr algn="l"/>
-            <a:r>
-              <a:rPr sz="300" b="0">
-                <a:solidFill>
-                  <a:srgbClr val="666666"/>
-                </a:solidFill>
-                <a:latin typeface="Arial"/>
-              </a:rPr>
-              <a:t/>
-            </a:r>
+            <a:endParaRPr sz="900" b="0">
+              <a:solidFill>
+                <a:srgbClr val="666666"/>
+              </a:solidFill>
+              <a:latin typeface="Arial"/>
+            </a:endParaRPr>
           </a:p>
           <a:p>
             <a:pPr algn="l"/>
@@ -1883,15 +1877,7 @@
           </a:p>
           <a:p>
             <a:pPr algn="l"/>
-            <a:r>
-              <a:rPr sz="300" b="0">
-                <a:solidFill>
-                  <a:srgbClr val="666666"/>
-                </a:solidFill>
-                <a:latin typeface="Arial"/>
-              </a:rPr>
-              <a:t/>
-            </a:r>
+            <a:endParaRPr lang="en-US" sz="900" dirty="0"/>
           </a:p>
           <a:p>
             <a:pPr algn="l"/>
@@ -2397,63 +2383,553 @@
               <a:buNone/>
             </a:pPr>
             <a:r>
-              <a:rPr sz="1050" b="1">
+              <a:rPr sz="1050" b="1" dirty="0">
                 <a:solidFill>
                   <a:srgbClr val="333333"/>
                 </a:solidFill>
                 <a:latin typeface="Arial"/>
               </a:rPr>
-              <a:t>“규칙 기반 변환에 LLM을 쓰지 않아 호출 46% 절감,</a:t>
-            </a:r>
-            <a:endParaRPr lang="en-US" sz="950" dirty="0"/>
+              <a:t>“</a:t>
+            </a:r>
+            <a:r>
+              <a:rPr sz="1050" b="1" dirty="0" err="1">
+                <a:solidFill>
+                  <a:schemeClr val="accent1">
+                    <a:lumMod val="40000"/>
+                    <a:lumOff val="60000"/>
+                  </a:schemeClr>
+                </a:solidFill>
+                <a:latin typeface="Arial"/>
+              </a:rPr>
+              <a:t>규칙</a:t>
+            </a:r>
+            <a:r>
+              <a:rPr sz="1050" b="1" dirty="0">
+                <a:solidFill>
+                  <a:schemeClr val="accent1">
+                    <a:lumMod val="40000"/>
+                    <a:lumOff val="60000"/>
+                  </a:schemeClr>
+                </a:solidFill>
+                <a:latin typeface="Arial"/>
+              </a:rPr>
+              <a:t> </a:t>
+            </a:r>
+            <a:r>
+              <a:rPr sz="1050" b="1" dirty="0" err="1">
+                <a:solidFill>
+                  <a:schemeClr val="accent1">
+                    <a:lumMod val="40000"/>
+                    <a:lumOff val="60000"/>
+                  </a:schemeClr>
+                </a:solidFill>
+                <a:latin typeface="Arial"/>
+              </a:rPr>
+              <a:t>기반</a:t>
+            </a:r>
+            <a:r>
+              <a:rPr sz="1050" b="1" dirty="0">
+                <a:solidFill>
+                  <a:schemeClr val="accent1">
+                    <a:lumMod val="40000"/>
+                    <a:lumOff val="60000"/>
+                  </a:schemeClr>
+                </a:solidFill>
+                <a:latin typeface="Arial"/>
+              </a:rPr>
+              <a:t> </a:t>
+            </a:r>
+            <a:r>
+              <a:rPr sz="1050" b="1" dirty="0" err="1">
+                <a:solidFill>
+                  <a:schemeClr val="accent1">
+                    <a:lumMod val="40000"/>
+                    <a:lumOff val="60000"/>
+                  </a:schemeClr>
+                </a:solidFill>
+                <a:latin typeface="Arial"/>
+              </a:rPr>
+              <a:t>변환에</a:t>
+            </a:r>
+            <a:r>
+              <a:rPr sz="1050" b="1" dirty="0">
+                <a:solidFill>
+                  <a:schemeClr val="accent1">
+                    <a:lumMod val="40000"/>
+                    <a:lumOff val="60000"/>
+                  </a:schemeClr>
+                </a:solidFill>
+                <a:latin typeface="Arial"/>
+              </a:rPr>
+              <a:t> </a:t>
+            </a:r>
+            <a:r>
+              <a:rPr sz="1050" b="1" dirty="0" err="1">
+                <a:solidFill>
+                  <a:schemeClr val="accent1">
+                    <a:lumMod val="40000"/>
+                    <a:lumOff val="60000"/>
+                  </a:schemeClr>
+                </a:solidFill>
+                <a:latin typeface="Arial"/>
+              </a:rPr>
+              <a:t>LLM을</a:t>
+            </a:r>
+            <a:r>
+              <a:rPr sz="1050" b="1" dirty="0">
+                <a:solidFill>
+                  <a:schemeClr val="accent1">
+                    <a:lumMod val="40000"/>
+                    <a:lumOff val="60000"/>
+                  </a:schemeClr>
+                </a:solidFill>
+                <a:latin typeface="Arial"/>
+              </a:rPr>
+              <a:t> </a:t>
+            </a:r>
+            <a:r>
+              <a:rPr sz="1050" b="1" dirty="0" err="1">
+                <a:solidFill>
+                  <a:schemeClr val="accent1">
+                    <a:lumMod val="40000"/>
+                    <a:lumOff val="60000"/>
+                  </a:schemeClr>
+                </a:solidFill>
+                <a:latin typeface="Arial"/>
+              </a:rPr>
+              <a:t>쓰지</a:t>
+            </a:r>
+            <a:r>
+              <a:rPr sz="1050" b="1" dirty="0">
+                <a:solidFill>
+                  <a:schemeClr val="accent1">
+                    <a:lumMod val="40000"/>
+                    <a:lumOff val="60000"/>
+                  </a:schemeClr>
+                </a:solidFill>
+                <a:latin typeface="Arial"/>
+              </a:rPr>
+              <a:t> </a:t>
+            </a:r>
+            <a:r>
+              <a:rPr sz="1050" b="1" dirty="0" err="1">
+                <a:solidFill>
+                  <a:schemeClr val="accent1">
+                    <a:lumMod val="40000"/>
+                    <a:lumOff val="60000"/>
+                  </a:schemeClr>
+                </a:solidFill>
+                <a:latin typeface="Arial"/>
+              </a:rPr>
+              <a:t>않아</a:t>
+            </a:r>
+            <a:r>
+              <a:rPr sz="1050" b="1" dirty="0">
+                <a:solidFill>
+                  <a:schemeClr val="accent1">
+                    <a:lumMod val="40000"/>
+                    <a:lumOff val="60000"/>
+                  </a:schemeClr>
+                </a:solidFill>
+                <a:latin typeface="Arial"/>
+              </a:rPr>
+              <a:t> </a:t>
+            </a:r>
+            <a:r>
+              <a:rPr sz="1050" b="1" dirty="0" err="1">
+                <a:solidFill>
+                  <a:schemeClr val="accent1">
+                    <a:lumMod val="40000"/>
+                    <a:lumOff val="60000"/>
+                  </a:schemeClr>
+                </a:solidFill>
+                <a:latin typeface="Arial"/>
+              </a:rPr>
+              <a:t>호출</a:t>
+            </a:r>
+            <a:r>
+              <a:rPr sz="1050" b="1" dirty="0">
+                <a:solidFill>
+                  <a:schemeClr val="accent1">
+                    <a:lumMod val="40000"/>
+                    <a:lumOff val="60000"/>
+                  </a:schemeClr>
+                </a:solidFill>
+                <a:latin typeface="Arial"/>
+              </a:rPr>
+              <a:t> 46% </a:t>
+            </a:r>
+            <a:r>
+              <a:rPr sz="1050" b="1" dirty="0" err="1">
+                <a:solidFill>
+                  <a:schemeClr val="accent1">
+                    <a:lumMod val="40000"/>
+                    <a:lumOff val="60000"/>
+                  </a:schemeClr>
+                </a:solidFill>
+                <a:latin typeface="Arial"/>
+              </a:rPr>
+              <a:t>절감</a:t>
+            </a:r>
+            <a:r>
+              <a:rPr sz="1050" b="1" dirty="0">
+                <a:solidFill>
+                  <a:schemeClr val="accent1">
+                    <a:lumMod val="40000"/>
+                    <a:lumOff val="60000"/>
+                  </a:schemeClr>
+                </a:solidFill>
+                <a:latin typeface="Arial"/>
+              </a:rPr>
+              <a:t>,</a:t>
+            </a:r>
+            <a:endParaRPr lang="en-US" sz="950" dirty="0">
+              <a:solidFill>
+                <a:schemeClr val="accent1">
+                  <a:lumMod val="40000"/>
+                  <a:lumOff val="60000"/>
+                </a:schemeClr>
+              </a:solidFill>
+            </a:endParaRPr>
           </a:p>
           <a:p>
             <a:pPr algn="l"/>
             <a:r>
-              <a:rPr sz="1050" b="1">
-                <a:solidFill>
-                  <a:srgbClr val="333333"/>
-                </a:solidFill>
-                <a:latin typeface="Arial"/>
-              </a:rPr>
-              <a:t>정적 검증 통과 코드의 실행 일치율 33%를</a:t>
+              <a:rPr sz="1050" b="1" dirty="0" err="1">
+                <a:solidFill>
+                  <a:schemeClr val="accent1">
+                    <a:lumMod val="40000"/>
+                    <a:lumOff val="60000"/>
+                  </a:schemeClr>
+                </a:solidFill>
+                <a:latin typeface="Arial"/>
+              </a:rPr>
+              <a:t>정적</a:t>
+            </a:r>
+            <a:r>
+              <a:rPr sz="1050" b="1" dirty="0">
+                <a:solidFill>
+                  <a:schemeClr val="accent1">
+                    <a:lumMod val="40000"/>
+                    <a:lumOff val="60000"/>
+                  </a:schemeClr>
+                </a:solidFill>
+                <a:latin typeface="Arial"/>
+              </a:rPr>
+              <a:t> </a:t>
+            </a:r>
+            <a:r>
+              <a:rPr sz="1050" b="1" dirty="0" err="1">
+                <a:solidFill>
+                  <a:schemeClr val="accent1">
+                    <a:lumMod val="40000"/>
+                    <a:lumOff val="60000"/>
+                  </a:schemeClr>
+                </a:solidFill>
+                <a:latin typeface="Arial"/>
+              </a:rPr>
+              <a:t>검증</a:t>
+            </a:r>
+            <a:r>
+              <a:rPr sz="1050" b="1" dirty="0">
+                <a:solidFill>
+                  <a:schemeClr val="accent1">
+                    <a:lumMod val="40000"/>
+                    <a:lumOff val="60000"/>
+                  </a:schemeClr>
+                </a:solidFill>
+                <a:latin typeface="Arial"/>
+              </a:rPr>
+              <a:t> </a:t>
+            </a:r>
+            <a:r>
+              <a:rPr sz="1050" b="1" dirty="0" err="1">
+                <a:solidFill>
+                  <a:schemeClr val="accent1">
+                    <a:lumMod val="40000"/>
+                    <a:lumOff val="60000"/>
+                  </a:schemeClr>
+                </a:solidFill>
+                <a:latin typeface="Arial"/>
+              </a:rPr>
+              <a:t>통과</a:t>
+            </a:r>
+            <a:r>
+              <a:rPr sz="1050" b="1" dirty="0">
+                <a:solidFill>
+                  <a:schemeClr val="accent1">
+                    <a:lumMod val="40000"/>
+                    <a:lumOff val="60000"/>
+                  </a:schemeClr>
+                </a:solidFill>
+                <a:latin typeface="Arial"/>
+              </a:rPr>
+              <a:t> </a:t>
+            </a:r>
+            <a:r>
+              <a:rPr sz="1050" b="1" dirty="0" err="1">
+                <a:solidFill>
+                  <a:schemeClr val="accent1">
+                    <a:lumMod val="40000"/>
+                    <a:lumOff val="60000"/>
+                  </a:schemeClr>
+                </a:solidFill>
+                <a:latin typeface="Arial"/>
+              </a:rPr>
+              <a:t>코드의</a:t>
+            </a:r>
+            <a:r>
+              <a:rPr sz="1050" b="1" dirty="0">
+                <a:solidFill>
+                  <a:schemeClr val="accent1">
+                    <a:lumMod val="40000"/>
+                    <a:lumOff val="60000"/>
+                  </a:schemeClr>
+                </a:solidFill>
+                <a:latin typeface="Arial"/>
+              </a:rPr>
+              <a:t> </a:t>
+            </a:r>
+            <a:r>
+              <a:rPr sz="1050" b="1" dirty="0" err="1">
+                <a:solidFill>
+                  <a:schemeClr val="accent1">
+                    <a:lumMod val="40000"/>
+                    <a:lumOff val="60000"/>
+                  </a:schemeClr>
+                </a:solidFill>
+                <a:latin typeface="Arial"/>
+              </a:rPr>
+              <a:t>실행</a:t>
+            </a:r>
+            <a:r>
+              <a:rPr sz="1050" b="1" dirty="0">
+                <a:solidFill>
+                  <a:schemeClr val="accent1">
+                    <a:lumMod val="40000"/>
+                    <a:lumOff val="60000"/>
+                  </a:schemeClr>
+                </a:solidFill>
+                <a:latin typeface="Arial"/>
+              </a:rPr>
+              <a:t> </a:t>
+            </a:r>
+            <a:r>
+              <a:rPr sz="1050" b="1" dirty="0" err="1">
+                <a:solidFill>
+                  <a:schemeClr val="accent1">
+                    <a:lumMod val="40000"/>
+                    <a:lumOff val="60000"/>
+                  </a:schemeClr>
+                </a:solidFill>
+                <a:latin typeface="Arial"/>
+              </a:rPr>
+              <a:t>일치율</a:t>
+            </a:r>
+            <a:r>
+              <a:rPr sz="1050" b="1" dirty="0">
+                <a:solidFill>
+                  <a:schemeClr val="accent1">
+                    <a:lumMod val="40000"/>
+                    <a:lumOff val="60000"/>
+                  </a:schemeClr>
+                </a:solidFill>
+                <a:latin typeface="Arial"/>
+              </a:rPr>
+              <a:t> 33%를</a:t>
             </a:r>
           </a:p>
           <a:p>
             <a:pPr algn="l"/>
             <a:r>
-              <a:rPr sz="1050" b="1">
-                <a:solidFill>
-                  <a:srgbClr val="333333"/>
-                </a:solidFill>
-                <a:latin typeface="Arial"/>
-              </a:rPr>
-              <a:t>직접 측정해 100%로 개선”</a:t>
+              <a:rPr sz="1050" b="1" dirty="0" err="1">
+                <a:solidFill>
+                  <a:schemeClr val="accent1">
+                    <a:lumMod val="40000"/>
+                    <a:lumOff val="60000"/>
+                  </a:schemeClr>
+                </a:solidFill>
+                <a:latin typeface="Arial"/>
+              </a:rPr>
+              <a:t>직접</a:t>
+            </a:r>
+            <a:r>
+              <a:rPr sz="1050" b="1" dirty="0">
+                <a:solidFill>
+                  <a:schemeClr val="accent1">
+                    <a:lumMod val="40000"/>
+                    <a:lumOff val="60000"/>
+                  </a:schemeClr>
+                </a:solidFill>
+                <a:latin typeface="Arial"/>
+              </a:rPr>
+              <a:t> </a:t>
+            </a:r>
+            <a:r>
+              <a:rPr sz="1050" b="1" dirty="0" err="1">
+                <a:solidFill>
+                  <a:schemeClr val="accent1">
+                    <a:lumMod val="40000"/>
+                    <a:lumOff val="60000"/>
+                  </a:schemeClr>
+                </a:solidFill>
+                <a:latin typeface="Arial"/>
+              </a:rPr>
+              <a:t>측정해</a:t>
+            </a:r>
+            <a:r>
+              <a:rPr sz="1050" b="1" dirty="0">
+                <a:solidFill>
+                  <a:schemeClr val="accent1">
+                    <a:lumMod val="40000"/>
+                    <a:lumOff val="60000"/>
+                  </a:schemeClr>
+                </a:solidFill>
+                <a:latin typeface="Arial"/>
+              </a:rPr>
+              <a:t> 100%로 </a:t>
+            </a:r>
+            <a:r>
+              <a:rPr sz="1050" b="1" dirty="0" err="1">
+                <a:solidFill>
+                  <a:schemeClr val="accent1">
+                    <a:lumMod val="40000"/>
+                    <a:lumOff val="60000"/>
+                  </a:schemeClr>
+                </a:solidFill>
+                <a:latin typeface="Arial"/>
+              </a:rPr>
+              <a:t>개선</a:t>
+            </a:r>
+            <a:r>
+              <a:rPr sz="1050" b="1" dirty="0">
+                <a:solidFill>
+                  <a:schemeClr val="accent1">
+                    <a:lumMod val="40000"/>
+                    <a:lumOff val="60000"/>
+                  </a:schemeClr>
+                </a:solidFill>
+                <a:latin typeface="Arial"/>
+              </a:rPr>
+              <a:t>”</a:t>
             </a:r>
           </a:p>
           <a:p>
             <a:pPr algn="l"/>
-            <a:r>
-              <a:rPr sz="400" b="0">
-                <a:solidFill>
-                  <a:srgbClr val="666666"/>
-                </a:solidFill>
-                <a:latin typeface="Arial"/>
-              </a:rPr>
-              <a:t/>
-            </a:r>
+            <a:endParaRPr sz="1050" b="1" dirty="0">
+              <a:solidFill>
+                <a:srgbClr val="333333"/>
+              </a:solidFill>
+              <a:latin typeface="Arial"/>
+            </a:endParaRPr>
           </a:p>
           <a:p>
             <a:pPr algn="l"/>
             <a:r>
-              <a:rPr sz="800" b="0">
+              <a:rPr sz="800" b="0" dirty="0" err="1">
                 <a:solidFill>
                   <a:srgbClr val="00A591"/>
                 </a:solidFill>
                 <a:latin typeface="Arial"/>
               </a:rPr>
-              <a:t>전환 스코어카드 80.9 / 100  ·  측정 범위 확대로 88.2에서 하향</a:t>
-            </a:r>
+              <a:t>전환</a:t>
+            </a:r>
+            <a:r>
+              <a:rPr sz="800" b="0" dirty="0">
+                <a:solidFill>
+                  <a:srgbClr val="00A591"/>
+                </a:solidFill>
+                <a:latin typeface="Arial"/>
+              </a:rPr>
+              <a:t> </a:t>
+            </a:r>
+            <a:r>
+              <a:rPr sz="800" b="0" dirty="0" err="1">
+                <a:solidFill>
+                  <a:srgbClr val="00A591"/>
+                </a:solidFill>
+                <a:latin typeface="Arial"/>
+              </a:rPr>
+              <a:t>스코어카드</a:t>
+            </a:r>
+            <a:r>
+              <a:rPr sz="800" b="0" dirty="0">
+                <a:solidFill>
+                  <a:srgbClr val="00A591"/>
+                </a:solidFill>
+                <a:latin typeface="Arial"/>
+              </a:rPr>
+              <a:t> 80.9 / 100  ·  </a:t>
+            </a:r>
+            <a:r>
+              <a:rPr sz="800" b="0" dirty="0" err="1">
+                <a:solidFill>
+                  <a:srgbClr val="00A591"/>
+                </a:solidFill>
+                <a:latin typeface="Arial"/>
+              </a:rPr>
+              <a:t>측정</a:t>
+            </a:r>
+            <a:r>
+              <a:rPr sz="800" b="0" dirty="0">
+                <a:solidFill>
+                  <a:srgbClr val="00A591"/>
+                </a:solidFill>
+                <a:latin typeface="Arial"/>
+              </a:rPr>
+              <a:t> </a:t>
+            </a:r>
+            <a:r>
+              <a:rPr sz="800" b="0" dirty="0" err="1">
+                <a:solidFill>
+                  <a:srgbClr val="00A591"/>
+                </a:solidFill>
+                <a:latin typeface="Arial"/>
+              </a:rPr>
+              <a:t>범위</a:t>
+            </a:r>
+            <a:r>
+              <a:rPr sz="800" b="0" dirty="0">
+                <a:solidFill>
+                  <a:srgbClr val="00A591"/>
+                </a:solidFill>
+                <a:latin typeface="Arial"/>
+              </a:rPr>
+              <a:t> </a:t>
+            </a:r>
+            <a:r>
+              <a:rPr sz="800" b="0" dirty="0" err="1">
+                <a:solidFill>
+                  <a:srgbClr val="00A591"/>
+                </a:solidFill>
+                <a:latin typeface="Arial"/>
+              </a:rPr>
+              <a:t>확대로</a:t>
+            </a:r>
+            <a:r>
+              <a:rPr sz="800" b="0" dirty="0">
+                <a:solidFill>
+                  <a:srgbClr val="00A591"/>
+                </a:solidFill>
+                <a:latin typeface="Arial"/>
+              </a:rPr>
+              <a:t> 88.2에서 </a:t>
+            </a:r>
+            <a:r>
+              <a:rPr sz="800" b="0" dirty="0" err="1">
+                <a:solidFill>
+                  <a:srgbClr val="00A591"/>
+                </a:solidFill>
+                <a:latin typeface="Arial"/>
+              </a:rPr>
+              <a:t>하향</a:t>
+            </a:r>
+            <a:endParaRPr sz="800" b="0" dirty="0">
+              <a:solidFill>
+                <a:srgbClr val="00A591"/>
+              </a:solidFill>
+              <a:latin typeface="Arial"/>
+            </a:endParaRPr>
           </a:p>
         </p:txBody>
       </p:sp>
@@ -3027,16 +3503,7 @@
                 </a:solidFill>
                 <a:latin typeface="Arial"/>
               </a:rPr>
-              <a:t>강점  </a:t>
-            </a:r>
-            <a:r>
-              <a:rPr sz="800" b="1">
-                <a:solidFill>
-                  <a:srgbClr val="1F3564"/>
-                </a:solidFill>
-                <a:latin typeface="Arial"/>
-              </a:rPr>
-              <a:t>계획이 도구 호출을 지휘 — 재현·리뷰·재실행 가능</a:t>
+              <a:t>강점  계획이 도구 호출을 지휘 — 재현·리뷰·재실행 가능</a:t>
             </a:r>
           </a:p>
         </p:txBody>
@@ -3270,16 +3737,7 @@
                 </a:solidFill>
                 <a:latin typeface="Arial"/>
               </a:rPr>
-              <a:t>강점  </a:t>
-            </a:r>
-            <a:r>
-              <a:rPr sz="800" b="1">
-                <a:solidFill>
-                  <a:srgbClr val="1F3564"/>
-                </a:solidFill>
-                <a:latin typeface="Arial"/>
-              </a:rPr>
-              <a:t>표준 프로토콜을 열되 승인 게이트는 우회 불가</a:t>
+              <a:t>강점  표준 프로토콜을 열되 승인 게이트는 우회 불가</a:t>
             </a:r>
           </a:p>
         </p:txBody>
@@ -3513,16 +3971,7 @@
                 </a:solidFill>
                 <a:latin typeface="Arial"/>
               </a:rPr>
-              <a:t>강점  </a:t>
-            </a:r>
-            <a:r>
-              <a:rPr sz="800" b="1">
-                <a:solidFill>
-                  <a:srgbClr val="1F3564"/>
-                </a:solidFill>
-                <a:latin typeface="Arial"/>
-              </a:rPr>
-              <a:t>채점자가 LLM이 아니라 규칙 기반 검증기</a:t>
+              <a:t>강점  채점자가 LLM이 아니라 규칙 기반 검증기</a:t>
             </a:r>
           </a:p>
         </p:txBody>
@@ -3544,7 +3993,7 @@
           <a:noFill/>
         </p:spPr>
         <p:txBody>
-          <a:bodyPr wrap="square" lIns="0" rIns="0" tIns="0" bIns="0">
+          <a:bodyPr wrap="square" lIns="0" tIns="0" rIns="0" bIns="0">
             <a:spAutoFit/>
           </a:bodyPr>
           <a:lstStyle/>
@@ -3603,6 +4052,7 @@
           <a:lstStyle/>
           <a:p>
             <a:pPr algn="ctr"/>
+            <a:endParaRPr/>
           </a:p>
         </p:txBody>
       </p:sp>
@@ -3645,7 +4095,7 @@
           </a:fontRef>
         </p:style>
         <p:txBody>
-          <a:bodyPr rtlCol="0" anchor="ctr" wrap="square" lIns="28000" rIns="28000" tIns="14000" bIns="14000"/>
+          <a:bodyPr wrap="square" lIns="28000" tIns="14000" rIns="28000" bIns="14000" rtlCol="0" anchor="ctr"/>
           <a:lstStyle/>
           <a:p>
             <a:pPr algn="ctr"/>
@@ -3714,6 +4164,7 @@
           <a:lstStyle/>
           <a:p>
             <a:pPr algn="ctr"/>
+            <a:endParaRPr/>
           </a:p>
         </p:txBody>
       </p:sp>
@@ -3760,6 +4211,7 @@
           <a:lstStyle/>
           <a:p>
             <a:pPr algn="ctr"/>
+            <a:endParaRPr/>
           </a:p>
         </p:txBody>
       </p:sp>
@@ -3780,7 +4232,7 @@
           <a:noFill/>
         </p:spPr>
         <p:txBody>
-          <a:bodyPr wrap="square" lIns="0" rIns="0" tIns="0" bIns="0">
+          <a:bodyPr wrap="square" lIns="0" tIns="0" rIns="0" bIns="0">
             <a:spAutoFit/>
           </a:bodyPr>
           <a:lstStyle/>
@@ -3835,7 +4287,7 @@
           </a:fontRef>
         </p:style>
         <p:txBody>
-          <a:bodyPr rtlCol="0" anchor="ctr" wrap="square" lIns="28000" rIns="28000" tIns="14000" bIns="14000"/>
+          <a:bodyPr wrap="square" lIns="28000" tIns="14000" rIns="28000" bIns="14000" rtlCol="0" anchor="ctr"/>
           <a:lstStyle/>
           <a:p>
             <a:pPr algn="ctr"/>
@@ -3900,7 +4352,7 @@
           </a:fontRef>
         </p:style>
         <p:txBody>
-          <a:bodyPr rtlCol="0" anchor="ctr" wrap="square" lIns="28000" rIns="28000" tIns="14000" bIns="14000"/>
+          <a:bodyPr wrap="square" lIns="28000" tIns="14000" rIns="28000" bIns="14000" rtlCol="0" anchor="ctr"/>
           <a:lstStyle/>
           <a:p>
             <a:pPr algn="ctr"/>
@@ -3965,7 +4417,7 @@
           </a:fontRef>
         </p:style>
         <p:txBody>
-          <a:bodyPr rtlCol="0" anchor="ctr" wrap="square" lIns="28000" rIns="28000" tIns="14000" bIns="14000"/>
+          <a:bodyPr wrap="square" lIns="28000" tIns="14000" rIns="28000" bIns="14000" rtlCol="0" anchor="ctr"/>
           <a:lstStyle/>
           <a:p>
             <a:pPr algn="ctr"/>
@@ -4030,7 +4482,7 @@
           </a:fontRef>
         </p:style>
         <p:txBody>
-          <a:bodyPr rtlCol="0" anchor="ctr" wrap="square" lIns="28000" rIns="28000" tIns="14000" bIns="14000"/>
+          <a:bodyPr wrap="square" lIns="28000" tIns="14000" rIns="28000" bIns="14000" rtlCol="0" anchor="ctr"/>
           <a:lstStyle/>
           <a:p>
             <a:pPr algn="ctr"/>
@@ -4099,6 +4551,7 @@
           <a:lstStyle/>
           <a:p>
             <a:pPr algn="ctr"/>
+            <a:endParaRPr/>
           </a:p>
         </p:txBody>
       </p:sp>
@@ -4143,6 +4596,7 @@
           <a:lstStyle/>
           <a:p>
             <a:pPr algn="ctr"/>
+            <a:endParaRPr/>
           </a:p>
         </p:txBody>
       </p:sp>
@@ -4187,6 +4641,7 @@
           <a:lstStyle/>
           <a:p>
             <a:pPr algn="ctr"/>
+            <a:endParaRPr/>
           </a:p>
         </p:txBody>
       </p:sp>
@@ -4231,6 +4686,7 @@
           <a:lstStyle/>
           <a:p>
             <a:pPr algn="ctr"/>
+            <a:endParaRPr/>
           </a:p>
         </p:txBody>
       </p:sp>
@@ -4275,6 +4731,7 @@
           <a:lstStyle/>
           <a:p>
             <a:pPr algn="ctr"/>
+            <a:endParaRPr/>
           </a:p>
         </p:txBody>
       </p:sp>
@@ -4319,6 +4776,7 @@
           <a:lstStyle/>
           <a:p>
             <a:pPr algn="ctr"/>
+            <a:endParaRPr/>
           </a:p>
         </p:txBody>
       </p:sp>
@@ -4339,7 +4797,7 @@
           <a:noFill/>
         </p:spPr>
         <p:txBody>
-          <a:bodyPr wrap="square" lIns="0" rIns="0" tIns="0" bIns="0">
+          <a:bodyPr wrap="square" lIns="0" tIns="0" rIns="0" bIns="0">
             <a:spAutoFit/>
           </a:bodyPr>
           <a:lstStyle/>
@@ -4374,7 +4832,7 @@
           <a:noFill/>
         </p:spPr>
         <p:txBody>
-          <a:bodyPr wrap="square" lIns="0" rIns="0" tIns="0" bIns="0">
+          <a:bodyPr wrap="square" lIns="0" tIns="0" rIns="0" bIns="0">
             <a:spAutoFit/>
           </a:bodyPr>
           <a:lstStyle/>
@@ -4433,6 +4891,7 @@
           <a:lstStyle/>
           <a:p>
             <a:pPr algn="ctr"/>
+            <a:endParaRPr/>
           </a:p>
         </p:txBody>
       </p:sp>
@@ -4479,6 +4938,7 @@
           <a:lstStyle/>
           <a:p>
             <a:pPr algn="ctr"/>
+            <a:endParaRPr/>
           </a:p>
         </p:txBody>
       </p:sp>
@@ -4499,7 +4959,7 @@
           <a:noFill/>
         </p:spPr>
         <p:txBody>
-          <a:bodyPr wrap="square" lIns="0" rIns="0" tIns="0" bIns="0">
+          <a:bodyPr wrap="square" lIns="0" tIns="0" rIns="0" bIns="0">
             <a:spAutoFit/>
           </a:bodyPr>
           <a:lstStyle/>
@@ -4554,7 +5014,7 @@
           </a:fontRef>
         </p:style>
         <p:txBody>
-          <a:bodyPr rtlCol="0" anchor="ctr" wrap="square" lIns="36000" rIns="36000" tIns="18000" bIns="18000"/>
+          <a:bodyPr wrap="square" lIns="36000" tIns="18000" rIns="36000" bIns="18000" rtlCol="0" anchor="ctr"/>
           <a:lstStyle/>
           <a:p>
             <a:pPr algn="ctr"/>
@@ -4607,7 +5067,7 @@
           </a:fontRef>
         </p:style>
         <p:txBody>
-          <a:bodyPr rtlCol="0" anchor="ctr" wrap="square" lIns="36000" rIns="36000" tIns="18000" bIns="18000"/>
+          <a:bodyPr wrap="square" lIns="36000" tIns="18000" rIns="36000" bIns="18000" rtlCol="0" anchor="ctr"/>
           <a:lstStyle/>
           <a:p>
             <a:pPr algn="ctr"/>
@@ -4660,7 +5120,7 @@
           </a:fontRef>
         </p:style>
         <p:txBody>
-          <a:bodyPr rtlCol="0" anchor="ctr" wrap="square" lIns="36000" rIns="36000" tIns="18000" bIns="18000"/>
+          <a:bodyPr wrap="square" lIns="36000" tIns="18000" rIns="36000" bIns="18000" rtlCol="0" anchor="ctr"/>
           <a:lstStyle/>
           <a:p>
             <a:pPr algn="ctr"/>
@@ -4713,7 +5173,7 @@
           </a:fontRef>
         </p:style>
         <p:txBody>
-          <a:bodyPr rtlCol="0" anchor="ctr" wrap="square" lIns="36000" rIns="36000" tIns="18000" bIns="18000"/>
+          <a:bodyPr wrap="square" lIns="36000" tIns="18000" rIns="36000" bIns="18000" rtlCol="0" anchor="ctr"/>
           <a:lstStyle/>
           <a:p>
             <a:pPr algn="ctr"/>
@@ -4766,7 +5226,7 @@
           </a:fontRef>
         </p:style>
         <p:txBody>
-          <a:bodyPr rtlCol="0" anchor="ctr" wrap="square" lIns="36000" rIns="36000" tIns="18000" bIns="18000"/>
+          <a:bodyPr wrap="square" lIns="36000" tIns="18000" rIns="36000" bIns="18000" rtlCol="0" anchor="ctr"/>
           <a:lstStyle/>
           <a:p>
             <a:pPr algn="ctr"/>
@@ -4819,7 +5279,7 @@
           </a:fontRef>
         </p:style>
         <p:txBody>
-          <a:bodyPr rtlCol="0" anchor="ctr" wrap="square" lIns="36000" rIns="36000" tIns="18000" bIns="18000"/>
+          <a:bodyPr wrap="square" lIns="36000" tIns="18000" rIns="36000" bIns="18000" rtlCol="0" anchor="ctr"/>
           <a:lstStyle/>
           <a:p>
             <a:pPr algn="ctr"/>
@@ -4872,7 +5332,7 @@
           </a:fontRef>
         </p:style>
         <p:txBody>
-          <a:bodyPr rtlCol="0" anchor="ctr" wrap="square" lIns="36000" rIns="36000" tIns="18000" bIns="18000"/>
+          <a:bodyPr wrap="square" lIns="36000" tIns="18000" rIns="36000" bIns="18000" rtlCol="0" anchor="ctr"/>
           <a:lstStyle/>
           <a:p>
             <a:pPr algn="ctr"/>
@@ -4925,7 +5385,7 @@
           </a:fontRef>
         </p:style>
         <p:txBody>
-          <a:bodyPr rtlCol="0" anchor="ctr" wrap="square" lIns="36000" rIns="36000" tIns="18000" bIns="18000"/>
+          <a:bodyPr wrap="square" lIns="36000" tIns="18000" rIns="36000" bIns="18000" rtlCol="0" anchor="ctr"/>
           <a:lstStyle/>
           <a:p>
             <a:pPr algn="ctr"/>
@@ -4982,6 +5442,7 @@
           <a:lstStyle/>
           <a:p>
             <a:pPr algn="ctr"/>
+            <a:endParaRPr/>
           </a:p>
         </p:txBody>
       </p:sp>
@@ -5022,7 +5483,7 @@
           </a:fontRef>
         </p:style>
         <p:txBody>
-          <a:bodyPr rtlCol="0" anchor="ctr" wrap="square" lIns="36000" rIns="36000" tIns="18000" bIns="18000"/>
+          <a:bodyPr wrap="square" lIns="36000" tIns="18000" rIns="36000" bIns="18000" rtlCol="0" anchor="ctr"/>
           <a:lstStyle/>
           <a:p>
             <a:pPr algn="ctr"/>
@@ -5079,6 +5540,7 @@
           <a:lstStyle/>
           <a:p>
             <a:pPr algn="ctr"/>
+            <a:endParaRPr/>
           </a:p>
         </p:txBody>
       </p:sp>
@@ -5099,7 +5561,7 @@
           <a:noFill/>
         </p:spPr>
         <p:txBody>
-          <a:bodyPr wrap="square" lIns="0" rIns="0" tIns="0" bIns="0">
+          <a:bodyPr wrap="square" lIns="0" tIns="0" rIns="0" bIns="0">
             <a:spAutoFit/>
           </a:bodyPr>
           <a:lstStyle/>
@@ -5158,6 +5620,7 @@
           <a:lstStyle/>
           <a:p>
             <a:pPr algn="ctr"/>
+            <a:endParaRPr/>
           </a:p>
         </p:txBody>
       </p:sp>
@@ -5178,7 +5641,7 @@
           <a:noFill/>
         </p:spPr>
         <p:txBody>
-          <a:bodyPr wrap="square" lIns="0" rIns="0" tIns="0" bIns="0">
+          <a:bodyPr wrap="square" lIns="0" tIns="0" rIns="0" bIns="0">
             <a:spAutoFit/>
           </a:bodyPr>
           <a:lstStyle/>
@@ -5237,6 +5700,7 @@
           <a:lstStyle/>
           <a:p>
             <a:pPr algn="ctr"/>
+            <a:endParaRPr/>
           </a:p>
         </p:txBody>
       </p:sp>
@@ -5257,7 +5721,7 @@
           <a:noFill/>
         </p:spPr>
         <p:txBody>
-          <a:bodyPr wrap="square" lIns="0" rIns="0" tIns="0" bIns="0">
+          <a:bodyPr wrap="square" lIns="0" tIns="0" rIns="0" bIns="0">
             <a:spAutoFit/>
           </a:bodyPr>
           <a:lstStyle/>
@@ -5316,6 +5780,7 @@
           <a:lstStyle/>
           <a:p>
             <a:pPr algn="ctr"/>
+            <a:endParaRPr/>
           </a:p>
         </p:txBody>
       </p:sp>
@@ -5336,7 +5801,7 @@
           <a:noFill/>
         </p:spPr>
         <p:txBody>
-          <a:bodyPr wrap="square" lIns="0" rIns="0" tIns="0" bIns="0">
+          <a:bodyPr wrap="square" lIns="0" tIns="0" rIns="0" bIns="0">
             <a:spAutoFit/>
           </a:bodyPr>
           <a:lstStyle/>
@@ -5363,7 +5828,7 @@
         <p:spPr>
           <a:xfrm>
             <a:off x="400000" y="4040000"/>
-            <a:ext cx="4350000" cy="130000"/>
+            <a:ext cx="4350000" cy="200055"/>
           </a:xfrm>
           <a:prstGeom prst="rect">
             <a:avLst/>
@@ -5371,21 +5836,153 @@
           <a:noFill/>
         </p:spPr>
         <p:txBody>
-          <a:bodyPr wrap="square" lIns="0" rIns="0" tIns="0" bIns="0">
+          <a:bodyPr wrap="square" lIns="0" tIns="0" rIns="0" bIns="0">
             <a:spAutoFit/>
           </a:bodyPr>
           <a:lstStyle/>
           <a:p>
             <a:pPr algn="r"/>
-            <a:r>
-              <a:rPr sz="650" b="0">
+            <a:endParaRPr lang="en-US" sz="650" b="0" dirty="0">
+              <a:solidFill>
+                <a:srgbClr val="666666"/>
+              </a:solidFill>
+              <a:latin typeface="Arial"/>
+            </a:endParaRPr>
+          </a:p>
+          <a:p>
+            <a:pPr algn="r"/>
+            <a:r>
+              <a:rPr sz="650" b="0" dirty="0">
                 <a:solidFill>
                   <a:srgbClr val="666666"/>
                 </a:solidFill>
                 <a:latin typeface="Arial"/>
               </a:rPr>
-              <a:t>MCP 읽기 전용 조회 4종 — 변환 실행은 노출하지 않는다</a:t>
-            </a:r>
+              <a:t>MCP </a:t>
+            </a:r>
+            <a:r>
+              <a:rPr sz="650" b="0" dirty="0" err="1">
+                <a:solidFill>
+                  <a:srgbClr val="666666"/>
+                </a:solidFill>
+                <a:latin typeface="Arial"/>
+              </a:rPr>
+              <a:t>읽기</a:t>
+            </a:r>
+            <a:r>
+              <a:rPr sz="650" b="0" dirty="0">
+                <a:solidFill>
+                  <a:srgbClr val="666666"/>
+                </a:solidFill>
+                <a:latin typeface="Arial"/>
+              </a:rPr>
+              <a:t> </a:t>
+            </a:r>
+            <a:r>
+              <a:rPr sz="650" b="0" dirty="0" err="1">
+                <a:solidFill>
+                  <a:srgbClr val="666666"/>
+                </a:solidFill>
+                <a:latin typeface="Arial"/>
+              </a:rPr>
+              <a:t>전용</a:t>
+            </a:r>
+            <a:r>
+              <a:rPr sz="650" b="0" dirty="0">
+                <a:solidFill>
+                  <a:srgbClr val="666666"/>
+                </a:solidFill>
+                <a:latin typeface="Arial"/>
+              </a:rPr>
+              <a:t> </a:t>
+            </a:r>
+            <a:r>
+              <a:rPr sz="650" b="0" dirty="0" err="1">
+                <a:solidFill>
+                  <a:srgbClr val="666666"/>
+                </a:solidFill>
+                <a:latin typeface="Arial"/>
+              </a:rPr>
+              <a:t>조회</a:t>
+            </a:r>
+            <a:r>
+              <a:rPr sz="650" b="0" dirty="0">
+                <a:solidFill>
+                  <a:srgbClr val="666666"/>
+                </a:solidFill>
+                <a:latin typeface="Arial"/>
+              </a:rPr>
+              <a:t> 4종 — </a:t>
+            </a:r>
+            <a:r>
+              <a:rPr sz="650" b="0" dirty="0" err="1">
+                <a:solidFill>
+                  <a:srgbClr val="666666"/>
+                </a:solidFill>
+                <a:latin typeface="Arial"/>
+              </a:rPr>
+              <a:t>변환</a:t>
+            </a:r>
+            <a:r>
+              <a:rPr sz="650" b="0" dirty="0">
+                <a:solidFill>
+                  <a:srgbClr val="666666"/>
+                </a:solidFill>
+                <a:latin typeface="Arial"/>
+              </a:rPr>
+              <a:t> </a:t>
+            </a:r>
+            <a:r>
+              <a:rPr sz="650" b="0" dirty="0" err="1">
+                <a:solidFill>
+                  <a:srgbClr val="666666"/>
+                </a:solidFill>
+                <a:latin typeface="Arial"/>
+              </a:rPr>
+              <a:t>실행은</a:t>
+            </a:r>
+            <a:r>
+              <a:rPr sz="650" b="0" dirty="0">
+                <a:solidFill>
+                  <a:srgbClr val="666666"/>
+                </a:solidFill>
+                <a:latin typeface="Arial"/>
+              </a:rPr>
+              <a:t> </a:t>
+            </a:r>
+            <a:r>
+              <a:rPr sz="650" b="0" dirty="0" err="1">
+                <a:solidFill>
+                  <a:srgbClr val="666666"/>
+                </a:solidFill>
+                <a:latin typeface="Arial"/>
+              </a:rPr>
+              <a:t>노출하지</a:t>
+            </a:r>
+            <a:r>
+              <a:rPr sz="650" b="0" dirty="0">
+                <a:solidFill>
+                  <a:srgbClr val="666666"/>
+                </a:solidFill>
+                <a:latin typeface="Arial"/>
+              </a:rPr>
+              <a:t> </a:t>
+            </a:r>
+            <a:r>
+              <a:rPr sz="650" b="0" dirty="0" err="1">
+                <a:solidFill>
+                  <a:srgbClr val="666666"/>
+                </a:solidFill>
+                <a:latin typeface="Arial"/>
+              </a:rPr>
+              <a:t>않는다</a:t>
+            </a:r>
+            <a:endParaRPr sz="650" b="0" dirty="0">
+              <a:solidFill>
+                <a:srgbClr val="666666"/>
+              </a:solidFill>
+              <a:latin typeface="Arial"/>
+            </a:endParaRPr>
           </a:p>
         </p:txBody>
       </p:sp>
@@ -5739,26 +6336,393 @@
               <a:buNone/>
             </a:pPr>
             <a:r>
-              <a:rPr sz="950" b="1">
-                <a:solidFill>
-                  <a:srgbClr val="333333"/>
-                </a:solidFill>
-                <a:latin typeface="Arial"/>
-              </a:rPr>
-              <a:t>정적 검증 100% 통과 코드가 실행에서는 동작 불일치 — 검증 수단 자체가 부재</a:t>
-            </a:r>
-            <a:endParaRPr lang="en-US" sz="1000" dirty="0"/>
+              <a:rPr sz="950" b="1" dirty="0" err="1">
+                <a:solidFill>
+                  <a:schemeClr val="accent1">
+                    <a:lumMod val="40000"/>
+                    <a:lumOff val="60000"/>
+                  </a:schemeClr>
+                </a:solidFill>
+                <a:latin typeface="Arial"/>
+              </a:rPr>
+              <a:t>정적</a:t>
+            </a:r>
+            <a:r>
+              <a:rPr sz="950" b="1" dirty="0">
+                <a:solidFill>
+                  <a:schemeClr val="accent1">
+                    <a:lumMod val="40000"/>
+                    <a:lumOff val="60000"/>
+                  </a:schemeClr>
+                </a:solidFill>
+                <a:latin typeface="Arial"/>
+              </a:rPr>
+              <a:t> </a:t>
+            </a:r>
+            <a:r>
+              <a:rPr sz="950" b="1" dirty="0" err="1">
+                <a:solidFill>
+                  <a:schemeClr val="accent1">
+                    <a:lumMod val="40000"/>
+                    <a:lumOff val="60000"/>
+                  </a:schemeClr>
+                </a:solidFill>
+                <a:latin typeface="Arial"/>
+              </a:rPr>
+              <a:t>검증</a:t>
+            </a:r>
+            <a:r>
+              <a:rPr sz="950" b="1" dirty="0">
+                <a:solidFill>
+                  <a:schemeClr val="accent1">
+                    <a:lumMod val="40000"/>
+                    <a:lumOff val="60000"/>
+                  </a:schemeClr>
+                </a:solidFill>
+                <a:latin typeface="Arial"/>
+              </a:rPr>
+              <a:t> 100% </a:t>
+            </a:r>
+            <a:r>
+              <a:rPr sz="950" b="1" dirty="0" err="1">
+                <a:solidFill>
+                  <a:schemeClr val="accent1">
+                    <a:lumMod val="40000"/>
+                    <a:lumOff val="60000"/>
+                  </a:schemeClr>
+                </a:solidFill>
+                <a:latin typeface="Arial"/>
+              </a:rPr>
+              <a:t>통과</a:t>
+            </a:r>
+            <a:r>
+              <a:rPr sz="950" b="1" dirty="0">
+                <a:solidFill>
+                  <a:schemeClr val="accent1">
+                    <a:lumMod val="40000"/>
+                    <a:lumOff val="60000"/>
+                  </a:schemeClr>
+                </a:solidFill>
+                <a:latin typeface="Arial"/>
+              </a:rPr>
+              <a:t> </a:t>
+            </a:r>
+            <a:r>
+              <a:rPr sz="950" b="1" dirty="0" err="1">
+                <a:solidFill>
+                  <a:schemeClr val="accent1">
+                    <a:lumMod val="40000"/>
+                    <a:lumOff val="60000"/>
+                  </a:schemeClr>
+                </a:solidFill>
+                <a:latin typeface="Arial"/>
+              </a:rPr>
+              <a:t>코드가</a:t>
+            </a:r>
+            <a:r>
+              <a:rPr sz="950" b="1" dirty="0">
+                <a:solidFill>
+                  <a:schemeClr val="accent1">
+                    <a:lumMod val="40000"/>
+                    <a:lumOff val="60000"/>
+                  </a:schemeClr>
+                </a:solidFill>
+                <a:latin typeface="Arial"/>
+              </a:rPr>
+              <a:t> </a:t>
+            </a:r>
+            <a:r>
+              <a:rPr sz="950" b="1" dirty="0" err="1">
+                <a:solidFill>
+                  <a:schemeClr val="accent1">
+                    <a:lumMod val="40000"/>
+                    <a:lumOff val="60000"/>
+                  </a:schemeClr>
+                </a:solidFill>
+                <a:latin typeface="Arial"/>
+              </a:rPr>
+              <a:t>실행에서는</a:t>
+            </a:r>
+            <a:r>
+              <a:rPr sz="950" b="1" dirty="0">
+                <a:solidFill>
+                  <a:schemeClr val="accent1">
+                    <a:lumMod val="40000"/>
+                    <a:lumOff val="60000"/>
+                  </a:schemeClr>
+                </a:solidFill>
+                <a:latin typeface="Arial"/>
+              </a:rPr>
+              <a:t> </a:t>
+            </a:r>
+            <a:r>
+              <a:rPr sz="950" b="1" dirty="0" err="1">
+                <a:solidFill>
+                  <a:schemeClr val="accent1">
+                    <a:lumMod val="40000"/>
+                    <a:lumOff val="60000"/>
+                  </a:schemeClr>
+                </a:solidFill>
+                <a:latin typeface="Arial"/>
+              </a:rPr>
+              <a:t>동작</a:t>
+            </a:r>
+            <a:r>
+              <a:rPr sz="950" b="1" dirty="0">
+                <a:solidFill>
+                  <a:schemeClr val="accent1">
+                    <a:lumMod val="40000"/>
+                    <a:lumOff val="60000"/>
+                  </a:schemeClr>
+                </a:solidFill>
+                <a:latin typeface="Arial"/>
+              </a:rPr>
+              <a:t> </a:t>
+            </a:r>
+            <a:r>
+              <a:rPr sz="950" b="1" dirty="0" err="1">
+                <a:solidFill>
+                  <a:schemeClr val="accent1">
+                    <a:lumMod val="40000"/>
+                    <a:lumOff val="60000"/>
+                  </a:schemeClr>
+                </a:solidFill>
+                <a:latin typeface="Arial"/>
+              </a:rPr>
+              <a:t>불일치</a:t>
+            </a:r>
+            <a:r>
+              <a:rPr sz="950" b="1" dirty="0">
+                <a:solidFill>
+                  <a:schemeClr val="accent1">
+                    <a:lumMod val="40000"/>
+                    <a:lumOff val="60000"/>
+                  </a:schemeClr>
+                </a:solidFill>
+                <a:latin typeface="Arial"/>
+              </a:rPr>
+              <a:t> — </a:t>
+            </a:r>
+            <a:r>
+              <a:rPr sz="950" b="1" dirty="0" err="1">
+                <a:solidFill>
+                  <a:schemeClr val="accent1">
+                    <a:lumMod val="40000"/>
+                    <a:lumOff val="60000"/>
+                  </a:schemeClr>
+                </a:solidFill>
+                <a:latin typeface="Arial"/>
+              </a:rPr>
+              <a:t>검증</a:t>
+            </a:r>
+            <a:r>
+              <a:rPr sz="950" b="1" dirty="0">
+                <a:solidFill>
+                  <a:schemeClr val="accent1">
+                    <a:lumMod val="40000"/>
+                    <a:lumOff val="60000"/>
+                  </a:schemeClr>
+                </a:solidFill>
+                <a:latin typeface="Arial"/>
+              </a:rPr>
+              <a:t> </a:t>
+            </a:r>
+            <a:r>
+              <a:rPr sz="950" b="1" dirty="0" err="1">
+                <a:solidFill>
+                  <a:schemeClr val="accent1">
+                    <a:lumMod val="40000"/>
+                    <a:lumOff val="60000"/>
+                  </a:schemeClr>
+                </a:solidFill>
+                <a:latin typeface="Arial"/>
+              </a:rPr>
+              <a:t>수단</a:t>
+            </a:r>
+            <a:r>
+              <a:rPr sz="950" b="1" dirty="0">
+                <a:solidFill>
+                  <a:schemeClr val="accent1">
+                    <a:lumMod val="40000"/>
+                    <a:lumOff val="60000"/>
+                  </a:schemeClr>
+                </a:solidFill>
+                <a:latin typeface="Arial"/>
+              </a:rPr>
+              <a:t> </a:t>
+            </a:r>
+            <a:r>
+              <a:rPr sz="950" b="1" dirty="0" err="1">
+                <a:solidFill>
+                  <a:schemeClr val="accent1">
+                    <a:lumMod val="40000"/>
+                    <a:lumOff val="60000"/>
+                  </a:schemeClr>
+                </a:solidFill>
+                <a:latin typeface="Arial"/>
+              </a:rPr>
+              <a:t>자체가</a:t>
+            </a:r>
+            <a:r>
+              <a:rPr sz="950" b="1" dirty="0">
+                <a:solidFill>
+                  <a:schemeClr val="accent1">
+                    <a:lumMod val="40000"/>
+                    <a:lumOff val="60000"/>
+                  </a:schemeClr>
+                </a:solidFill>
+                <a:latin typeface="Arial"/>
+              </a:rPr>
+              <a:t> </a:t>
+            </a:r>
+            <a:r>
+              <a:rPr sz="950" b="1" dirty="0" err="1">
+                <a:solidFill>
+                  <a:schemeClr val="accent1">
+                    <a:lumMod val="40000"/>
+                    <a:lumOff val="60000"/>
+                  </a:schemeClr>
+                </a:solidFill>
+                <a:latin typeface="Arial"/>
+              </a:rPr>
+              <a:t>부재</a:t>
+            </a:r>
+            <a:endParaRPr lang="en-US" sz="1000" dirty="0">
+              <a:solidFill>
+                <a:schemeClr val="accent1">
+                  <a:lumMod val="40000"/>
+                  <a:lumOff val="60000"/>
+                </a:schemeClr>
+              </a:solidFill>
+            </a:endParaRPr>
           </a:p>
           <a:p>
             <a:pPr algn="l"/>
             <a:r>
-              <a:rPr sz="900" b="0">
+              <a:rPr sz="900" b="0" dirty="0" err="1">
                 <a:solidFill>
                   <a:srgbClr val="666666"/>
                 </a:solidFill>
                 <a:latin typeface="Arial"/>
               </a:rPr>
-              <a:t>AlphaTrans(FSE 2025) 동일 간극 보고 : 문법 96.40%  vs  동작 일치 25.14%</a:t>
+              <a:t>AlphaTrans</a:t>
+            </a:r>
+            <a:r>
+              <a:rPr sz="900" b="0" dirty="0">
+                <a:solidFill>
+                  <a:srgbClr val="666666"/>
+                </a:solidFill>
+                <a:latin typeface="Arial"/>
+              </a:rPr>
+              <a:t>(FSE 2025) </a:t>
+            </a:r>
+            <a:r>
+              <a:rPr sz="900" b="0" dirty="0" err="1">
+                <a:solidFill>
+                  <a:srgbClr val="666666"/>
+                </a:solidFill>
+                <a:latin typeface="Arial"/>
+              </a:rPr>
+              <a:t>동일</a:t>
+            </a:r>
+            <a:r>
+              <a:rPr sz="900" b="0" dirty="0">
+                <a:solidFill>
+                  <a:srgbClr val="666666"/>
+                </a:solidFill>
+                <a:latin typeface="Arial"/>
+              </a:rPr>
+              <a:t> </a:t>
+            </a:r>
+            <a:r>
+              <a:rPr sz="900" b="0" dirty="0" err="1">
+                <a:solidFill>
+                  <a:srgbClr val="666666"/>
+                </a:solidFill>
+                <a:latin typeface="Arial"/>
+              </a:rPr>
+              <a:t>간극</a:t>
+            </a:r>
+            <a:r>
+              <a:rPr sz="900" b="0" dirty="0">
+                <a:solidFill>
+                  <a:srgbClr val="666666"/>
+                </a:solidFill>
+                <a:latin typeface="Arial"/>
+              </a:rPr>
+              <a:t> </a:t>
+            </a:r>
+            <a:r>
+              <a:rPr sz="900" b="0" dirty="0" err="1">
+                <a:solidFill>
+                  <a:srgbClr val="666666"/>
+                </a:solidFill>
+                <a:latin typeface="Arial"/>
+              </a:rPr>
+              <a:t>보고</a:t>
+            </a:r>
+            <a:r>
+              <a:rPr sz="900" b="0" dirty="0">
+                <a:solidFill>
+                  <a:srgbClr val="666666"/>
+                </a:solidFill>
+                <a:latin typeface="Arial"/>
+              </a:rPr>
+              <a:t> : </a:t>
+            </a:r>
+            <a:r>
+              <a:rPr sz="900" b="0" dirty="0" err="1">
+                <a:solidFill>
+                  <a:srgbClr val="666666"/>
+                </a:solidFill>
+                <a:latin typeface="Arial"/>
+              </a:rPr>
+              <a:t>문법</a:t>
+            </a:r>
+            <a:r>
+              <a:rPr sz="900" b="0" dirty="0">
+                <a:solidFill>
+                  <a:srgbClr val="666666"/>
+                </a:solidFill>
+                <a:latin typeface="Arial"/>
+              </a:rPr>
+              <a:t> 96.40%  vs  </a:t>
+            </a:r>
+            <a:r>
+              <a:rPr sz="900" b="0" dirty="0" err="1">
+                <a:solidFill>
+                  <a:srgbClr val="666666"/>
+                </a:solidFill>
+                <a:latin typeface="Arial"/>
+              </a:rPr>
+              <a:t>동작</a:t>
+            </a:r>
+            <a:r>
+              <a:rPr sz="900" b="0" dirty="0">
+                <a:solidFill>
+                  <a:srgbClr val="666666"/>
+                </a:solidFill>
+                <a:latin typeface="Arial"/>
+              </a:rPr>
+              <a:t> </a:t>
+            </a:r>
+            <a:r>
+              <a:rPr sz="900" b="0" dirty="0" err="1">
+                <a:solidFill>
+                  <a:srgbClr val="666666"/>
+                </a:solidFill>
+                <a:latin typeface="Arial"/>
+              </a:rPr>
+              <a:t>일치</a:t>
+            </a:r>
+            <a:r>
+              <a:rPr sz="900" b="0" dirty="0">
+                <a:solidFill>
+                  <a:srgbClr val="666666"/>
+                </a:solidFill>
+                <a:latin typeface="Arial"/>
+              </a:rPr>
+              <a:t> 25.14%</a:t>
             </a:r>
           </a:p>
         </p:txBody>
@@ -6047,15 +7011,12 @@
           </a:p>
           <a:p>
             <a:pPr algn="l"/>
-            <a:r>
-              <a:rPr sz="300" b="0">
-                <a:solidFill>
-                  <a:srgbClr val="666666"/>
-                </a:solidFill>
-                <a:latin typeface="Arial"/>
-              </a:rPr>
-              <a:t/>
-            </a:r>
+            <a:endParaRPr sz="750" b="0">
+              <a:solidFill>
+                <a:srgbClr val="666666"/>
+              </a:solidFill>
+              <a:latin typeface="Arial"/>
+            </a:endParaRPr>
           </a:p>
           <a:p>
             <a:pPr algn="l"/>

--- a/docs/weekly/assets/최종발표장표.pptx
+++ b/docs/weekly/assets/최종발표장표.pptx
@@ -1656,12 +1656,15 @@
           </a:p>
           <a:p>
             <a:pPr algn="l"/>
-            <a:endParaRPr sz="900" b="0">
-              <a:solidFill>
-                <a:srgbClr val="666666"/>
-              </a:solidFill>
-              <a:latin typeface="Arial"/>
-            </a:endParaRPr>
+            <a:r>
+              <a:rPr sz="300" b="0">
+                <a:solidFill>
+                  <a:srgbClr val="666666"/>
+                </a:solidFill>
+                <a:latin typeface="Arial"/>
+              </a:rPr>
+              <a:t/>
+            </a:r>
           </a:p>
           <a:p>
             <a:pPr algn="l"/>
@@ -1728,12 +1731,15 @@
           </a:p>
           <a:p>
             <a:pPr algn="l"/>
-            <a:endParaRPr sz="900" b="0">
-              <a:solidFill>
-                <a:srgbClr val="666666"/>
-              </a:solidFill>
-              <a:latin typeface="Arial"/>
-            </a:endParaRPr>
+            <a:r>
+              <a:rPr sz="300" b="0">
+                <a:solidFill>
+                  <a:srgbClr val="666666"/>
+                </a:solidFill>
+                <a:latin typeface="Arial"/>
+              </a:rPr>
+              <a:t/>
+            </a:r>
           </a:p>
           <a:p>
             <a:pPr algn="l"/>
@@ -1871,13 +1877,21 @@
                 </a:solidFill>
                 <a:latin typeface="Arial"/>
               </a:rPr>
-              <a:t>폴더 지정 → 8단계 자동 진행 → 사람 승인 후에만 반영</a:t>
+              <a:t>폴더 지정 → 8단계 자동 진행 → 사람 승인 후에만 반영 (Human-in-the-Loop)</a:t>
             </a:r>
             <a:endParaRPr lang="en-US" sz="900" dirty="0"/>
           </a:p>
           <a:p>
             <a:pPr algn="l"/>
-            <a:endParaRPr lang="en-US" sz="900" dirty="0"/>
+            <a:r>
+              <a:rPr sz="300" b="0">
+                <a:solidFill>
+                  <a:srgbClr val="666666"/>
+                </a:solidFill>
+                <a:latin typeface="Arial"/>
+              </a:rPr>
+              <a:t/>
+            </a:r>
           </a:p>
           <a:p>
             <a:pPr algn="l"/>
@@ -1948,7 +1962,7 @@
                 </a:solidFill>
                 <a:latin typeface="Arial"/>
               </a:rPr>
-              <a:t>Human Approval  승인 전 저장 0건</a:t>
+              <a:t>Human-in-the-Loop  승인 게이트 — 승인 전 저장 0건</a:t>
             </a:r>
           </a:p>
           <a:p>
@@ -2099,7 +2113,7 @@
                 </a:solidFill>
                 <a:latin typeface="Arial"/>
               </a:rPr>
-              <a:t>원본 결함 탐지 탐지율</a:t>
+              <a:t>원본 결함 탐지율</a:t>
             </a:r>
           </a:p>
           <a:p>
@@ -2275,7 +2289,7 @@
                 </a:solidFill>
                 <a:latin typeface="Arial"/>
               </a:rPr>
-              <a:t>사람 수정 라인 비율  ·  리뷰 대상 87.3% 축소</a:t>
+              <a:t>사람 수정 라인 비율  ·  리뷰 대상 87.6% 축소</a:t>
             </a:r>
           </a:p>
           <a:p>
@@ -2287,7 +2301,7 @@
                 </a:solidFill>
                 <a:latin typeface="Arial"/>
               </a:rPr>
-              <a:t>생성 1,960줄 중 4줄 · AI 리뷰어 1차 기준 하한값</a:t>
+              <a:t>생성 2,007줄 중 4줄 · AI 리뷰어 1차 기준 하한값</a:t>
             </a:r>
           </a:p>
         </p:txBody>
@@ -2383,553 +2397,63 @@
               <a:buNone/>
             </a:pPr>
             <a:r>
-              <a:rPr sz="1050" b="1" dirty="0">
+              <a:rPr sz="1050" b="1">
                 <a:solidFill>
                   <a:srgbClr val="333333"/>
                 </a:solidFill>
                 <a:latin typeface="Arial"/>
               </a:rPr>
-              <a:t>“</a:t>
-            </a:r>
-            <a:r>
-              <a:rPr sz="1050" b="1" dirty="0" err="1">
-                <a:solidFill>
-                  <a:schemeClr val="accent1">
-                    <a:lumMod val="40000"/>
-                    <a:lumOff val="60000"/>
-                  </a:schemeClr>
-                </a:solidFill>
-                <a:latin typeface="Arial"/>
-              </a:rPr>
-              <a:t>규칙</a:t>
-            </a:r>
-            <a:r>
-              <a:rPr sz="1050" b="1" dirty="0">
-                <a:solidFill>
-                  <a:schemeClr val="accent1">
-                    <a:lumMod val="40000"/>
-                    <a:lumOff val="60000"/>
-                  </a:schemeClr>
-                </a:solidFill>
-                <a:latin typeface="Arial"/>
-              </a:rPr>
-              <a:t> </a:t>
-            </a:r>
-            <a:r>
-              <a:rPr sz="1050" b="1" dirty="0" err="1">
-                <a:solidFill>
-                  <a:schemeClr val="accent1">
-                    <a:lumMod val="40000"/>
-                    <a:lumOff val="60000"/>
-                  </a:schemeClr>
-                </a:solidFill>
-                <a:latin typeface="Arial"/>
-              </a:rPr>
-              <a:t>기반</a:t>
-            </a:r>
-            <a:r>
-              <a:rPr sz="1050" b="1" dirty="0">
-                <a:solidFill>
-                  <a:schemeClr val="accent1">
-                    <a:lumMod val="40000"/>
-                    <a:lumOff val="60000"/>
-                  </a:schemeClr>
-                </a:solidFill>
-                <a:latin typeface="Arial"/>
-              </a:rPr>
-              <a:t> </a:t>
-            </a:r>
-            <a:r>
-              <a:rPr sz="1050" b="1" dirty="0" err="1">
-                <a:solidFill>
-                  <a:schemeClr val="accent1">
-                    <a:lumMod val="40000"/>
-                    <a:lumOff val="60000"/>
-                  </a:schemeClr>
-                </a:solidFill>
-                <a:latin typeface="Arial"/>
-              </a:rPr>
-              <a:t>변환에</a:t>
-            </a:r>
-            <a:r>
-              <a:rPr sz="1050" b="1" dirty="0">
-                <a:solidFill>
-                  <a:schemeClr val="accent1">
-                    <a:lumMod val="40000"/>
-                    <a:lumOff val="60000"/>
-                  </a:schemeClr>
-                </a:solidFill>
-                <a:latin typeface="Arial"/>
-              </a:rPr>
-              <a:t> </a:t>
-            </a:r>
-            <a:r>
-              <a:rPr sz="1050" b="1" dirty="0" err="1">
-                <a:solidFill>
-                  <a:schemeClr val="accent1">
-                    <a:lumMod val="40000"/>
-                    <a:lumOff val="60000"/>
-                  </a:schemeClr>
-                </a:solidFill>
-                <a:latin typeface="Arial"/>
-              </a:rPr>
-              <a:t>LLM을</a:t>
-            </a:r>
-            <a:r>
-              <a:rPr sz="1050" b="1" dirty="0">
-                <a:solidFill>
-                  <a:schemeClr val="accent1">
-                    <a:lumMod val="40000"/>
-                    <a:lumOff val="60000"/>
-                  </a:schemeClr>
-                </a:solidFill>
-                <a:latin typeface="Arial"/>
-              </a:rPr>
-              <a:t> </a:t>
-            </a:r>
-            <a:r>
-              <a:rPr sz="1050" b="1" dirty="0" err="1">
-                <a:solidFill>
-                  <a:schemeClr val="accent1">
-                    <a:lumMod val="40000"/>
-                    <a:lumOff val="60000"/>
-                  </a:schemeClr>
-                </a:solidFill>
-                <a:latin typeface="Arial"/>
-              </a:rPr>
-              <a:t>쓰지</a:t>
-            </a:r>
-            <a:r>
-              <a:rPr sz="1050" b="1" dirty="0">
-                <a:solidFill>
-                  <a:schemeClr val="accent1">
-                    <a:lumMod val="40000"/>
-                    <a:lumOff val="60000"/>
-                  </a:schemeClr>
-                </a:solidFill>
-                <a:latin typeface="Arial"/>
-              </a:rPr>
-              <a:t> </a:t>
-            </a:r>
-            <a:r>
-              <a:rPr sz="1050" b="1" dirty="0" err="1">
-                <a:solidFill>
-                  <a:schemeClr val="accent1">
-                    <a:lumMod val="40000"/>
-                    <a:lumOff val="60000"/>
-                  </a:schemeClr>
-                </a:solidFill>
-                <a:latin typeface="Arial"/>
-              </a:rPr>
-              <a:t>않아</a:t>
-            </a:r>
-            <a:r>
-              <a:rPr sz="1050" b="1" dirty="0">
-                <a:solidFill>
-                  <a:schemeClr val="accent1">
-                    <a:lumMod val="40000"/>
-                    <a:lumOff val="60000"/>
-                  </a:schemeClr>
-                </a:solidFill>
-                <a:latin typeface="Arial"/>
-              </a:rPr>
-              <a:t> </a:t>
-            </a:r>
-            <a:r>
-              <a:rPr sz="1050" b="1" dirty="0" err="1">
-                <a:solidFill>
-                  <a:schemeClr val="accent1">
-                    <a:lumMod val="40000"/>
-                    <a:lumOff val="60000"/>
-                  </a:schemeClr>
-                </a:solidFill>
-                <a:latin typeface="Arial"/>
-              </a:rPr>
-              <a:t>호출</a:t>
-            </a:r>
-            <a:r>
-              <a:rPr sz="1050" b="1" dirty="0">
-                <a:solidFill>
-                  <a:schemeClr val="accent1">
-                    <a:lumMod val="40000"/>
-                    <a:lumOff val="60000"/>
-                  </a:schemeClr>
-                </a:solidFill>
-                <a:latin typeface="Arial"/>
-              </a:rPr>
-              <a:t> 46% </a:t>
-            </a:r>
-            <a:r>
-              <a:rPr sz="1050" b="1" dirty="0" err="1">
-                <a:solidFill>
-                  <a:schemeClr val="accent1">
-                    <a:lumMod val="40000"/>
-                    <a:lumOff val="60000"/>
-                  </a:schemeClr>
-                </a:solidFill>
-                <a:latin typeface="Arial"/>
-              </a:rPr>
-              <a:t>절감</a:t>
-            </a:r>
-            <a:r>
-              <a:rPr sz="1050" b="1" dirty="0">
-                <a:solidFill>
-                  <a:schemeClr val="accent1">
-                    <a:lumMod val="40000"/>
-                    <a:lumOff val="60000"/>
-                  </a:schemeClr>
-                </a:solidFill>
-                <a:latin typeface="Arial"/>
-              </a:rPr>
-              <a:t>,</a:t>
-            </a:r>
-            <a:endParaRPr lang="en-US" sz="950" dirty="0">
-              <a:solidFill>
-                <a:schemeClr val="accent1">
-                  <a:lumMod val="40000"/>
-                  <a:lumOff val="60000"/>
-                </a:schemeClr>
-              </a:solidFill>
-            </a:endParaRPr>
+              <a:t>“규칙 기반 변환에 LLM을 쓰지 않아 호출 46% 절감,</a:t>
+            </a:r>
+            <a:endParaRPr lang="en-US" sz="950" dirty="0"/>
           </a:p>
           <a:p>
             <a:pPr algn="l"/>
             <a:r>
-              <a:rPr sz="1050" b="1" dirty="0" err="1">
-                <a:solidFill>
-                  <a:schemeClr val="accent1">
-                    <a:lumMod val="40000"/>
-                    <a:lumOff val="60000"/>
-                  </a:schemeClr>
-                </a:solidFill>
-                <a:latin typeface="Arial"/>
-              </a:rPr>
-              <a:t>정적</a:t>
-            </a:r>
-            <a:r>
-              <a:rPr sz="1050" b="1" dirty="0">
-                <a:solidFill>
-                  <a:schemeClr val="accent1">
-                    <a:lumMod val="40000"/>
-                    <a:lumOff val="60000"/>
-                  </a:schemeClr>
-                </a:solidFill>
-                <a:latin typeface="Arial"/>
-              </a:rPr>
-              <a:t> </a:t>
-            </a:r>
-            <a:r>
-              <a:rPr sz="1050" b="1" dirty="0" err="1">
-                <a:solidFill>
-                  <a:schemeClr val="accent1">
-                    <a:lumMod val="40000"/>
-                    <a:lumOff val="60000"/>
-                  </a:schemeClr>
-                </a:solidFill>
-                <a:latin typeface="Arial"/>
-              </a:rPr>
-              <a:t>검증</a:t>
-            </a:r>
-            <a:r>
-              <a:rPr sz="1050" b="1" dirty="0">
-                <a:solidFill>
-                  <a:schemeClr val="accent1">
-                    <a:lumMod val="40000"/>
-                    <a:lumOff val="60000"/>
-                  </a:schemeClr>
-                </a:solidFill>
-                <a:latin typeface="Arial"/>
-              </a:rPr>
-              <a:t> </a:t>
-            </a:r>
-            <a:r>
-              <a:rPr sz="1050" b="1" dirty="0" err="1">
-                <a:solidFill>
-                  <a:schemeClr val="accent1">
-                    <a:lumMod val="40000"/>
-                    <a:lumOff val="60000"/>
-                  </a:schemeClr>
-                </a:solidFill>
-                <a:latin typeface="Arial"/>
-              </a:rPr>
-              <a:t>통과</a:t>
-            </a:r>
-            <a:r>
-              <a:rPr sz="1050" b="1" dirty="0">
-                <a:solidFill>
-                  <a:schemeClr val="accent1">
-                    <a:lumMod val="40000"/>
-                    <a:lumOff val="60000"/>
-                  </a:schemeClr>
-                </a:solidFill>
-                <a:latin typeface="Arial"/>
-              </a:rPr>
-              <a:t> </a:t>
-            </a:r>
-            <a:r>
-              <a:rPr sz="1050" b="1" dirty="0" err="1">
-                <a:solidFill>
-                  <a:schemeClr val="accent1">
-                    <a:lumMod val="40000"/>
-                    <a:lumOff val="60000"/>
-                  </a:schemeClr>
-                </a:solidFill>
-                <a:latin typeface="Arial"/>
-              </a:rPr>
-              <a:t>코드의</a:t>
-            </a:r>
-            <a:r>
-              <a:rPr sz="1050" b="1" dirty="0">
-                <a:solidFill>
-                  <a:schemeClr val="accent1">
-                    <a:lumMod val="40000"/>
-                    <a:lumOff val="60000"/>
-                  </a:schemeClr>
-                </a:solidFill>
-                <a:latin typeface="Arial"/>
-              </a:rPr>
-              <a:t> </a:t>
-            </a:r>
-            <a:r>
-              <a:rPr sz="1050" b="1" dirty="0" err="1">
-                <a:solidFill>
-                  <a:schemeClr val="accent1">
-                    <a:lumMod val="40000"/>
-                    <a:lumOff val="60000"/>
-                  </a:schemeClr>
-                </a:solidFill>
-                <a:latin typeface="Arial"/>
-              </a:rPr>
-              <a:t>실행</a:t>
-            </a:r>
-            <a:r>
-              <a:rPr sz="1050" b="1" dirty="0">
-                <a:solidFill>
-                  <a:schemeClr val="accent1">
-                    <a:lumMod val="40000"/>
-                    <a:lumOff val="60000"/>
-                  </a:schemeClr>
-                </a:solidFill>
-                <a:latin typeface="Arial"/>
-              </a:rPr>
-              <a:t> </a:t>
-            </a:r>
-            <a:r>
-              <a:rPr sz="1050" b="1" dirty="0" err="1">
-                <a:solidFill>
-                  <a:schemeClr val="accent1">
-                    <a:lumMod val="40000"/>
-                    <a:lumOff val="60000"/>
-                  </a:schemeClr>
-                </a:solidFill>
-                <a:latin typeface="Arial"/>
-              </a:rPr>
-              <a:t>일치율</a:t>
-            </a:r>
-            <a:r>
-              <a:rPr sz="1050" b="1" dirty="0">
-                <a:solidFill>
-                  <a:schemeClr val="accent1">
-                    <a:lumMod val="40000"/>
-                    <a:lumOff val="60000"/>
-                  </a:schemeClr>
-                </a:solidFill>
-                <a:latin typeface="Arial"/>
-              </a:rPr>
-              <a:t> 33%를</a:t>
+              <a:rPr sz="1050" b="1">
+                <a:solidFill>
+                  <a:srgbClr val="333333"/>
+                </a:solidFill>
+                <a:latin typeface="Arial"/>
+              </a:rPr>
+              <a:t>정적 검증 통과 코드의 실행 일치율 33%를</a:t>
             </a:r>
           </a:p>
           <a:p>
             <a:pPr algn="l"/>
             <a:r>
-              <a:rPr sz="1050" b="1" dirty="0" err="1">
-                <a:solidFill>
-                  <a:schemeClr val="accent1">
-                    <a:lumMod val="40000"/>
-                    <a:lumOff val="60000"/>
-                  </a:schemeClr>
-                </a:solidFill>
-                <a:latin typeface="Arial"/>
-              </a:rPr>
-              <a:t>직접</a:t>
-            </a:r>
-            <a:r>
-              <a:rPr sz="1050" b="1" dirty="0">
-                <a:solidFill>
-                  <a:schemeClr val="accent1">
-                    <a:lumMod val="40000"/>
-                    <a:lumOff val="60000"/>
-                  </a:schemeClr>
-                </a:solidFill>
-                <a:latin typeface="Arial"/>
-              </a:rPr>
-              <a:t> </a:t>
-            </a:r>
-            <a:r>
-              <a:rPr sz="1050" b="1" dirty="0" err="1">
-                <a:solidFill>
-                  <a:schemeClr val="accent1">
-                    <a:lumMod val="40000"/>
-                    <a:lumOff val="60000"/>
-                  </a:schemeClr>
-                </a:solidFill>
-                <a:latin typeface="Arial"/>
-              </a:rPr>
-              <a:t>측정해</a:t>
-            </a:r>
-            <a:r>
-              <a:rPr sz="1050" b="1" dirty="0">
-                <a:solidFill>
-                  <a:schemeClr val="accent1">
-                    <a:lumMod val="40000"/>
-                    <a:lumOff val="60000"/>
-                  </a:schemeClr>
-                </a:solidFill>
-                <a:latin typeface="Arial"/>
-              </a:rPr>
-              <a:t> 100%로 </a:t>
-            </a:r>
-            <a:r>
-              <a:rPr sz="1050" b="1" dirty="0" err="1">
-                <a:solidFill>
-                  <a:schemeClr val="accent1">
-                    <a:lumMod val="40000"/>
-                    <a:lumOff val="60000"/>
-                  </a:schemeClr>
-                </a:solidFill>
-                <a:latin typeface="Arial"/>
-              </a:rPr>
-              <a:t>개선</a:t>
-            </a:r>
-            <a:r>
-              <a:rPr sz="1050" b="1" dirty="0">
-                <a:solidFill>
-                  <a:schemeClr val="accent1">
-                    <a:lumMod val="40000"/>
-                    <a:lumOff val="60000"/>
-                  </a:schemeClr>
-                </a:solidFill>
-                <a:latin typeface="Arial"/>
-              </a:rPr>
-              <a:t>”</a:t>
+              <a:rPr sz="1050" b="1">
+                <a:solidFill>
+                  <a:srgbClr val="333333"/>
+                </a:solidFill>
+                <a:latin typeface="Arial"/>
+              </a:rPr>
+              <a:t>직접 측정해 100%로 개선”</a:t>
             </a:r>
           </a:p>
           <a:p>
             <a:pPr algn="l"/>
-            <a:endParaRPr sz="1050" b="1" dirty="0">
-              <a:solidFill>
-                <a:srgbClr val="333333"/>
-              </a:solidFill>
-              <a:latin typeface="Arial"/>
-            </a:endParaRPr>
+            <a:r>
+              <a:rPr sz="400" b="0">
+                <a:solidFill>
+                  <a:srgbClr val="666666"/>
+                </a:solidFill>
+                <a:latin typeface="Arial"/>
+              </a:rPr>
+              <a:t/>
+            </a:r>
           </a:p>
           <a:p>
             <a:pPr algn="l"/>
             <a:r>
-              <a:rPr sz="800" b="0" dirty="0" err="1">
+              <a:rPr sz="800" b="0">
                 <a:solidFill>
                   <a:srgbClr val="00A591"/>
                 </a:solidFill>
                 <a:latin typeface="Arial"/>
               </a:rPr>
-              <a:t>전환</a:t>
-            </a:r>
-            <a:r>
-              <a:rPr sz="800" b="0" dirty="0">
-                <a:solidFill>
-                  <a:srgbClr val="00A591"/>
-                </a:solidFill>
-                <a:latin typeface="Arial"/>
-              </a:rPr>
-              <a:t> </a:t>
-            </a:r>
-            <a:r>
-              <a:rPr sz="800" b="0" dirty="0" err="1">
-                <a:solidFill>
-                  <a:srgbClr val="00A591"/>
-                </a:solidFill>
-                <a:latin typeface="Arial"/>
-              </a:rPr>
-              <a:t>스코어카드</a:t>
-            </a:r>
-            <a:r>
-              <a:rPr sz="800" b="0" dirty="0">
-                <a:solidFill>
-                  <a:srgbClr val="00A591"/>
-                </a:solidFill>
-                <a:latin typeface="Arial"/>
-              </a:rPr>
-              <a:t> 80.9 / 100  ·  </a:t>
-            </a:r>
-            <a:r>
-              <a:rPr sz="800" b="0" dirty="0" err="1">
-                <a:solidFill>
-                  <a:srgbClr val="00A591"/>
-                </a:solidFill>
-                <a:latin typeface="Arial"/>
-              </a:rPr>
-              <a:t>측정</a:t>
-            </a:r>
-            <a:r>
-              <a:rPr sz="800" b="0" dirty="0">
-                <a:solidFill>
-                  <a:srgbClr val="00A591"/>
-                </a:solidFill>
-                <a:latin typeface="Arial"/>
-              </a:rPr>
-              <a:t> </a:t>
-            </a:r>
-            <a:r>
-              <a:rPr sz="800" b="0" dirty="0" err="1">
-                <a:solidFill>
-                  <a:srgbClr val="00A591"/>
-                </a:solidFill>
-                <a:latin typeface="Arial"/>
-              </a:rPr>
-              <a:t>범위</a:t>
-            </a:r>
-            <a:r>
-              <a:rPr sz="800" b="0" dirty="0">
-                <a:solidFill>
-                  <a:srgbClr val="00A591"/>
-                </a:solidFill>
-                <a:latin typeface="Arial"/>
-              </a:rPr>
-              <a:t> </a:t>
-            </a:r>
-            <a:r>
-              <a:rPr sz="800" b="0" dirty="0" err="1">
-                <a:solidFill>
-                  <a:srgbClr val="00A591"/>
-                </a:solidFill>
-                <a:latin typeface="Arial"/>
-              </a:rPr>
-              <a:t>확대로</a:t>
-            </a:r>
-            <a:r>
-              <a:rPr sz="800" b="0" dirty="0">
-                <a:solidFill>
-                  <a:srgbClr val="00A591"/>
-                </a:solidFill>
-                <a:latin typeface="Arial"/>
-              </a:rPr>
-              <a:t> 88.2에서 </a:t>
-            </a:r>
-            <a:r>
-              <a:rPr sz="800" b="0" dirty="0" err="1">
-                <a:solidFill>
-                  <a:srgbClr val="00A591"/>
-                </a:solidFill>
-                <a:latin typeface="Arial"/>
-              </a:rPr>
-              <a:t>하향</a:t>
-            </a:r>
-            <a:endParaRPr sz="800" b="0" dirty="0">
-              <a:solidFill>
-                <a:srgbClr val="00A591"/>
-              </a:solidFill>
-              <a:latin typeface="Arial"/>
-            </a:endParaRPr>
+              <a:t>전환 스코어카드 80.9 / 100  ·  측정 범위 확대로 88.2에서 하향</a:t>
+            </a:r>
           </a:p>
         </p:txBody>
       </p:sp>
@@ -3235,11 +2759,14 @@
           <a:ln/>
         </p:spPr>
         <p:txBody>
-          <a:bodyPr wrap="square" lIns="0" tIns="0" rIns="0" bIns="0" rtlCol="0" anchor="ctr"/>
-          <a:lstStyle/>
-          <a:p>
-            <a:r>
-              <a:rPr lang="ko-KR" altLang="en-US" sz="1000" b="1" dirty="0">
+          <a:bodyPr wrap="square" lIns="0" tIns="0" rIns="0" bIns="0" rtlCol="0" anchor="ctr">
+            <a:normAutofit/>
+          </a:bodyPr>
+          <a:lstStyle/>
+          <a:p>
+            <a:pPr algn="l"/>
+            <a:br>
+              <a:rPr lang="en-US" altLang="ko-KR" sz="1000" b="1" dirty="0">
                 <a:solidFill>
                   <a:srgbClr val="1A365D"/>
                 </a:solidFill>
@@ -3247,30 +2774,29 @@
                 <a:ea typeface="Arial" pitchFamily="34" charset="-122"/>
                 <a:cs typeface="Arial" pitchFamily="34" charset="-120"/>
               </a:rPr>
-              <a:t>기술 아키텍처 고려 사항 </a:t>
-            </a:r>
-            <a:br>
-              <a:rPr lang="en-US" altLang="ko-KR" sz="1000" b="1" dirty="0">
-                <a:solidFill>
-                  <a:srgbClr val="1A365D"/>
-                </a:solidFill>
-                <a:latin typeface="Arial" pitchFamily="34" charset="0"/>
-                <a:ea typeface="Arial" pitchFamily="34" charset="-122"/>
-                <a:cs typeface="Arial" pitchFamily="34" charset="-120"/>
-              </a:rPr>
             </a:br>
             <a:r>
-              <a:rPr lang="ko-KR" altLang="en-US" sz="800" dirty="0">
+              <a:rPr sz="900" b="1">
+                <a:solidFill>
+                  <a:srgbClr val="333333"/>
+                </a:solidFill>
+                <a:latin typeface="Arial"/>
+              </a:rPr>
+              <a:t>1,416회 반복되는 작업이다 — 매번 다른 경로로 가면 리뷰도 재현도 불가능하다.</a:t>
+            </a:r>
+            <a:endParaRPr lang="en-US" sz="1000" dirty="0"/>
+          </a:p>
+          <a:p>
+            <a:pPr algn="l"/>
+            <a:r>
+              <a:rPr sz="850" b="0">
                 <a:solidFill>
                   <a:srgbClr val="666666"/>
                 </a:solidFill>
-                <a:latin typeface="Arial" pitchFamily="34" charset="0"/>
-                <a:ea typeface="Arial" pitchFamily="34" charset="-122"/>
-                <a:cs typeface="Arial" pitchFamily="34" charset="-120"/>
-              </a:rPr>
-              <a:t>아키텍처 구성에 대한 핵심 결정 사항을 중심으로 설명하세요 </a:t>
-            </a:r>
-            <a:endParaRPr lang="en-US" sz="1000" dirty="0"/>
+                <a:latin typeface="Arial"/>
+              </a:rPr>
+              <a:t>그래서 모델이 도구를 고르지 않는다. 계획을 먼저 파일로 확정하고, 그 계획이 도구 호출을 지휘한다.</a:t>
+            </a:r>
           </a:p>
         </p:txBody>
       </p:sp>
@@ -3491,7 +3017,7 @@
                 </a:solidFill>
                 <a:latin typeface="Arial"/>
               </a:rPr>
-              <a:t>계획을 파일로 확정 → 이후 단계는 지목된 대상만 호출. Send() 병렬 분배 병렬</a:t>
+              <a:t>계획을 파일로 확정 → 이후 단계는 지목된 대상만 호출, Send()로 병렬 분배</a:t>
             </a:r>
           </a:p>
           <a:p>
@@ -3503,7 +3029,16 @@
                 </a:solidFill>
                 <a:latin typeface="Arial"/>
               </a:rPr>
-              <a:t>강점  계획이 도구 호출을 지휘 — 재현·리뷰·재실행 가능</a:t>
+              <a:t>강점  </a:t>
+            </a:r>
+            <a:r>
+              <a:rPr sz="800" b="1">
+                <a:solidFill>
+                  <a:srgbClr val="1F3564"/>
+                </a:solidFill>
+                <a:latin typeface="Arial"/>
+              </a:rPr>
+              <a:t>계획이 도구 호출을 지휘 — 재현·리뷰·재실행 가능</a:t>
             </a:r>
           </a:p>
         </p:txBody>
@@ -3737,7 +3272,16 @@
                 </a:solidFill>
                 <a:latin typeface="Arial"/>
               </a:rPr>
-              <a:t>강점  표준 프로토콜을 열되 승인 게이트는 우회 불가</a:t>
+              <a:t>강점  </a:t>
+            </a:r>
+            <a:r>
+              <a:rPr sz="800" b="1">
+                <a:solidFill>
+                  <a:srgbClr val="1F3564"/>
+                </a:solidFill>
+                <a:latin typeface="Arial"/>
+              </a:rPr>
+              <a:t>표준 프로토콜을 열되 승인 게이트는 우회 불가</a:t>
             </a:r>
           </a:p>
         </p:txBody>
@@ -3971,7 +3515,16 @@
                 </a:solidFill>
                 <a:latin typeface="Arial"/>
               </a:rPr>
-              <a:t>강점  채점자가 LLM이 아니라 규칙 기반 검증기</a:t>
+              <a:t>강점  </a:t>
+            </a:r>
+            <a:r>
+              <a:rPr sz="800" b="1">
+                <a:solidFill>
+                  <a:srgbClr val="1F3564"/>
+                </a:solidFill>
+                <a:latin typeface="Arial"/>
+              </a:rPr>
+              <a:t>채점자가 LLM이 아니라 규칙 기반 검증기</a:t>
             </a:r>
           </a:p>
         </p:txBody>
@@ -3993,7 +3546,7 @@
           <a:noFill/>
         </p:spPr>
         <p:txBody>
-          <a:bodyPr wrap="square" lIns="0" tIns="0" rIns="0" bIns="0">
+          <a:bodyPr wrap="square" lIns="0" rIns="0" tIns="0" bIns="0">
             <a:spAutoFit/>
           </a:bodyPr>
           <a:lstStyle/>
@@ -4052,7 +3605,6 @@
           <a:lstStyle/>
           <a:p>
             <a:pPr algn="ctr"/>
-            <a:endParaRPr/>
           </a:p>
         </p:txBody>
       </p:sp>
@@ -4095,7 +3647,7 @@
           </a:fontRef>
         </p:style>
         <p:txBody>
-          <a:bodyPr wrap="square" lIns="28000" tIns="14000" rIns="28000" bIns="14000" rtlCol="0" anchor="ctr"/>
+          <a:bodyPr rtlCol="0" anchor="ctr" wrap="square" lIns="28000" rIns="28000" tIns="14000" bIns="14000"/>
           <a:lstStyle/>
           <a:p>
             <a:pPr algn="ctr"/>
@@ -4164,7 +3716,6 @@
           <a:lstStyle/>
           <a:p>
             <a:pPr algn="ctr"/>
-            <a:endParaRPr/>
           </a:p>
         </p:txBody>
       </p:sp>
@@ -4211,7 +3762,6 @@
           <a:lstStyle/>
           <a:p>
             <a:pPr algn="ctr"/>
-            <a:endParaRPr/>
           </a:p>
         </p:txBody>
       </p:sp>
@@ -4232,7 +3782,7 @@
           <a:noFill/>
         </p:spPr>
         <p:txBody>
-          <a:bodyPr wrap="square" lIns="0" tIns="0" rIns="0" bIns="0">
+          <a:bodyPr wrap="square" lIns="0" rIns="0" tIns="0" bIns="0">
             <a:spAutoFit/>
           </a:bodyPr>
           <a:lstStyle/>
@@ -4287,7 +3837,7 @@
           </a:fontRef>
         </p:style>
         <p:txBody>
-          <a:bodyPr wrap="square" lIns="28000" tIns="14000" rIns="28000" bIns="14000" rtlCol="0" anchor="ctr"/>
+          <a:bodyPr rtlCol="0" anchor="ctr" wrap="square" lIns="28000" rIns="28000" tIns="14000" bIns="14000"/>
           <a:lstStyle/>
           <a:p>
             <a:pPr algn="ctr"/>
@@ -4352,7 +3902,7 @@
           </a:fontRef>
         </p:style>
         <p:txBody>
-          <a:bodyPr wrap="square" lIns="28000" tIns="14000" rIns="28000" bIns="14000" rtlCol="0" anchor="ctr"/>
+          <a:bodyPr rtlCol="0" anchor="ctr" wrap="square" lIns="28000" rIns="28000" tIns="14000" bIns="14000"/>
           <a:lstStyle/>
           <a:p>
             <a:pPr algn="ctr"/>
@@ -4417,7 +3967,7 @@
           </a:fontRef>
         </p:style>
         <p:txBody>
-          <a:bodyPr wrap="square" lIns="28000" tIns="14000" rIns="28000" bIns="14000" rtlCol="0" anchor="ctr"/>
+          <a:bodyPr rtlCol="0" anchor="ctr" wrap="square" lIns="28000" rIns="28000" tIns="14000" bIns="14000"/>
           <a:lstStyle/>
           <a:p>
             <a:pPr algn="ctr"/>
@@ -4482,7 +4032,7 @@
           </a:fontRef>
         </p:style>
         <p:txBody>
-          <a:bodyPr wrap="square" lIns="28000" tIns="14000" rIns="28000" bIns="14000" rtlCol="0" anchor="ctr"/>
+          <a:bodyPr rtlCol="0" anchor="ctr" wrap="square" lIns="28000" rIns="28000" tIns="14000" bIns="14000"/>
           <a:lstStyle/>
           <a:p>
             <a:pPr algn="ctr"/>
@@ -4551,7 +4101,6 @@
           <a:lstStyle/>
           <a:p>
             <a:pPr algn="ctr"/>
-            <a:endParaRPr/>
           </a:p>
         </p:txBody>
       </p:sp>
@@ -4596,7 +4145,6 @@
           <a:lstStyle/>
           <a:p>
             <a:pPr algn="ctr"/>
-            <a:endParaRPr/>
           </a:p>
         </p:txBody>
       </p:sp>
@@ -4641,7 +4189,6 @@
           <a:lstStyle/>
           <a:p>
             <a:pPr algn="ctr"/>
-            <a:endParaRPr/>
           </a:p>
         </p:txBody>
       </p:sp>
@@ -4686,7 +4233,6 @@
           <a:lstStyle/>
           <a:p>
             <a:pPr algn="ctr"/>
-            <a:endParaRPr/>
           </a:p>
         </p:txBody>
       </p:sp>
@@ -4731,7 +4277,6 @@
           <a:lstStyle/>
           <a:p>
             <a:pPr algn="ctr"/>
-            <a:endParaRPr/>
           </a:p>
         </p:txBody>
       </p:sp>
@@ -4776,7 +4321,6 @@
           <a:lstStyle/>
           <a:p>
             <a:pPr algn="ctr"/>
-            <a:endParaRPr/>
           </a:p>
         </p:txBody>
       </p:sp>
@@ -4797,7 +4341,7 @@
           <a:noFill/>
         </p:spPr>
         <p:txBody>
-          <a:bodyPr wrap="square" lIns="0" tIns="0" rIns="0" bIns="0">
+          <a:bodyPr wrap="square" lIns="0" rIns="0" tIns="0" bIns="0">
             <a:spAutoFit/>
           </a:bodyPr>
           <a:lstStyle/>
@@ -4832,7 +4376,7 @@
           <a:noFill/>
         </p:spPr>
         <p:txBody>
-          <a:bodyPr wrap="square" lIns="0" tIns="0" rIns="0" bIns="0">
+          <a:bodyPr wrap="square" lIns="0" rIns="0" tIns="0" bIns="0">
             <a:spAutoFit/>
           </a:bodyPr>
           <a:lstStyle/>
@@ -4891,7 +4435,6 @@
           <a:lstStyle/>
           <a:p>
             <a:pPr algn="ctr"/>
-            <a:endParaRPr/>
           </a:p>
         </p:txBody>
       </p:sp>
@@ -4938,7 +4481,6 @@
           <a:lstStyle/>
           <a:p>
             <a:pPr algn="ctr"/>
-            <a:endParaRPr/>
           </a:p>
         </p:txBody>
       </p:sp>
@@ -4959,7 +4501,7 @@
           <a:noFill/>
         </p:spPr>
         <p:txBody>
-          <a:bodyPr wrap="square" lIns="0" tIns="0" rIns="0" bIns="0">
+          <a:bodyPr wrap="square" lIns="0" rIns="0" tIns="0" bIns="0">
             <a:spAutoFit/>
           </a:bodyPr>
           <a:lstStyle/>
@@ -5014,7 +4556,7 @@
           </a:fontRef>
         </p:style>
         <p:txBody>
-          <a:bodyPr wrap="square" lIns="36000" tIns="18000" rIns="36000" bIns="18000" rtlCol="0" anchor="ctr"/>
+          <a:bodyPr rtlCol="0" anchor="ctr" wrap="square" lIns="36000" rIns="36000" tIns="18000" bIns="18000"/>
           <a:lstStyle/>
           <a:p>
             <a:pPr algn="ctr"/>
@@ -5067,7 +4609,7 @@
           </a:fontRef>
         </p:style>
         <p:txBody>
-          <a:bodyPr wrap="square" lIns="36000" tIns="18000" rIns="36000" bIns="18000" rtlCol="0" anchor="ctr"/>
+          <a:bodyPr rtlCol="0" anchor="ctr" wrap="square" lIns="36000" rIns="36000" tIns="18000" bIns="18000"/>
           <a:lstStyle/>
           <a:p>
             <a:pPr algn="ctr"/>
@@ -5120,7 +4662,7 @@
           </a:fontRef>
         </p:style>
         <p:txBody>
-          <a:bodyPr wrap="square" lIns="36000" tIns="18000" rIns="36000" bIns="18000" rtlCol="0" anchor="ctr"/>
+          <a:bodyPr rtlCol="0" anchor="ctr" wrap="square" lIns="36000" rIns="36000" tIns="18000" bIns="18000"/>
           <a:lstStyle/>
           <a:p>
             <a:pPr algn="ctr"/>
@@ -5173,7 +4715,7 @@
           </a:fontRef>
         </p:style>
         <p:txBody>
-          <a:bodyPr wrap="square" lIns="36000" tIns="18000" rIns="36000" bIns="18000" rtlCol="0" anchor="ctr"/>
+          <a:bodyPr rtlCol="0" anchor="ctr" wrap="square" lIns="36000" rIns="36000" tIns="18000" bIns="18000"/>
           <a:lstStyle/>
           <a:p>
             <a:pPr algn="ctr"/>
@@ -5226,7 +4768,7 @@
           </a:fontRef>
         </p:style>
         <p:txBody>
-          <a:bodyPr wrap="square" lIns="36000" tIns="18000" rIns="36000" bIns="18000" rtlCol="0" anchor="ctr"/>
+          <a:bodyPr rtlCol="0" anchor="ctr" wrap="square" lIns="36000" rIns="36000" tIns="18000" bIns="18000"/>
           <a:lstStyle/>
           <a:p>
             <a:pPr algn="ctr"/>
@@ -5279,7 +4821,7 @@
           </a:fontRef>
         </p:style>
         <p:txBody>
-          <a:bodyPr wrap="square" lIns="36000" tIns="18000" rIns="36000" bIns="18000" rtlCol="0" anchor="ctr"/>
+          <a:bodyPr rtlCol="0" anchor="ctr" wrap="square" lIns="36000" rIns="36000" tIns="18000" bIns="18000"/>
           <a:lstStyle/>
           <a:p>
             <a:pPr algn="ctr"/>
@@ -5332,7 +4874,7 @@
           </a:fontRef>
         </p:style>
         <p:txBody>
-          <a:bodyPr wrap="square" lIns="36000" tIns="18000" rIns="36000" bIns="18000" rtlCol="0" anchor="ctr"/>
+          <a:bodyPr rtlCol="0" anchor="ctr" wrap="square" lIns="36000" rIns="36000" tIns="18000" bIns="18000"/>
           <a:lstStyle/>
           <a:p>
             <a:pPr algn="ctr"/>
@@ -5385,7 +4927,7 @@
           </a:fontRef>
         </p:style>
         <p:txBody>
-          <a:bodyPr wrap="square" lIns="36000" tIns="18000" rIns="36000" bIns="18000" rtlCol="0" anchor="ctr"/>
+          <a:bodyPr rtlCol="0" anchor="ctr" wrap="square" lIns="36000" rIns="36000" tIns="18000" bIns="18000"/>
           <a:lstStyle/>
           <a:p>
             <a:pPr algn="ctr"/>
@@ -5442,7 +4984,6 @@
           <a:lstStyle/>
           <a:p>
             <a:pPr algn="ctr"/>
-            <a:endParaRPr/>
           </a:p>
         </p:txBody>
       </p:sp>
@@ -5483,7 +5024,7 @@
           </a:fontRef>
         </p:style>
         <p:txBody>
-          <a:bodyPr wrap="square" lIns="36000" tIns="18000" rIns="36000" bIns="18000" rtlCol="0" anchor="ctr"/>
+          <a:bodyPr rtlCol="0" anchor="ctr" wrap="square" lIns="36000" rIns="36000" tIns="18000" bIns="18000"/>
           <a:lstStyle/>
           <a:p>
             <a:pPr algn="ctr"/>
@@ -5540,7 +5081,6 @@
           <a:lstStyle/>
           <a:p>
             <a:pPr algn="ctr"/>
-            <a:endParaRPr/>
           </a:p>
         </p:txBody>
       </p:sp>
@@ -5561,7 +5101,7 @@
           <a:noFill/>
         </p:spPr>
         <p:txBody>
-          <a:bodyPr wrap="square" lIns="0" tIns="0" rIns="0" bIns="0">
+          <a:bodyPr wrap="square" lIns="0" rIns="0" tIns="0" bIns="0">
             <a:spAutoFit/>
           </a:bodyPr>
           <a:lstStyle/>
@@ -5620,7 +5160,6 @@
           <a:lstStyle/>
           <a:p>
             <a:pPr algn="ctr"/>
-            <a:endParaRPr/>
           </a:p>
         </p:txBody>
       </p:sp>
@@ -5641,7 +5180,7 @@
           <a:noFill/>
         </p:spPr>
         <p:txBody>
-          <a:bodyPr wrap="square" lIns="0" tIns="0" rIns="0" bIns="0">
+          <a:bodyPr wrap="square" lIns="0" rIns="0" tIns="0" bIns="0">
             <a:spAutoFit/>
           </a:bodyPr>
           <a:lstStyle/>
@@ -5700,7 +5239,6 @@
           <a:lstStyle/>
           <a:p>
             <a:pPr algn="ctr"/>
-            <a:endParaRPr/>
           </a:p>
         </p:txBody>
       </p:sp>
@@ -5721,7 +5259,7 @@
           <a:noFill/>
         </p:spPr>
         <p:txBody>
-          <a:bodyPr wrap="square" lIns="0" tIns="0" rIns="0" bIns="0">
+          <a:bodyPr wrap="square" lIns="0" rIns="0" tIns="0" bIns="0">
             <a:spAutoFit/>
           </a:bodyPr>
           <a:lstStyle/>
@@ -5780,7 +5318,6 @@
           <a:lstStyle/>
           <a:p>
             <a:pPr algn="ctr"/>
-            <a:endParaRPr/>
           </a:p>
         </p:txBody>
       </p:sp>
@@ -5801,7 +5338,7 @@
           <a:noFill/>
         </p:spPr>
         <p:txBody>
-          <a:bodyPr wrap="square" lIns="0" tIns="0" rIns="0" bIns="0">
+          <a:bodyPr wrap="square" lIns="0" rIns="0" tIns="0" bIns="0">
             <a:spAutoFit/>
           </a:bodyPr>
           <a:lstStyle/>
@@ -5828,7 +5365,7 @@
         <p:spPr>
           <a:xfrm>
             <a:off x="400000" y="4040000"/>
-            <a:ext cx="4350000" cy="200055"/>
+            <a:ext cx="4350000" cy="130000"/>
           </a:xfrm>
           <a:prstGeom prst="rect">
             <a:avLst/>
@@ -5836,153 +5373,21 @@
           <a:noFill/>
         </p:spPr>
         <p:txBody>
-          <a:bodyPr wrap="square" lIns="0" tIns="0" rIns="0" bIns="0">
+          <a:bodyPr wrap="square" lIns="0" rIns="0" tIns="0" bIns="0">
             <a:spAutoFit/>
           </a:bodyPr>
           <a:lstStyle/>
           <a:p>
             <a:pPr algn="r"/>
-            <a:endParaRPr lang="en-US" sz="650" b="0" dirty="0">
-              <a:solidFill>
-                <a:srgbClr val="666666"/>
-              </a:solidFill>
-              <a:latin typeface="Arial"/>
-            </a:endParaRPr>
-          </a:p>
-          <a:p>
-            <a:pPr algn="r"/>
-            <a:r>
-              <a:rPr sz="650" b="0" dirty="0">
+            <a:r>
+              <a:rPr sz="650" b="0">
                 <a:solidFill>
                   <a:srgbClr val="666666"/>
                 </a:solidFill>
                 <a:latin typeface="Arial"/>
               </a:rPr>
-              <a:t>MCP </a:t>
-            </a:r>
-            <a:r>
-              <a:rPr sz="650" b="0" dirty="0" err="1">
-                <a:solidFill>
-                  <a:srgbClr val="666666"/>
-                </a:solidFill>
-                <a:latin typeface="Arial"/>
-              </a:rPr>
-              <a:t>읽기</a:t>
-            </a:r>
-            <a:r>
-              <a:rPr sz="650" b="0" dirty="0">
-                <a:solidFill>
-                  <a:srgbClr val="666666"/>
-                </a:solidFill>
-                <a:latin typeface="Arial"/>
-              </a:rPr>
-              <a:t> </a:t>
-            </a:r>
-            <a:r>
-              <a:rPr sz="650" b="0" dirty="0" err="1">
-                <a:solidFill>
-                  <a:srgbClr val="666666"/>
-                </a:solidFill>
-                <a:latin typeface="Arial"/>
-              </a:rPr>
-              <a:t>전용</a:t>
-            </a:r>
-            <a:r>
-              <a:rPr sz="650" b="0" dirty="0">
-                <a:solidFill>
-                  <a:srgbClr val="666666"/>
-                </a:solidFill>
-                <a:latin typeface="Arial"/>
-              </a:rPr>
-              <a:t> </a:t>
-            </a:r>
-            <a:r>
-              <a:rPr sz="650" b="0" dirty="0" err="1">
-                <a:solidFill>
-                  <a:srgbClr val="666666"/>
-                </a:solidFill>
-                <a:latin typeface="Arial"/>
-              </a:rPr>
-              <a:t>조회</a:t>
-            </a:r>
-            <a:r>
-              <a:rPr sz="650" b="0" dirty="0">
-                <a:solidFill>
-                  <a:srgbClr val="666666"/>
-                </a:solidFill>
-                <a:latin typeface="Arial"/>
-              </a:rPr>
-              <a:t> 4종 — </a:t>
-            </a:r>
-            <a:r>
-              <a:rPr sz="650" b="0" dirty="0" err="1">
-                <a:solidFill>
-                  <a:srgbClr val="666666"/>
-                </a:solidFill>
-                <a:latin typeface="Arial"/>
-              </a:rPr>
-              <a:t>변환</a:t>
-            </a:r>
-            <a:r>
-              <a:rPr sz="650" b="0" dirty="0">
-                <a:solidFill>
-                  <a:srgbClr val="666666"/>
-                </a:solidFill>
-                <a:latin typeface="Arial"/>
-              </a:rPr>
-              <a:t> </a:t>
-            </a:r>
-            <a:r>
-              <a:rPr sz="650" b="0" dirty="0" err="1">
-                <a:solidFill>
-                  <a:srgbClr val="666666"/>
-                </a:solidFill>
-                <a:latin typeface="Arial"/>
-              </a:rPr>
-              <a:t>실행은</a:t>
-            </a:r>
-            <a:r>
-              <a:rPr sz="650" b="0" dirty="0">
-                <a:solidFill>
-                  <a:srgbClr val="666666"/>
-                </a:solidFill>
-                <a:latin typeface="Arial"/>
-              </a:rPr>
-              <a:t> </a:t>
-            </a:r>
-            <a:r>
-              <a:rPr sz="650" b="0" dirty="0" err="1">
-                <a:solidFill>
-                  <a:srgbClr val="666666"/>
-                </a:solidFill>
-                <a:latin typeface="Arial"/>
-              </a:rPr>
-              <a:t>노출하지</a:t>
-            </a:r>
-            <a:r>
-              <a:rPr sz="650" b="0" dirty="0">
-                <a:solidFill>
-                  <a:srgbClr val="666666"/>
-                </a:solidFill>
-                <a:latin typeface="Arial"/>
-              </a:rPr>
-              <a:t> </a:t>
-            </a:r>
-            <a:r>
-              <a:rPr sz="650" b="0" dirty="0" err="1">
-                <a:solidFill>
-                  <a:srgbClr val="666666"/>
-                </a:solidFill>
-                <a:latin typeface="Arial"/>
-              </a:rPr>
-              <a:t>않는다</a:t>
-            </a:r>
-            <a:endParaRPr sz="650" b="0" dirty="0">
-              <a:solidFill>
-                <a:srgbClr val="666666"/>
-              </a:solidFill>
-              <a:latin typeface="Arial"/>
-            </a:endParaRPr>
+              <a:t>MCP 읽기 전용 조회 4종 — 변환 실행은 노출하지 않는다</a:t>
+            </a:r>
           </a:p>
         </p:txBody>
       </p:sp>
@@ -6336,393 +5741,26 @@
               <a:buNone/>
             </a:pPr>
             <a:r>
-              <a:rPr sz="950" b="1" dirty="0" err="1">
-                <a:solidFill>
-                  <a:schemeClr val="accent1">
-                    <a:lumMod val="40000"/>
-                    <a:lumOff val="60000"/>
-                  </a:schemeClr>
-                </a:solidFill>
-                <a:latin typeface="Arial"/>
-              </a:rPr>
-              <a:t>정적</a:t>
-            </a:r>
-            <a:r>
-              <a:rPr sz="950" b="1" dirty="0">
-                <a:solidFill>
-                  <a:schemeClr val="accent1">
-                    <a:lumMod val="40000"/>
-                    <a:lumOff val="60000"/>
-                  </a:schemeClr>
-                </a:solidFill>
-                <a:latin typeface="Arial"/>
-              </a:rPr>
-              <a:t> </a:t>
-            </a:r>
-            <a:r>
-              <a:rPr sz="950" b="1" dirty="0" err="1">
-                <a:solidFill>
-                  <a:schemeClr val="accent1">
-                    <a:lumMod val="40000"/>
-                    <a:lumOff val="60000"/>
-                  </a:schemeClr>
-                </a:solidFill>
-                <a:latin typeface="Arial"/>
-              </a:rPr>
-              <a:t>검증</a:t>
-            </a:r>
-            <a:r>
-              <a:rPr sz="950" b="1" dirty="0">
-                <a:solidFill>
-                  <a:schemeClr val="accent1">
-                    <a:lumMod val="40000"/>
-                    <a:lumOff val="60000"/>
-                  </a:schemeClr>
-                </a:solidFill>
-                <a:latin typeface="Arial"/>
-              </a:rPr>
-              <a:t> 100% </a:t>
-            </a:r>
-            <a:r>
-              <a:rPr sz="950" b="1" dirty="0" err="1">
-                <a:solidFill>
-                  <a:schemeClr val="accent1">
-                    <a:lumMod val="40000"/>
-                    <a:lumOff val="60000"/>
-                  </a:schemeClr>
-                </a:solidFill>
-                <a:latin typeface="Arial"/>
-              </a:rPr>
-              <a:t>통과</a:t>
-            </a:r>
-            <a:r>
-              <a:rPr sz="950" b="1" dirty="0">
-                <a:solidFill>
-                  <a:schemeClr val="accent1">
-                    <a:lumMod val="40000"/>
-                    <a:lumOff val="60000"/>
-                  </a:schemeClr>
-                </a:solidFill>
-                <a:latin typeface="Arial"/>
-              </a:rPr>
-              <a:t> </a:t>
-            </a:r>
-            <a:r>
-              <a:rPr sz="950" b="1" dirty="0" err="1">
-                <a:solidFill>
-                  <a:schemeClr val="accent1">
-                    <a:lumMod val="40000"/>
-                    <a:lumOff val="60000"/>
-                  </a:schemeClr>
-                </a:solidFill>
-                <a:latin typeface="Arial"/>
-              </a:rPr>
-              <a:t>코드가</a:t>
-            </a:r>
-            <a:r>
-              <a:rPr sz="950" b="1" dirty="0">
-                <a:solidFill>
-                  <a:schemeClr val="accent1">
-                    <a:lumMod val="40000"/>
-                    <a:lumOff val="60000"/>
-                  </a:schemeClr>
-                </a:solidFill>
-                <a:latin typeface="Arial"/>
-              </a:rPr>
-              <a:t> </a:t>
-            </a:r>
-            <a:r>
-              <a:rPr sz="950" b="1" dirty="0" err="1">
-                <a:solidFill>
-                  <a:schemeClr val="accent1">
-                    <a:lumMod val="40000"/>
-                    <a:lumOff val="60000"/>
-                  </a:schemeClr>
-                </a:solidFill>
-                <a:latin typeface="Arial"/>
-              </a:rPr>
-              <a:t>실행에서는</a:t>
-            </a:r>
-            <a:r>
-              <a:rPr sz="950" b="1" dirty="0">
-                <a:solidFill>
-                  <a:schemeClr val="accent1">
-                    <a:lumMod val="40000"/>
-                    <a:lumOff val="60000"/>
-                  </a:schemeClr>
-                </a:solidFill>
-                <a:latin typeface="Arial"/>
-              </a:rPr>
-              <a:t> </a:t>
-            </a:r>
-            <a:r>
-              <a:rPr sz="950" b="1" dirty="0" err="1">
-                <a:solidFill>
-                  <a:schemeClr val="accent1">
-                    <a:lumMod val="40000"/>
-                    <a:lumOff val="60000"/>
-                  </a:schemeClr>
-                </a:solidFill>
-                <a:latin typeface="Arial"/>
-              </a:rPr>
-              <a:t>동작</a:t>
-            </a:r>
-            <a:r>
-              <a:rPr sz="950" b="1" dirty="0">
-                <a:solidFill>
-                  <a:schemeClr val="accent1">
-                    <a:lumMod val="40000"/>
-                    <a:lumOff val="60000"/>
-                  </a:schemeClr>
-                </a:solidFill>
-                <a:latin typeface="Arial"/>
-              </a:rPr>
-              <a:t> </a:t>
-            </a:r>
-            <a:r>
-              <a:rPr sz="950" b="1" dirty="0" err="1">
-                <a:solidFill>
-                  <a:schemeClr val="accent1">
-                    <a:lumMod val="40000"/>
-                    <a:lumOff val="60000"/>
-                  </a:schemeClr>
-                </a:solidFill>
-                <a:latin typeface="Arial"/>
-              </a:rPr>
-              <a:t>불일치</a:t>
-            </a:r>
-            <a:r>
-              <a:rPr sz="950" b="1" dirty="0">
-                <a:solidFill>
-                  <a:schemeClr val="accent1">
-                    <a:lumMod val="40000"/>
-                    <a:lumOff val="60000"/>
-                  </a:schemeClr>
-                </a:solidFill>
-                <a:latin typeface="Arial"/>
-              </a:rPr>
-              <a:t> — </a:t>
-            </a:r>
-            <a:r>
-              <a:rPr sz="950" b="1" dirty="0" err="1">
-                <a:solidFill>
-                  <a:schemeClr val="accent1">
-                    <a:lumMod val="40000"/>
-                    <a:lumOff val="60000"/>
-                  </a:schemeClr>
-                </a:solidFill>
-                <a:latin typeface="Arial"/>
-              </a:rPr>
-              <a:t>검증</a:t>
-            </a:r>
-            <a:r>
-              <a:rPr sz="950" b="1" dirty="0">
-                <a:solidFill>
-                  <a:schemeClr val="accent1">
-                    <a:lumMod val="40000"/>
-                    <a:lumOff val="60000"/>
-                  </a:schemeClr>
-                </a:solidFill>
-                <a:latin typeface="Arial"/>
-              </a:rPr>
-              <a:t> </a:t>
-            </a:r>
-            <a:r>
-              <a:rPr sz="950" b="1" dirty="0" err="1">
-                <a:solidFill>
-                  <a:schemeClr val="accent1">
-                    <a:lumMod val="40000"/>
-                    <a:lumOff val="60000"/>
-                  </a:schemeClr>
-                </a:solidFill>
-                <a:latin typeface="Arial"/>
-              </a:rPr>
-              <a:t>수단</a:t>
-            </a:r>
-            <a:r>
-              <a:rPr sz="950" b="1" dirty="0">
-                <a:solidFill>
-                  <a:schemeClr val="accent1">
-                    <a:lumMod val="40000"/>
-                    <a:lumOff val="60000"/>
-                  </a:schemeClr>
-                </a:solidFill>
-                <a:latin typeface="Arial"/>
-              </a:rPr>
-              <a:t> </a:t>
-            </a:r>
-            <a:r>
-              <a:rPr sz="950" b="1" dirty="0" err="1">
-                <a:solidFill>
-                  <a:schemeClr val="accent1">
-                    <a:lumMod val="40000"/>
-                    <a:lumOff val="60000"/>
-                  </a:schemeClr>
-                </a:solidFill>
-                <a:latin typeface="Arial"/>
-              </a:rPr>
-              <a:t>자체가</a:t>
-            </a:r>
-            <a:r>
-              <a:rPr sz="950" b="1" dirty="0">
-                <a:solidFill>
-                  <a:schemeClr val="accent1">
-                    <a:lumMod val="40000"/>
-                    <a:lumOff val="60000"/>
-                  </a:schemeClr>
-                </a:solidFill>
-                <a:latin typeface="Arial"/>
-              </a:rPr>
-              <a:t> </a:t>
-            </a:r>
-            <a:r>
-              <a:rPr sz="950" b="1" dirty="0" err="1">
-                <a:solidFill>
-                  <a:schemeClr val="accent1">
-                    <a:lumMod val="40000"/>
-                    <a:lumOff val="60000"/>
-                  </a:schemeClr>
-                </a:solidFill>
-                <a:latin typeface="Arial"/>
-              </a:rPr>
-              <a:t>부재</a:t>
-            </a:r>
-            <a:endParaRPr lang="en-US" sz="1000" dirty="0">
-              <a:solidFill>
-                <a:schemeClr val="accent1">
-                  <a:lumMod val="40000"/>
-                  <a:lumOff val="60000"/>
-                </a:schemeClr>
-              </a:solidFill>
-            </a:endParaRPr>
+              <a:rPr sz="950" b="1">
+                <a:solidFill>
+                  <a:srgbClr val="333333"/>
+                </a:solidFill>
+                <a:latin typeface="Arial"/>
+              </a:rPr>
+              <a:t>검증과 실행의 간극 — 정적 검증 100% 통과 코드가 실행에서는 동작 불일치</a:t>
+            </a:r>
+            <a:endParaRPr lang="en-US" sz="1000" dirty="0"/>
           </a:p>
           <a:p>
             <a:pPr algn="l"/>
             <a:r>
-              <a:rPr sz="900" b="0" dirty="0" err="1">
+              <a:rPr sz="900" b="0">
                 <a:solidFill>
                   <a:srgbClr val="666666"/>
                 </a:solidFill>
                 <a:latin typeface="Arial"/>
               </a:rPr>
-              <a:t>AlphaTrans</a:t>
-            </a:r>
-            <a:r>
-              <a:rPr sz="900" b="0" dirty="0">
-                <a:solidFill>
-                  <a:srgbClr val="666666"/>
-                </a:solidFill>
-                <a:latin typeface="Arial"/>
-              </a:rPr>
-              <a:t>(FSE 2025) </a:t>
-            </a:r>
-            <a:r>
-              <a:rPr sz="900" b="0" dirty="0" err="1">
-                <a:solidFill>
-                  <a:srgbClr val="666666"/>
-                </a:solidFill>
-                <a:latin typeface="Arial"/>
-              </a:rPr>
-              <a:t>동일</a:t>
-            </a:r>
-            <a:r>
-              <a:rPr sz="900" b="0" dirty="0">
-                <a:solidFill>
-                  <a:srgbClr val="666666"/>
-                </a:solidFill>
-                <a:latin typeface="Arial"/>
-              </a:rPr>
-              <a:t> </a:t>
-            </a:r>
-            <a:r>
-              <a:rPr sz="900" b="0" dirty="0" err="1">
-                <a:solidFill>
-                  <a:srgbClr val="666666"/>
-                </a:solidFill>
-                <a:latin typeface="Arial"/>
-              </a:rPr>
-              <a:t>간극</a:t>
-            </a:r>
-            <a:r>
-              <a:rPr sz="900" b="0" dirty="0">
-                <a:solidFill>
-                  <a:srgbClr val="666666"/>
-                </a:solidFill>
-                <a:latin typeface="Arial"/>
-              </a:rPr>
-              <a:t> </a:t>
-            </a:r>
-            <a:r>
-              <a:rPr sz="900" b="0" dirty="0" err="1">
-                <a:solidFill>
-                  <a:srgbClr val="666666"/>
-                </a:solidFill>
-                <a:latin typeface="Arial"/>
-              </a:rPr>
-              <a:t>보고</a:t>
-            </a:r>
-            <a:r>
-              <a:rPr sz="900" b="0" dirty="0">
-                <a:solidFill>
-                  <a:srgbClr val="666666"/>
-                </a:solidFill>
-                <a:latin typeface="Arial"/>
-              </a:rPr>
-              <a:t> : </a:t>
-            </a:r>
-            <a:r>
-              <a:rPr sz="900" b="0" dirty="0" err="1">
-                <a:solidFill>
-                  <a:srgbClr val="666666"/>
-                </a:solidFill>
-                <a:latin typeface="Arial"/>
-              </a:rPr>
-              <a:t>문법</a:t>
-            </a:r>
-            <a:r>
-              <a:rPr sz="900" b="0" dirty="0">
-                <a:solidFill>
-                  <a:srgbClr val="666666"/>
-                </a:solidFill>
-                <a:latin typeface="Arial"/>
-              </a:rPr>
-              <a:t> 96.40%  vs  </a:t>
-            </a:r>
-            <a:r>
-              <a:rPr sz="900" b="0" dirty="0" err="1">
-                <a:solidFill>
-                  <a:srgbClr val="666666"/>
-                </a:solidFill>
-                <a:latin typeface="Arial"/>
-              </a:rPr>
-              <a:t>동작</a:t>
-            </a:r>
-            <a:r>
-              <a:rPr sz="900" b="0" dirty="0">
-                <a:solidFill>
-                  <a:srgbClr val="666666"/>
-                </a:solidFill>
-                <a:latin typeface="Arial"/>
-              </a:rPr>
-              <a:t> </a:t>
-            </a:r>
-            <a:r>
-              <a:rPr sz="900" b="0" dirty="0" err="1">
-                <a:solidFill>
-                  <a:srgbClr val="666666"/>
-                </a:solidFill>
-                <a:latin typeface="Arial"/>
-              </a:rPr>
-              <a:t>일치</a:t>
-            </a:r>
-            <a:r>
-              <a:rPr sz="900" b="0" dirty="0">
-                <a:solidFill>
-                  <a:srgbClr val="666666"/>
-                </a:solidFill>
-                <a:latin typeface="Arial"/>
-              </a:rPr>
-              <a:t> 25.14%</a:t>
+              <a:t>AlphaTrans(FSE 2025) 동일 간극 보고 : 문법 96.40%  vs  동작 일치 25.14%</a:t>
             </a:r>
           </a:p>
         </p:txBody>
@@ -7011,12 +6049,15 @@
           </a:p>
           <a:p>
             <a:pPr algn="l"/>
-            <a:endParaRPr sz="750" b="0">
-              <a:solidFill>
-                <a:srgbClr val="666666"/>
-              </a:solidFill>
-              <a:latin typeface="Arial"/>
-            </a:endParaRPr>
+            <a:r>
+              <a:rPr sz="300" b="0">
+                <a:solidFill>
+                  <a:srgbClr val="666666"/>
+                </a:solidFill>
+                <a:latin typeface="Arial"/>
+              </a:rPr>
+              <a:t/>
+            </a:r>
           </a:p>
           <a:p>
             <a:pPr algn="l"/>

--- a/docs/weekly/assets/최종발표장표.pptx
+++ b/docs/weekly/assets/최종발표장표.pptx
@@ -2301,7 +2301,7 @@
                 </a:solidFill>
                 <a:latin typeface="Arial"/>
               </a:rPr>
-              <a:t>생성 2,007줄 중 4줄 · AI 리뷰어 1차 기준 하한값</a:t>
+              <a:t>자동 생성 2,007줄 중 4줄만 수정</a:t>
             </a:r>
           </a:p>
         </p:txBody>
@@ -2452,7 +2452,7 @@
                 </a:solidFill>
                 <a:latin typeface="Arial"/>
               </a:rPr>
-              <a:t>전환 스코어카드 80.9 / 100  ·  측정 범위 확대로 88.2에서 하향</a:t>
+              <a:t>전환 스코어카드 80.9 / 100  ·  4축 11지표 가중 합산</a:t>
             </a:r>
           </a:p>
         </p:txBody>
@@ -5887,32 +5887,56 @@
                 </a:solidFill>
                 <a:latin typeface="Arial"/>
               </a:rPr>
-              <a:t>전제 재검토</a:t>
+              <a:t>전제 재검토 — 앱 기동이 아니라 메서드 호출 환경이면 됐다</a:t>
             </a:r>
             <a:endParaRPr lang="en-US" sz="900" dirty="0"/>
           </a:p>
           <a:p>
             <a:pPr algn="l"/>
             <a:r>
+              <a:rPr sz="850" b="1">
+                <a:solidFill>
+                  <a:srgbClr val="333333"/>
+                </a:solidFill>
+                <a:latin typeface="Arial"/>
+              </a:rPr>
+              <a:t>① 최소 실행 Harness</a:t>
+            </a:r>
+          </a:p>
+          <a:p>
+            <a:pPr algn="l"/>
+            <a:r>
               <a:rPr sz="750" b="0">
                 <a:solidFill>
                   <a:srgbClr val="666666"/>
                 </a:solidFill>
                 <a:latin typeface="Arial"/>
               </a:rPr>
-              <a:t>“실행 수단이 없다”가 오판 — 앱 기동이 아니라 메서드 호출 환경이면 됐다</a:t>
+              <a:t>데이터 계층을 양쪽 동일 고정값으로 → 차이는 포팅 차이만</a:t>
             </a:r>
           </a:p>
           <a:p>
             <a:pPr algn="l"/>
             <a:r>
+              <a:rPr sz="750" b="0">
+                <a:solidFill>
+                  <a:srgbClr val="666666"/>
+                </a:solidFill>
+                <a:latin typeface="Arial"/>
+              </a:rPr>
+              <a:t>0행 / 1행 / 3행으로 분기 전수</a:t>
+            </a:r>
+          </a:p>
+          <a:p>
+            <a:pPr algn="l"/>
+            <a:r>
               <a:rPr sz="850" b="1">
                 <a:solidFill>
                   <a:srgbClr val="333333"/>
                 </a:solidFill>
                 <a:latin typeface="Arial"/>
               </a:rPr>
-              <a:t>① 최소 실행 Harness</a:t>
+              <a:t>② 호출 대상 계약 JSON 주입</a:t>
             </a:r>
           </a:p>
           <a:p>
@@ -5924,31 +5948,55 @@
                 </a:solidFill>
                 <a:latin typeface="Arial"/>
               </a:rPr>
-              <a:t>데이터 계층을 양쪽 동일 고정값으로 → 차이는 포팅 차이만</a:t>
+              <a:t>실제 메서드명·반환 타입·결과 건수를 명시</a:t>
             </a:r>
           </a:p>
           <a:p>
             <a:pPr algn="l"/>
             <a:r>
+              <a:rPr sz="850" b="1">
+                <a:solidFill>
+                  <a:srgbClr val="333333"/>
+                </a:solidFill>
+                <a:latin typeface="Arial"/>
+              </a:rPr>
+              <a:t>③ ToT 교정 — 채점자 분리</a:t>
+            </a:r>
+          </a:p>
+          <a:p>
+            <a:pPr algn="l"/>
+            <a:r>
               <a:rPr sz="750" b="0">
                 <a:solidFill>
                   <a:srgbClr val="666666"/>
                 </a:solidFill>
                 <a:latin typeface="Arial"/>
               </a:rPr>
-              <a:t>0행 / 1행 / 3행으로 분기 전수</a:t>
+              <a:t>후보 병렬 생성, 규칙 기반 검증기가 채점</a:t>
             </a:r>
           </a:p>
           <a:p>
             <a:pPr algn="l"/>
             <a:r>
+              <a:rPr sz="750" b="0">
+                <a:solidFill>
+                  <a:srgbClr val="666666"/>
+                </a:solidFill>
+                <a:latin typeface="Arial"/>
+              </a:rPr>
+              <a:t>BLOCKER 10건 중 9건만 교정, 나머지는 사람에게</a:t>
+            </a:r>
+          </a:p>
+          <a:p>
+            <a:pPr algn="l"/>
+            <a:r>
               <a:rPr sz="850" b="1">
                 <a:solidFill>
                   <a:srgbClr val="333333"/>
                 </a:solidFill>
                 <a:latin typeface="Arial"/>
               </a:rPr>
-              <a:t>② 호출 대상 계약 JSON 주입</a:t>
+              <a:t>④ 판단 근거를 로그로</a:t>
             </a:r>
           </a:p>
           <a:p>
@@ -5960,7 +6008,7 @@
                 </a:solidFill>
                 <a:latin typeface="Arial"/>
               </a:rPr>
-              <a:t>실제 메서드명·반환 타입·결과 건수를 명시</a:t>
+              <a:t>모델이 원본 버그 2건을 스스로 지적</a:t>
             </a:r>
           </a:p>
           <a:p>
@@ -5972,7 +6020,7 @@
                 </a:solidFill>
                 <a:latin typeface="Arial"/>
               </a:rPr>
-              <a:t>③ ToT 교정 — 채점자 분리</a:t>
+              <a:t>⑤ 자동화하지 않을 것을 확정</a:t>
             </a:r>
           </a:p>
           <a:p>
@@ -5984,31 +6032,55 @@
                 </a:solidFill>
                 <a:latin typeface="Arial"/>
               </a:rPr>
-              <a:t>후보 병렬 생성, 규칙 기반 검증기가 채점</a:t>
+              <a:t>원본 결함은 보존·표시, 미확인 패턴에 규칙 생성 금지</a:t>
             </a:r>
           </a:p>
           <a:p>
             <a:pPr algn="l"/>
             <a:r>
+              <a:rPr sz="300" b="0">
+                <a:solidFill>
+                  <a:srgbClr val="666666"/>
+                </a:solidFill>
+                <a:latin typeface="Arial"/>
+              </a:rPr>
+              <a:t/>
+            </a:r>
+          </a:p>
+          <a:p>
+            <a:pPr algn="l"/>
+            <a:r>
+              <a:rPr sz="850" b="1">
+                <a:solidFill>
+                  <a:srgbClr val="B4621A"/>
+                </a:solidFill>
+                <a:latin typeface="Arial"/>
+              </a:rPr>
+              <a:t>확장 — 2차 적용 : 개발 표준 내재화</a:t>
+            </a:r>
+          </a:p>
+          <a:p>
+            <a:pPr algn="l"/>
+            <a:r>
               <a:rPr sz="750" b="0">
                 <a:solidFill>
                   <a:srgbClr val="666666"/>
                 </a:solidFill>
                 <a:latin typeface="Arial"/>
               </a:rPr>
-              <a:t>BLOCKER 10건 중 9건만 교정, 나머지는 사람에게</a:t>
+              <a:t>네이밍·계층 책임·예외 규약을 암묵지에서 규칙으로</a:t>
             </a:r>
           </a:p>
           <a:p>
             <a:pPr algn="l"/>
             <a:r>
-              <a:rPr sz="850" b="1">
-                <a:solidFill>
-                  <a:srgbClr val="333333"/>
-                </a:solidFill>
-                <a:latin typeface="Arial"/>
-              </a:rPr>
-              <a:t>④ 판단 근거를 로그로</a:t>
+              <a:rPr sz="750" b="0">
+                <a:solidFill>
+                  <a:srgbClr val="666666"/>
+                </a:solidFill>
+                <a:latin typeface="Arial"/>
+              </a:rPr>
+              <a:t>전환 직후 LLM이 표준 기준으로 한 번 더 검토</a:t>
             </a:r>
           </a:p>
           <a:p>
@@ -6020,87 +6092,15 @@
                 </a:solidFill>
                 <a:latin typeface="Arial"/>
               </a:rPr>
-              <a:t>모델이 원본 버그 2건을 스스로 지적</a:t>
+              <a:t>1,416화면이 개발자별로 갈리지 않게 만드는 지점</a:t>
             </a:r>
           </a:p>
           <a:p>
             <a:pPr algn="l"/>
             <a:r>
-              <a:rPr sz="850" b="1">
-                <a:solidFill>
-                  <a:srgbClr val="333333"/>
-                </a:solidFill>
-                <a:latin typeface="Arial"/>
-              </a:rPr>
-              <a:t>⑤ 자동화하지 않을 것을 확정</a:t>
-            </a:r>
-          </a:p>
-          <a:p>
-            <a:pPr algn="l"/>
-            <a:r>
-              <a:rPr sz="750" b="0">
-                <a:solidFill>
-                  <a:srgbClr val="666666"/>
-                </a:solidFill>
-                <a:latin typeface="Arial"/>
-              </a:rPr>
-              <a:t>원본 결함은 보존·표시, 미확인 패턴에 규칙 생성 금지</a:t>
-            </a:r>
-          </a:p>
-          <a:p>
-            <a:pPr algn="l"/>
-            <a:r>
-              <a:rPr sz="300" b="0">
-                <a:solidFill>
-                  <a:srgbClr val="666666"/>
-                </a:solidFill>
-                <a:latin typeface="Arial"/>
-              </a:rPr>
-              <a:t/>
-            </a:r>
-          </a:p>
-          <a:p>
-            <a:pPr algn="l"/>
-            <a:r>
-              <a:rPr sz="850" b="1">
+              <a:rPr sz="750" b="1">
                 <a:solidFill>
                   <a:srgbClr val="B4621A"/>
-                </a:solidFill>
-                <a:latin typeface="Arial"/>
-              </a:rPr>
-              <a:t>2차 적용 — 개발 표준 내재화</a:t>
-            </a:r>
-          </a:p>
-          <a:p>
-            <a:pPr algn="l"/>
-            <a:r>
-              <a:rPr sz="750" b="0">
-                <a:solidFill>
-                  <a:srgbClr val="666666"/>
-                </a:solidFill>
-                <a:latin typeface="Arial"/>
-              </a:rPr>
-              <a:t>네이밍·계층 책임·예외 규약을 암묵지에서 규칙으로</a:t>
-            </a:r>
-          </a:p>
-          <a:p>
-            <a:pPr algn="l"/>
-            <a:r>
-              <a:rPr sz="750" b="0">
-                <a:solidFill>
-                  <a:srgbClr val="666666"/>
-                </a:solidFill>
-                <a:latin typeface="Arial"/>
-              </a:rPr>
-              <a:t>전환 직후 LLM이 표준 기준으로 한 번 더 검토</a:t>
-            </a:r>
-          </a:p>
-          <a:p>
-            <a:pPr algn="l"/>
-            <a:r>
-              <a:rPr sz="750" b="0">
-                <a:solidFill>
-                  <a:srgbClr val="666666"/>
                 </a:solidFill>
                 <a:latin typeface="Arial"/>
               </a:rPr>
@@ -6446,7 +6446,7 @@
                   </a:solidFill>
                   <a:latin typeface="Arial"/>
                 </a:rPr>
-                <a:t>※ 실행 가능한 3화면 기준 (2화면은 원본 컴파일 불가)</a:t>
+                <a:t>컴파일·정적 검증이 못 잡는 의미 차이를 실행이 잡아냈다</a:t>
               </a:r>
             </a:p>
           </p:txBody>
@@ -6608,7 +6608,7 @@
                   </a:solidFill>
                   <a:latin typeface="Arial"/>
                 </a:rPr>
-                <a:t>※ 메시지 키는 0/9 — 응답 규약 미확정, 지어내지 않음</a:t>
+                <a:t>권한 게이트·레코드셋 선별이 살아나 누수가 사라졌다</a:t>
               </a:r>
             </a:p>
           </p:txBody>

--- a/docs/weekly/assets/최종발표장표.pptx
+++ b/docs/weekly/assets/최종발표장표.pptx
@@ -5984,7 +5984,7 @@
                 </a:solidFill>
                 <a:latin typeface="Arial"/>
               </a:rPr>
-              <a:t>BLOCKER 10건 중 9건만 교정, 나머지는 사람에게</a:t>
+              <a:t>고칠 것과 사람이 볼 것을 게이트가 가른다</a:t>
             </a:r>
           </a:p>
           <a:p>
